--- a/docs/pitch_deck_tiering.pptx
+++ b/docs/pitch_deck_tiering.pptx
@@ -18,6 +18,7 @@
     <p:sldId id="266" r:id="rId17"/>
     <p:sldId id="267" r:id="rId18"/>
     <p:sldId id="268" r:id="rId19"/>
+    <p:sldId id="269" r:id="rId20"/>
   </p:sldIdLst>
   <p:sldSz cx="12191695" cy="6858000" type="screen4x3"/>
   <p:notesSz cx="6858000" cy="9144000"/>
@@ -3277,7 +3278,7 @@
               </a:defRPr>
             </a:pPr>
             <a:r>
-              <a:t>9. 실행 의미론 (v4) — 타임라인으로 보기</a:t>
+              <a:t>9. 학습 방법론 — '티어링 실행권'을 사는 3요소</a:t>
             </a:r>
           </a:p>
           <a:p>
@@ -3289,7 +3290,7 @@
               </a:defRPr>
             </a:pPr>
             <a:r>
-              <a:t>hot은 항상 최신, cold는 'snapshot + 감쇠 보상'으로 읽고 c마다 정확히 따라잡음</a:t>
+              <a:t>총 수 GPU-시간, 백본 동결, R만 학습</a:t>
             </a:r>
           </a:p>
         </p:txBody>
@@ -3302,18 +3303,18 @@
         </p:nvSpPr>
         <p:spPr>
           <a:xfrm>
-            <a:off x="731520" y="1463040"/>
-            <a:ext cx="777240" cy="548640"/>
+            <a:off x="640080" y="1325880"/>
+            <a:ext cx="3566160" cy="1737360"/>
           </a:xfrm>
           <a:prstGeom prst="roundRect">
             <a:avLst/>
           </a:prstGeom>
           <a:solidFill>
-            <a:srgbClr val="FFFFFF"/>
+            <a:srgbClr val="FFF7ED"/>
           </a:solidFill>
           <a:ln w="17780">
             <a:solidFill>
-              <a:srgbClr val="666666"/>
+              <a:srgbClr val="C2410C"/>
             </a:solidFill>
           </a:ln>
         </p:spPr>
@@ -3336,14 +3337,71 @@
           <a:lstStyle/>
           <a:p>
             <a:pPr algn="ctr">
-              <a:defRPr sz="1100" b="0">
-                <a:solidFill>
-                  <a:srgbClr val="111111"/>
-                </a:solidFill>
-              </a:defRPr>
-            </a:pPr>
-            <a:r>
-              <a:t>t=1</a:t>
+              <a:defRPr sz="1200" b="0">
+                <a:solidFill>
+                  <a:srgbClr val="111111"/>
+                </a:solidFill>
+              </a:defRPr>
+            </a:pPr>
+            <a:r>
+              <a:t>① Nested 폭 메뉴</a:t>
+            </a:r>
+          </a:p>
+          <a:p>
+            <a:pPr algn="ctr">
+              <a:defRPr sz="1200" b="0">
+                <a:solidFill>
+                  <a:srgbClr val="111111"/>
+                </a:solidFill>
+              </a:defRPr>
+            </a:pPr>
+            <a:r>
+              <a:t>(정렬을 만드는 힘)</a:t>
+            </a:r>
+          </a:p>
+          <a:p>
+            <a:pPr algn="ctr">
+              <a:defRPr sz="1200" b="0">
+                <a:solidFill>
+                  <a:srgbClr val="111111"/>
+                </a:solidFill>
+              </a:defRPr>
+            </a:pPr>
+          </a:p>
+          <a:p>
+            <a:pPr algn="ctr">
+              <a:defRPr sz="1200" b="0">
+                <a:solidFill>
+                  <a:srgbClr val="111111"/>
+                </a:solidFill>
+              </a:defRPr>
+            </a:pPr>
+            <a:r>
+              <a:t>스텝마다 폭 k ∈ {16,32,64,128} 추첨</a:t>
+            </a:r>
+          </a:p>
+          <a:p>
+            <a:pPr algn="ctr">
+              <a:defRPr sz="1200" b="0">
+                <a:solidFill>
+                  <a:srgbClr val="111111"/>
+                </a:solidFill>
+              </a:defRPr>
+            </a:pPr>
+            <a:r>
+              <a:t>→ 앞 좌표일수록 자주 loss에 노출</a:t>
+            </a:r>
+          </a:p>
+          <a:p>
+            <a:pPr algn="ctr">
+              <a:defRPr sz="1200" b="0">
+                <a:solidFill>
+                  <a:srgbClr val="111111"/>
+                </a:solidFill>
+              </a:defRPr>
+            </a:pPr>
+            <a:r>
+              <a:t>= 암묵적 '중요도 투표'</a:t>
             </a:r>
           </a:p>
         </p:txBody>
@@ -3356,18 +3414,18 @@
         </p:nvSpPr>
         <p:spPr>
           <a:xfrm>
-            <a:off x="1691640" y="1463040"/>
-            <a:ext cx="777240" cy="548640"/>
+            <a:off x="4389120" y="1325880"/>
+            <a:ext cx="3566160" cy="1737360"/>
           </a:xfrm>
           <a:prstGeom prst="roundRect">
             <a:avLst/>
           </a:prstGeom>
           <a:solidFill>
-            <a:srgbClr val="FFFFFF"/>
+            <a:srgbClr val="DBEAFE"/>
           </a:solidFill>
           <a:ln w="17780">
             <a:solidFill>
-              <a:srgbClr val="666666"/>
+              <a:srgbClr val="1F77B4"/>
             </a:solidFill>
           </a:ln>
         </p:spPr>
@@ -3390,14 +3448,71 @@
           <a:lstStyle/>
           <a:p>
             <a:pPr algn="ctr">
-              <a:defRPr sz="1100" b="0">
-                <a:solidFill>
-                  <a:srgbClr val="111111"/>
-                </a:solidFill>
-              </a:defRPr>
-            </a:pPr>
-            <a:r>
-              <a:t>t=2</a:t>
+              <a:defRPr sz="1200" b="0">
+                <a:solidFill>
+                  <a:srgbClr val="111111"/>
+                </a:solidFill>
+              </a:defRPr>
+            </a:pPr>
+            <a:r>
+              <a:t>② v4-aware 학습</a:t>
+            </a:r>
+          </a:p>
+          <a:p>
+            <a:pPr algn="ctr">
+              <a:defRPr sz="1200" b="0">
+                <a:solidFill>
+                  <a:srgbClr val="111111"/>
+                </a:solidFill>
+              </a:defRPr>
+            </a:pPr>
+            <a:r>
+              <a:t>(staleness 내성)</a:t>
+            </a:r>
+          </a:p>
+          <a:p>
+            <a:pPr algn="ctr">
+              <a:defRPr sz="1200" b="0">
+                <a:solidFill>
+                  <a:srgbClr val="111111"/>
+                </a:solidFill>
+              </a:defRPr>
+            </a:pPr>
+          </a:p>
+          <a:p>
+            <a:pPr algn="ctr">
+              <a:defRPr sz="1200" b="0">
+                <a:solidFill>
+                  <a:srgbClr val="111111"/>
+                </a:solidFill>
+              </a:defRPr>
+            </a:pPr>
+            <a:r>
+              <a:t>스텝의 절반을 tiered forward로</a:t>
+            </a:r>
+          </a:p>
+          <a:p>
+            <a:pPr algn="ctr">
+              <a:defRPr sz="1200" b="0">
+                <a:solidFill>
+                  <a:srgbClr val="111111"/>
+                </a:solidFill>
+              </a:defRPr>
+            </a:pPr>
+            <a:r>
+              <a:t>(c ∈ {4..64} 추첨)</a:t>
+            </a:r>
+          </a:p>
+          <a:p>
+            <a:pPr algn="ctr">
+              <a:defRPr sz="1200" b="0">
+                <a:solidFill>
+                  <a:srgbClr val="111111"/>
+                </a:solidFill>
+              </a:defRPr>
+            </a:pPr>
+            <a:r>
+              <a:t>→ 모델이 낡은 cold 읽기에 적응</a:t>
             </a:r>
           </a:p>
         </p:txBody>
@@ -3410,18 +3525,18 @@
         </p:nvSpPr>
         <p:spPr>
           <a:xfrm>
-            <a:off x="2651760" y="1463040"/>
-            <a:ext cx="777240" cy="548640"/>
+            <a:off x="8138160" y="1325880"/>
+            <a:ext cx="3566160" cy="1737360"/>
           </a:xfrm>
           <a:prstGeom prst="roundRect">
             <a:avLst/>
           </a:prstGeom>
           <a:solidFill>
-            <a:srgbClr val="FFFFFF"/>
+            <a:srgbClr val="D1FAE5"/>
           </a:solidFill>
           <a:ln w="17780">
             <a:solidFill>
-              <a:srgbClr val="666666"/>
+              <a:srgbClr val="047857"/>
             </a:solidFill>
           </a:ln>
         </p:spPr>
@@ -3444,39 +3559,94 @@
           <a:lstStyle/>
           <a:p>
             <a:pPr algn="ctr">
-              <a:defRPr sz="1100" b="0">
-                <a:solidFill>
-                  <a:srgbClr val="111111"/>
-                </a:solidFill>
-              </a:defRPr>
-            </a:pPr>
-            <a:r>
-              <a:t>t=3</a:t>
-            </a:r>
-          </a:p>
-        </p:txBody>
-      </p:sp>
-      <p:sp>
-        <p:nvSpPr>
-          <p:cNvPr id="6" name="Rounded Rectangle 5"/>
+              <a:defRPr sz="1200" b="0">
+                <a:solidFill>
+                  <a:srgbClr val="111111"/>
+                </a:solidFill>
+              </a:defRPr>
+            </a:pPr>
+            <a:r>
+              <a:t>③ QR retraction</a:t>
+            </a:r>
+          </a:p>
+          <a:p>
+            <a:pPr algn="ctr">
+              <a:defRPr sz="1200" b="0">
+                <a:solidFill>
+                  <a:srgbClr val="111111"/>
+                </a:solidFill>
+              </a:defRPr>
+            </a:pPr>
+            <a:r>
+              <a:t>(무손실 보장 유지)</a:t>
+            </a:r>
+          </a:p>
+          <a:p>
+            <a:pPr algn="ctr">
+              <a:defRPr sz="1200" b="0">
+                <a:solidFill>
+                  <a:srgbClr val="111111"/>
+                </a:solidFill>
+              </a:defRPr>
+            </a:pPr>
+          </a:p>
+          <a:p>
+            <a:pPr algn="ctr">
+              <a:defRPr sz="1200" b="0">
+                <a:solidFill>
+                  <a:srgbClr val="111111"/>
+                </a:solidFill>
+              </a:defRPr>
+            </a:pPr>
+            <a:r>
+              <a:t>매 스텝 R을 직교 다양체로 사영</a:t>
+            </a:r>
+          </a:p>
+          <a:p>
+            <a:pPr algn="ctr">
+              <a:defRPr sz="1200" b="0">
+                <a:solidFill>
+                  <a:srgbClr val="111111"/>
+                </a:solidFill>
+              </a:defRPr>
+            </a:pPr>
+            <a:r>
+              <a:t>→ 명제 1의 전제(RᵀR=I)가</a:t>
+            </a:r>
+          </a:p>
+          <a:p>
+            <a:pPr algn="ctr">
+              <a:defRPr sz="1200" b="0">
+                <a:solidFill>
+                  <a:srgbClr val="111111"/>
+                </a:solidFill>
+              </a:defRPr>
+            </a:pPr>
+            <a:r>
+              <a:t>학습 내내 정확히 성립</a:t>
+            </a:r>
+          </a:p>
+        </p:txBody>
+      </p:sp>
+      <p:sp>
+        <p:nvSpPr>
+          <p:cNvPr id="6" name="Down Arrow 5"/>
           <p:cNvSpPr/>
           <p:nvPr/>
         </p:nvSpPr>
         <p:spPr>
           <a:xfrm>
-            <a:off x="3611880" y="1463040"/>
-            <a:ext cx="777240" cy="548640"/>
-          </a:xfrm>
-          <a:prstGeom prst="roundRect">
-            <a:avLst/>
-          </a:prstGeom>
-          <a:solidFill>
-            <a:srgbClr val="FFFFFF"/>
-          </a:solidFill>
-          <a:ln w="17780">
-            <a:solidFill>
-              <a:srgbClr val="666666"/>
-            </a:solidFill>
+            <a:off x="5943600" y="3200400"/>
+            <a:ext cx="274320" cy="457200"/>
+          </a:xfrm>
+          <a:prstGeom prst="downArrow">
+            <a:avLst/>
+          </a:prstGeom>
+          <a:solidFill>
+            <a:srgbClr val="666666"/>
+          </a:solidFill>
+          <a:ln>
+            <a:noFill/>
           </a:ln>
         </p:spPr>
         <p:style>
@@ -3494,19 +3664,10 @@
           </a:fontRef>
         </p:style>
         <p:txBody>
-          <a:bodyPr rtlCol="0" anchor="ctr" wrap="square" lIns="45720" rIns="45720" tIns="22860" bIns="22860"/>
-          <a:lstStyle/>
-          <a:p>
-            <a:pPr algn="ctr">
-              <a:defRPr sz="1100" b="0">
-                <a:solidFill>
-                  <a:srgbClr val="111111"/>
-                </a:solidFill>
-              </a:defRPr>
-            </a:pPr>
-            <a:r>
-              <a:t>t=4</a:t>
-            </a:r>
+          <a:bodyPr rtlCol="0" anchor="ctr"/>
+          <a:lstStyle/>
+          <a:p>
+            <a:pPr algn="ctr"/>
           </a:p>
         </p:txBody>
       </p:sp>
@@ -3518,18 +3679,18 @@
         </p:nvSpPr>
         <p:spPr>
           <a:xfrm>
-            <a:off x="4572000" y="1463040"/>
-            <a:ext cx="777240" cy="548640"/>
+            <a:off x="640080" y="3794760"/>
+            <a:ext cx="11064240" cy="868680"/>
           </a:xfrm>
           <a:prstGeom prst="roundRect">
             <a:avLst/>
           </a:prstGeom>
           <a:solidFill>
-            <a:srgbClr val="FFFFFF"/>
+            <a:srgbClr val="D1FAE5"/>
           </a:solidFill>
           <a:ln w="17780">
             <a:solidFill>
-              <a:srgbClr val="666666"/>
+              <a:srgbClr val="047857"/>
             </a:solidFill>
           </a:ln>
         </p:spPr>
@@ -3552,836 +3713,28 @@
           <a:lstStyle/>
           <a:p>
             <a:pPr algn="ctr">
-              <a:defRPr sz="1100" b="0">
-                <a:solidFill>
-                  <a:srgbClr val="111111"/>
-                </a:solidFill>
-              </a:defRPr>
-            </a:pPr>
-            <a:r>
-              <a:t>t=5</a:t>
-            </a:r>
-          </a:p>
-        </p:txBody>
-      </p:sp>
-      <p:sp>
-        <p:nvSpPr>
-          <p:cNvPr id="8" name="Rounded Rectangle 7"/>
-          <p:cNvSpPr/>
-          <p:nvPr/>
-        </p:nvSpPr>
-        <p:spPr>
-          <a:xfrm>
-            <a:off x="5532120" y="1463040"/>
-            <a:ext cx="777240" cy="548640"/>
-          </a:xfrm>
-          <a:prstGeom prst="roundRect">
-            <a:avLst/>
-          </a:prstGeom>
-          <a:solidFill>
-            <a:srgbClr val="FFFFFF"/>
-          </a:solidFill>
-          <a:ln w="17780">
-            <a:solidFill>
-              <a:srgbClr val="666666"/>
-            </a:solidFill>
-          </a:ln>
-        </p:spPr>
-        <p:style>
-          <a:lnRef idx="1">
-            <a:schemeClr val="accent1"/>
-          </a:lnRef>
-          <a:fillRef idx="3">
-            <a:schemeClr val="accent1"/>
-          </a:fillRef>
-          <a:effectRef idx="2">
-            <a:schemeClr val="accent1"/>
-          </a:effectRef>
-          <a:fontRef idx="minor">
-            <a:schemeClr val="lt1"/>
-          </a:fontRef>
-        </p:style>
-        <p:txBody>
-          <a:bodyPr rtlCol="0" anchor="ctr" wrap="square" lIns="45720" rIns="45720" tIns="22860" bIns="22860"/>
-          <a:lstStyle/>
-          <a:p>
-            <a:pPr algn="ctr">
-              <a:defRPr sz="1100" b="0">
-                <a:solidFill>
-                  <a:srgbClr val="111111"/>
-                </a:solidFill>
-              </a:defRPr>
-            </a:pPr>
-            <a:r>
-              <a:t>t=6</a:t>
-            </a:r>
-          </a:p>
-        </p:txBody>
-      </p:sp>
-      <p:sp>
-        <p:nvSpPr>
-          <p:cNvPr id="9" name="Rounded Rectangle 8"/>
-          <p:cNvSpPr/>
-          <p:nvPr/>
-        </p:nvSpPr>
-        <p:spPr>
-          <a:xfrm>
-            <a:off x="6492240" y="1463040"/>
-            <a:ext cx="777240" cy="548640"/>
-          </a:xfrm>
-          <a:prstGeom prst="roundRect">
-            <a:avLst/>
-          </a:prstGeom>
-          <a:solidFill>
-            <a:srgbClr val="FFFFFF"/>
-          </a:solidFill>
-          <a:ln w="17780">
-            <a:solidFill>
-              <a:srgbClr val="666666"/>
-            </a:solidFill>
-          </a:ln>
-        </p:spPr>
-        <p:style>
-          <a:lnRef idx="1">
-            <a:schemeClr val="accent1"/>
-          </a:lnRef>
-          <a:fillRef idx="3">
-            <a:schemeClr val="accent1"/>
-          </a:fillRef>
-          <a:effectRef idx="2">
-            <a:schemeClr val="accent1"/>
-          </a:effectRef>
-          <a:fontRef idx="minor">
-            <a:schemeClr val="lt1"/>
-          </a:fontRef>
-        </p:style>
-        <p:txBody>
-          <a:bodyPr rtlCol="0" anchor="ctr" wrap="square" lIns="45720" rIns="45720" tIns="22860" bIns="22860"/>
-          <a:lstStyle/>
-          <a:p>
-            <a:pPr algn="ctr">
-              <a:defRPr sz="1100" b="0">
-                <a:solidFill>
-                  <a:srgbClr val="111111"/>
-                </a:solidFill>
-              </a:defRPr>
-            </a:pPr>
-            <a:r>
-              <a:t>t=7</a:t>
-            </a:r>
-          </a:p>
-        </p:txBody>
-      </p:sp>
-      <p:sp>
-        <p:nvSpPr>
-          <p:cNvPr id="10" name="Rounded Rectangle 9"/>
-          <p:cNvSpPr/>
-          <p:nvPr/>
-        </p:nvSpPr>
-        <p:spPr>
-          <a:xfrm>
-            <a:off x="7452360" y="1463040"/>
-            <a:ext cx="777240" cy="548640"/>
-          </a:xfrm>
-          <a:prstGeom prst="roundRect">
-            <a:avLst/>
-          </a:prstGeom>
-          <a:solidFill>
-            <a:srgbClr val="FFFFFF"/>
-          </a:solidFill>
-          <a:ln w="17780">
-            <a:solidFill>
-              <a:srgbClr val="666666"/>
-            </a:solidFill>
-          </a:ln>
-        </p:spPr>
-        <p:style>
-          <a:lnRef idx="1">
-            <a:schemeClr val="accent1"/>
-          </a:lnRef>
-          <a:fillRef idx="3">
-            <a:schemeClr val="accent1"/>
-          </a:fillRef>
-          <a:effectRef idx="2">
-            <a:schemeClr val="accent1"/>
-          </a:effectRef>
-          <a:fontRef idx="minor">
-            <a:schemeClr val="lt1"/>
-          </a:fontRef>
-        </p:style>
-        <p:txBody>
-          <a:bodyPr rtlCol="0" anchor="ctr" wrap="square" lIns="45720" rIns="45720" tIns="22860" bIns="22860"/>
-          <a:lstStyle/>
-          <a:p>
-            <a:pPr algn="ctr">
-              <a:defRPr sz="1100" b="0">
-                <a:solidFill>
-                  <a:srgbClr val="111111"/>
-                </a:solidFill>
-              </a:defRPr>
-            </a:pPr>
-            <a:r>
-              <a:t>t=8</a:t>
-            </a:r>
-          </a:p>
-        </p:txBody>
-      </p:sp>
-      <p:sp>
-        <p:nvSpPr>
-          <p:cNvPr id="11" name="Rounded Rectangle 10"/>
-          <p:cNvSpPr/>
-          <p:nvPr/>
-        </p:nvSpPr>
-        <p:spPr>
-          <a:xfrm>
-            <a:off x="8778240" y="1463040"/>
-            <a:ext cx="2834640" cy="548640"/>
-          </a:xfrm>
-          <a:prstGeom prst="roundRect">
-            <a:avLst/>
-          </a:prstGeom>
-          <a:solidFill>
-            <a:srgbClr val="FEE2E2"/>
-          </a:solidFill>
-          <a:ln w="17780">
-            <a:solidFill>
-              <a:srgbClr val="D62728"/>
-            </a:solidFill>
-          </a:ln>
-        </p:spPr>
-        <p:style>
-          <a:lnRef idx="1">
-            <a:schemeClr val="accent1"/>
-          </a:lnRef>
-          <a:fillRef idx="3">
-            <a:schemeClr val="accent1"/>
-          </a:fillRef>
-          <a:effectRef idx="2">
-            <a:schemeClr val="accent1"/>
-          </a:effectRef>
-          <a:fontRef idx="minor">
-            <a:schemeClr val="lt1"/>
-          </a:fontRef>
-        </p:style>
-        <p:txBody>
-          <a:bodyPr rtlCol="0" anchor="ctr" wrap="square" lIns="45720" rIns="45720" tIns="22860" bIns="22860"/>
-          <a:lstStyle/>
-          <a:p>
-            <a:pPr algn="ctr">
-              <a:defRPr sz="1100" b="1">
-                <a:solidFill>
-                  <a:srgbClr val="111111"/>
-                </a:solidFill>
-              </a:defRPr>
-            </a:pPr>
-            <a:r>
-              <a:t>HOT: 매 토큰 R/W</a:t>
-            </a:r>
-          </a:p>
-        </p:txBody>
-      </p:sp>
-      <p:sp>
-        <p:nvSpPr>
-          <p:cNvPr id="12" name="Down Arrow 11"/>
-          <p:cNvSpPr/>
-          <p:nvPr/>
-        </p:nvSpPr>
-        <p:spPr>
-          <a:xfrm>
-            <a:off x="987552" y="2103120"/>
-            <a:ext cx="228600" cy="411480"/>
-          </a:xfrm>
-          <a:prstGeom prst="downArrow">
-            <a:avLst/>
-          </a:prstGeom>
-          <a:solidFill>
-            <a:srgbClr val="D62728"/>
-          </a:solidFill>
-          <a:ln>
-            <a:noFill/>
-          </a:ln>
-        </p:spPr>
-        <p:style>
-          <a:lnRef idx="1">
-            <a:schemeClr val="accent1"/>
-          </a:lnRef>
-          <a:fillRef idx="3">
-            <a:schemeClr val="accent1"/>
-          </a:fillRef>
-          <a:effectRef idx="2">
-            <a:schemeClr val="accent1"/>
-          </a:effectRef>
-          <a:fontRef idx="minor">
-            <a:schemeClr val="lt1"/>
-          </a:fontRef>
-        </p:style>
-        <p:txBody>
-          <a:bodyPr rtlCol="0" anchor="ctr"/>
-          <a:lstStyle/>
-          <a:p>
-            <a:pPr algn="ctr"/>
-          </a:p>
-        </p:txBody>
-      </p:sp>
-      <p:sp>
-        <p:nvSpPr>
-          <p:cNvPr id="13" name="Down Arrow 12"/>
-          <p:cNvSpPr/>
-          <p:nvPr/>
-        </p:nvSpPr>
-        <p:spPr>
-          <a:xfrm>
-            <a:off x="1947672" y="2103120"/>
-            <a:ext cx="228600" cy="411480"/>
-          </a:xfrm>
-          <a:prstGeom prst="downArrow">
-            <a:avLst/>
-          </a:prstGeom>
-          <a:solidFill>
-            <a:srgbClr val="D62728"/>
-          </a:solidFill>
-          <a:ln>
-            <a:noFill/>
-          </a:ln>
-        </p:spPr>
-        <p:style>
-          <a:lnRef idx="1">
-            <a:schemeClr val="accent1"/>
-          </a:lnRef>
-          <a:fillRef idx="3">
-            <a:schemeClr val="accent1"/>
-          </a:fillRef>
-          <a:effectRef idx="2">
-            <a:schemeClr val="accent1"/>
-          </a:effectRef>
-          <a:fontRef idx="minor">
-            <a:schemeClr val="lt1"/>
-          </a:fontRef>
-        </p:style>
-        <p:txBody>
-          <a:bodyPr rtlCol="0" anchor="ctr"/>
-          <a:lstStyle/>
-          <a:p>
-            <a:pPr algn="ctr"/>
-          </a:p>
-        </p:txBody>
-      </p:sp>
-      <p:sp>
-        <p:nvSpPr>
-          <p:cNvPr id="14" name="Down Arrow 13"/>
-          <p:cNvSpPr/>
-          <p:nvPr/>
-        </p:nvSpPr>
-        <p:spPr>
-          <a:xfrm>
-            <a:off x="2907792" y="2103120"/>
-            <a:ext cx="228600" cy="411480"/>
-          </a:xfrm>
-          <a:prstGeom prst="downArrow">
-            <a:avLst/>
-          </a:prstGeom>
-          <a:solidFill>
-            <a:srgbClr val="D62728"/>
-          </a:solidFill>
-          <a:ln>
-            <a:noFill/>
-          </a:ln>
-        </p:spPr>
-        <p:style>
-          <a:lnRef idx="1">
-            <a:schemeClr val="accent1"/>
-          </a:lnRef>
-          <a:fillRef idx="3">
-            <a:schemeClr val="accent1"/>
-          </a:fillRef>
-          <a:effectRef idx="2">
-            <a:schemeClr val="accent1"/>
-          </a:effectRef>
-          <a:fontRef idx="minor">
-            <a:schemeClr val="lt1"/>
-          </a:fontRef>
-        </p:style>
-        <p:txBody>
-          <a:bodyPr rtlCol="0" anchor="ctr"/>
-          <a:lstStyle/>
-          <a:p>
-            <a:pPr algn="ctr"/>
-          </a:p>
-        </p:txBody>
-      </p:sp>
-      <p:sp>
-        <p:nvSpPr>
-          <p:cNvPr id="15" name="Down Arrow 14"/>
-          <p:cNvSpPr/>
-          <p:nvPr/>
-        </p:nvSpPr>
-        <p:spPr>
-          <a:xfrm>
-            <a:off x="3867912" y="2103120"/>
-            <a:ext cx="228600" cy="411480"/>
-          </a:xfrm>
-          <a:prstGeom prst="downArrow">
-            <a:avLst/>
-          </a:prstGeom>
-          <a:solidFill>
-            <a:srgbClr val="D62728"/>
-          </a:solidFill>
-          <a:ln>
-            <a:noFill/>
-          </a:ln>
-        </p:spPr>
-        <p:style>
-          <a:lnRef idx="1">
-            <a:schemeClr val="accent1"/>
-          </a:lnRef>
-          <a:fillRef idx="3">
-            <a:schemeClr val="accent1"/>
-          </a:fillRef>
-          <a:effectRef idx="2">
-            <a:schemeClr val="accent1"/>
-          </a:effectRef>
-          <a:fontRef idx="minor">
-            <a:schemeClr val="lt1"/>
-          </a:fontRef>
-        </p:style>
-        <p:txBody>
-          <a:bodyPr rtlCol="0" anchor="ctr"/>
-          <a:lstStyle/>
-          <a:p>
-            <a:pPr algn="ctr"/>
-          </a:p>
-        </p:txBody>
-      </p:sp>
-      <p:sp>
-        <p:nvSpPr>
-          <p:cNvPr id="16" name="Down Arrow 15"/>
-          <p:cNvSpPr/>
-          <p:nvPr/>
-        </p:nvSpPr>
-        <p:spPr>
-          <a:xfrm>
-            <a:off x="4828032" y="2103120"/>
-            <a:ext cx="228600" cy="411480"/>
-          </a:xfrm>
-          <a:prstGeom prst="downArrow">
-            <a:avLst/>
-          </a:prstGeom>
-          <a:solidFill>
-            <a:srgbClr val="D62728"/>
-          </a:solidFill>
-          <a:ln>
-            <a:noFill/>
-          </a:ln>
-        </p:spPr>
-        <p:style>
-          <a:lnRef idx="1">
-            <a:schemeClr val="accent1"/>
-          </a:lnRef>
-          <a:fillRef idx="3">
-            <a:schemeClr val="accent1"/>
-          </a:fillRef>
-          <a:effectRef idx="2">
-            <a:schemeClr val="accent1"/>
-          </a:effectRef>
-          <a:fontRef idx="minor">
-            <a:schemeClr val="lt1"/>
-          </a:fontRef>
-        </p:style>
-        <p:txBody>
-          <a:bodyPr rtlCol="0" anchor="ctr"/>
-          <a:lstStyle/>
-          <a:p>
-            <a:pPr algn="ctr"/>
-          </a:p>
-        </p:txBody>
-      </p:sp>
-      <p:sp>
-        <p:nvSpPr>
-          <p:cNvPr id="17" name="Down Arrow 16"/>
-          <p:cNvSpPr/>
-          <p:nvPr/>
-        </p:nvSpPr>
-        <p:spPr>
-          <a:xfrm>
-            <a:off x="5788152" y="2103120"/>
-            <a:ext cx="228600" cy="411480"/>
-          </a:xfrm>
-          <a:prstGeom prst="downArrow">
-            <a:avLst/>
-          </a:prstGeom>
-          <a:solidFill>
-            <a:srgbClr val="D62728"/>
-          </a:solidFill>
-          <a:ln>
-            <a:noFill/>
-          </a:ln>
-        </p:spPr>
-        <p:style>
-          <a:lnRef idx="1">
-            <a:schemeClr val="accent1"/>
-          </a:lnRef>
-          <a:fillRef idx="3">
-            <a:schemeClr val="accent1"/>
-          </a:fillRef>
-          <a:effectRef idx="2">
-            <a:schemeClr val="accent1"/>
-          </a:effectRef>
-          <a:fontRef idx="minor">
-            <a:schemeClr val="lt1"/>
-          </a:fontRef>
-        </p:style>
-        <p:txBody>
-          <a:bodyPr rtlCol="0" anchor="ctr"/>
-          <a:lstStyle/>
-          <a:p>
-            <a:pPr algn="ctr"/>
-          </a:p>
-        </p:txBody>
-      </p:sp>
-      <p:sp>
-        <p:nvSpPr>
-          <p:cNvPr id="18" name="Down Arrow 17"/>
-          <p:cNvSpPr/>
-          <p:nvPr/>
-        </p:nvSpPr>
-        <p:spPr>
-          <a:xfrm>
-            <a:off x="6748272" y="2103120"/>
-            <a:ext cx="228600" cy="411480"/>
-          </a:xfrm>
-          <a:prstGeom prst="downArrow">
-            <a:avLst/>
-          </a:prstGeom>
-          <a:solidFill>
-            <a:srgbClr val="D62728"/>
-          </a:solidFill>
-          <a:ln>
-            <a:noFill/>
-          </a:ln>
-        </p:spPr>
-        <p:style>
-          <a:lnRef idx="1">
-            <a:schemeClr val="accent1"/>
-          </a:lnRef>
-          <a:fillRef idx="3">
-            <a:schemeClr val="accent1"/>
-          </a:fillRef>
-          <a:effectRef idx="2">
-            <a:schemeClr val="accent1"/>
-          </a:effectRef>
-          <a:fontRef idx="minor">
-            <a:schemeClr val="lt1"/>
-          </a:fontRef>
-        </p:style>
-        <p:txBody>
-          <a:bodyPr rtlCol="0" anchor="ctr"/>
-          <a:lstStyle/>
-          <a:p>
-            <a:pPr algn="ctr"/>
-          </a:p>
-        </p:txBody>
-      </p:sp>
-      <p:sp>
-        <p:nvSpPr>
-          <p:cNvPr id="19" name="Down Arrow 18"/>
-          <p:cNvSpPr/>
-          <p:nvPr/>
-        </p:nvSpPr>
-        <p:spPr>
-          <a:xfrm>
-            <a:off x="7708392" y="2103120"/>
-            <a:ext cx="228600" cy="411480"/>
-          </a:xfrm>
-          <a:prstGeom prst="downArrow">
-            <a:avLst/>
-          </a:prstGeom>
-          <a:solidFill>
-            <a:srgbClr val="D62728"/>
-          </a:solidFill>
-          <a:ln>
-            <a:noFill/>
-          </a:ln>
-        </p:spPr>
-        <p:style>
-          <a:lnRef idx="1">
-            <a:schemeClr val="accent1"/>
-          </a:lnRef>
-          <a:fillRef idx="3">
-            <a:schemeClr val="accent1"/>
-          </a:fillRef>
-          <a:effectRef idx="2">
-            <a:schemeClr val="accent1"/>
-          </a:effectRef>
-          <a:fontRef idx="minor">
-            <a:schemeClr val="lt1"/>
-          </a:fontRef>
-        </p:style>
-        <p:txBody>
-          <a:bodyPr rtlCol="0" anchor="ctr"/>
-          <a:lstStyle/>
-          <a:p>
-            <a:pPr algn="ctr"/>
-          </a:p>
-        </p:txBody>
-      </p:sp>
-      <p:sp>
-        <p:nvSpPr>
-          <p:cNvPr id="20" name="Rounded Rectangle 19"/>
-          <p:cNvSpPr/>
-          <p:nvPr/>
-        </p:nvSpPr>
-        <p:spPr>
-          <a:xfrm>
-            <a:off x="731520" y="2606040"/>
-            <a:ext cx="7863840" cy="548640"/>
-          </a:xfrm>
-          <a:prstGeom prst="roundRect">
-            <a:avLst/>
-          </a:prstGeom>
-          <a:solidFill>
-            <a:srgbClr val="FEE2E2"/>
-          </a:solidFill>
-          <a:ln w="17780">
-            <a:solidFill>
-              <a:srgbClr val="D62728"/>
-            </a:solidFill>
-          </a:ln>
-        </p:spPr>
-        <p:style>
-          <a:lnRef idx="1">
-            <a:schemeClr val="accent1"/>
-          </a:lnRef>
-          <a:fillRef idx="3">
-            <a:schemeClr val="accent1"/>
-          </a:fillRef>
-          <a:effectRef idx="2">
-            <a:schemeClr val="accent1"/>
-          </a:effectRef>
-          <a:fontRef idx="minor">
-            <a:schemeClr val="lt1"/>
-          </a:fontRef>
-        </p:style>
-        <p:txBody>
-          <a:bodyPr rtlCol="0" anchor="ctr" wrap="square" lIns="45720" rIns="45720" tIns="22860" bIns="22860"/>
-          <a:lstStyle/>
-          <a:p>
-            <a:pPr algn="ctr">
-              <a:defRPr sz="1200" b="0">
-                <a:solidFill>
-                  <a:srgbClr val="111111"/>
-                </a:solidFill>
-              </a:defRPr>
-            </a:pPr>
-            <a:r>
-              <a:t>hot state (항상 fresh)</a:t>
-            </a:r>
-          </a:p>
-        </p:txBody>
-      </p:sp>
-      <p:sp>
-        <p:nvSpPr>
-          <p:cNvPr id="21" name="Down Arrow 20"/>
-          <p:cNvSpPr/>
-          <p:nvPr/>
-        </p:nvSpPr>
-        <p:spPr>
-          <a:xfrm>
-            <a:off x="3867912" y="3246120"/>
-            <a:ext cx="274320" cy="457200"/>
-          </a:xfrm>
-          <a:prstGeom prst="downArrow">
-            <a:avLst/>
-          </a:prstGeom>
-          <a:solidFill>
-            <a:srgbClr val="1F77B4"/>
-          </a:solidFill>
-          <a:ln>
-            <a:noFill/>
-          </a:ln>
-        </p:spPr>
-        <p:style>
-          <a:lnRef idx="1">
-            <a:schemeClr val="accent1"/>
-          </a:lnRef>
-          <a:fillRef idx="3">
-            <a:schemeClr val="accent1"/>
-          </a:fillRef>
-          <a:effectRef idx="2">
-            <a:schemeClr val="accent1"/>
-          </a:effectRef>
-          <a:fontRef idx="minor">
-            <a:schemeClr val="lt1"/>
-          </a:fontRef>
-        </p:style>
-        <p:txBody>
-          <a:bodyPr rtlCol="0" anchor="ctr"/>
-          <a:lstStyle/>
-          <a:p>
-            <a:pPr algn="ctr"/>
-          </a:p>
-        </p:txBody>
-      </p:sp>
-      <p:sp>
-        <p:nvSpPr>
-          <p:cNvPr id="22" name="Down Arrow 21"/>
-          <p:cNvSpPr/>
-          <p:nvPr/>
-        </p:nvSpPr>
-        <p:spPr>
-          <a:xfrm>
-            <a:off x="7708392" y="3246120"/>
-            <a:ext cx="274320" cy="457200"/>
-          </a:xfrm>
-          <a:prstGeom prst="downArrow">
-            <a:avLst/>
-          </a:prstGeom>
-          <a:solidFill>
-            <a:srgbClr val="1F77B4"/>
-          </a:solidFill>
-          <a:ln>
-            <a:noFill/>
-          </a:ln>
-        </p:spPr>
-        <p:style>
-          <a:lnRef idx="1">
-            <a:schemeClr val="accent1"/>
-          </a:lnRef>
-          <a:fillRef idx="3">
-            <a:schemeClr val="accent1"/>
-          </a:fillRef>
-          <a:effectRef idx="2">
-            <a:schemeClr val="accent1"/>
-          </a:effectRef>
-          <a:fontRef idx="minor">
-            <a:schemeClr val="lt1"/>
-          </a:fontRef>
-        </p:style>
-        <p:txBody>
-          <a:bodyPr rtlCol="0" anchor="ctr"/>
-          <a:lstStyle/>
-          <a:p>
-            <a:pPr algn="ctr"/>
-          </a:p>
-        </p:txBody>
-      </p:sp>
-      <p:sp>
-        <p:nvSpPr>
-          <p:cNvPr id="23" name="Rounded Rectangle 22"/>
-          <p:cNvSpPr/>
-          <p:nvPr/>
-        </p:nvSpPr>
-        <p:spPr>
-          <a:xfrm>
-            <a:off x="731520" y="3794760"/>
-            <a:ext cx="7863840" cy="548640"/>
-          </a:xfrm>
-          <a:prstGeom prst="roundRect">
-            <a:avLst/>
-          </a:prstGeom>
-          <a:solidFill>
-            <a:srgbClr val="DBEAFE"/>
-          </a:solidFill>
-          <a:ln w="17780">
-            <a:solidFill>
-              <a:srgbClr val="1F77B4"/>
-            </a:solidFill>
-          </a:ln>
-        </p:spPr>
-        <p:style>
-          <a:lnRef idx="1">
-            <a:schemeClr val="accent1"/>
-          </a:lnRef>
-          <a:fillRef idx="3">
-            <a:schemeClr val="accent1"/>
-          </a:fillRef>
-          <a:effectRef idx="2">
-            <a:schemeClr val="accent1"/>
-          </a:effectRef>
-          <a:fontRef idx="minor">
-            <a:schemeClr val="lt1"/>
-          </a:fontRef>
-        </p:style>
-        <p:txBody>
-          <a:bodyPr rtlCol="0" anchor="ctr" wrap="square" lIns="45720" rIns="45720" tIns="22860" bIns="22860"/>
-          <a:lstStyle/>
-          <a:p>
-            <a:pPr algn="ctr">
-              <a:defRPr sz="1200" b="0">
-                <a:solidFill>
-                  <a:srgbClr val="111111"/>
-                </a:solidFill>
-              </a:defRPr>
-            </a:pPr>
-            <a:r>
-              <a:t>cold state (c=4마다 chunk-exact write-back — 개루프, 수학적 exact)</a:t>
-            </a:r>
-          </a:p>
-        </p:txBody>
-      </p:sp>
-      <p:sp>
-        <p:nvSpPr>
-          <p:cNvPr id="24" name="Rounded Rectangle 23"/>
-          <p:cNvSpPr/>
-          <p:nvPr/>
-        </p:nvSpPr>
-        <p:spPr>
-          <a:xfrm>
-            <a:off x="8778240" y="3794760"/>
-            <a:ext cx="2834640" cy="548640"/>
-          </a:xfrm>
-          <a:prstGeom prst="roundRect">
-            <a:avLst/>
-          </a:prstGeom>
-          <a:solidFill>
-            <a:srgbClr val="DBEAFE"/>
-          </a:solidFill>
-          <a:ln w="17780">
-            <a:solidFill>
-              <a:srgbClr val="1F77B4"/>
-            </a:solidFill>
-          </a:ln>
-        </p:spPr>
-        <p:style>
-          <a:lnRef idx="1">
-            <a:schemeClr val="accent1"/>
-          </a:lnRef>
-          <a:fillRef idx="3">
-            <a:schemeClr val="accent1"/>
-          </a:fillRef>
-          <a:effectRef idx="2">
-            <a:schemeClr val="accent1"/>
-          </a:effectRef>
-          <a:fontRef idx="minor">
-            <a:schemeClr val="lt1"/>
-          </a:fontRef>
-        </p:style>
-        <p:txBody>
-          <a:bodyPr rtlCol="0" anchor="ctr" wrap="square" lIns="45720" rIns="45720" tIns="22860" bIns="22860"/>
-          <a:lstStyle/>
-          <a:p>
-            <a:pPr algn="ctr">
-              <a:defRPr sz="1100" b="1">
-                <a:solidFill>
-                  <a:srgbClr val="111111"/>
-                </a:solidFill>
-              </a:defRPr>
-            </a:pPr>
-            <a:r>
-              <a:t>COLD 쓰기: c마다 몰아서</a:t>
-            </a:r>
-          </a:p>
-        </p:txBody>
-      </p:sp>
-      <p:sp>
-        <p:nvSpPr>
-          <p:cNvPr id="25" name="TextBox 24"/>
+              <a:defRPr sz="1350" b="1">
+                <a:solidFill>
+                  <a:srgbClr val="111111"/>
+                </a:solidFill>
+              </a:defRPr>
+            </a:pPr>
+            <a:r>
+              <a:t>장문 CoT 마감 레시피 (longcot2): seqlen 4096 + c4·c8 가중 혼합 — "장문 staleness는 장문으로 가르쳐야" → GSM8K v4-c4 = fresh (+0.4, lossless)</a:t>
+            </a:r>
+          </a:p>
+        </p:txBody>
+      </p:sp>
+      <p:sp>
+        <p:nvSpPr>
+          <p:cNvPr id="8" name="TextBox 7"/>
           <p:cNvSpPr txBox="1"/>
           <p:nvPr/>
         </p:nvSpPr>
         <p:spPr>
           <a:xfrm>
-            <a:off x="640080" y="4663440"/>
-            <a:ext cx="11155680" cy="1737360"/>
+            <a:off x="640080" y="4892040"/>
+            <a:ext cx="11064240" cy="1554480"/>
           </a:xfrm>
           <a:prstGeom prst="rect">
             <a:avLst/>
@@ -4402,7 +3755,7 @@
               </a:defRPr>
             </a:pPr>
             <a:r>
-              <a:t>· 읽기: y_t = C_t·S_hot(최신) + C_t·S_cold(snapshot)·exp(G_t) — 감쇠는 정확히 보상, 늦는 건 최근 c토큰의 cold 성분뿐.</a:t>
+              <a:t>학습이 실제로 사는 것 (실측 사슬):</a:t>
             </a:r>
           </a:p>
           <a:p>
@@ -4414,7 +3767,7 @@
               </a:defRPr>
             </a:pPr>
             <a:r>
-              <a:t>· flush가 개루프(청크 단위 재계산)라는 점이 뒤의 정밀도 면허(fp8-cold)의 근원 — 라운딩 오차가 재귀에 복리로 쌓이지 않음.</a:t>
+              <a:t>· 학습 없이 티어링만: GSM8K 33.0 (−48.6, 정밀도 무관 붕괴) → 학습 후: 81.6 (= fresh). 실행권 = 학습의 산물.</a:t>
             </a:r>
           </a:p>
           <a:p>
@@ -4426,7 +3779,7 @@
               </a:defRPr>
             </a:pPr>
             <a:r>
-              <a:t>· c = 정확도↔속도 다이얼: 생성이 긴 태스크(수학 CoT)는 c4, 짧은 답(recall)은 c16 — 재학습 없이 config로.</a:t>
+              <a:t>· 함정 2건: full-width 강제 distill은 폭 탄력성 파괴(폭 샘플링 유지 필수) · 단일 도메인(wikitext) 학습은 다운스트림 드리프트(혼합 필수).</a:t>
             </a:r>
           </a:p>
         </p:txBody>
@@ -4479,7 +3832,7 @@
               </a:defRPr>
             </a:pPr>
             <a:r>
-              <a:t>10. 결과 — 공식 스택 3-arm 매트릭스 + B200 속도</a:t>
+              <a:t>10. 실행 의미론 (v4) — 타임라인으로 보기</a:t>
             </a:r>
           </a:p>
           <a:p>
@@ -4491,23 +3844,993 @@
               </a:defRPr>
             </a:pPr>
             <a:r>
-              <a:t>acc = NeMo-Skills + vLLM (공식 논문과 동일 측정), 3-arm = raw / fresh / v4</a:t>
-            </a:r>
-          </a:p>
-        </p:txBody>
-      </p:sp>
-      <p:sp>
-        <p:nvSpPr>
-          <p:cNvPr id="3" name="Rectangle 2"/>
+              <a:t>hot은 항상 최신, cold는 'snapshot + 감쇠 보상'으로 읽고 c마다 정확히 따라잡음</a:t>
+            </a:r>
+          </a:p>
+        </p:txBody>
+      </p:sp>
+      <p:sp>
+        <p:nvSpPr>
+          <p:cNvPr id="3" name="Rounded Rectangle 2"/>
           <p:cNvSpPr/>
           <p:nvPr/>
         </p:nvSpPr>
         <p:spPr>
           <a:xfrm>
-            <a:off x="594360" y="1325880"/>
-            <a:ext cx="2286000" cy="502920"/>
-          </a:xfrm>
-          <a:prstGeom prst="rect">
+            <a:off x="731520" y="1463040"/>
+            <a:ext cx="777240" cy="548640"/>
+          </a:xfrm>
+          <a:prstGeom prst="roundRect">
+            <a:avLst/>
+          </a:prstGeom>
+          <a:solidFill>
+            <a:srgbClr val="FFFFFF"/>
+          </a:solidFill>
+          <a:ln w="17780">
+            <a:solidFill>
+              <a:srgbClr val="666666"/>
+            </a:solidFill>
+          </a:ln>
+        </p:spPr>
+        <p:style>
+          <a:lnRef idx="1">
+            <a:schemeClr val="accent1"/>
+          </a:lnRef>
+          <a:fillRef idx="3">
+            <a:schemeClr val="accent1"/>
+          </a:fillRef>
+          <a:effectRef idx="2">
+            <a:schemeClr val="accent1"/>
+          </a:effectRef>
+          <a:fontRef idx="minor">
+            <a:schemeClr val="lt1"/>
+          </a:fontRef>
+        </p:style>
+        <p:txBody>
+          <a:bodyPr rtlCol="0" anchor="ctr" wrap="square" lIns="45720" rIns="45720" tIns="22860" bIns="22860"/>
+          <a:lstStyle/>
+          <a:p>
+            <a:pPr algn="ctr">
+              <a:defRPr sz="1100" b="0">
+                <a:solidFill>
+                  <a:srgbClr val="111111"/>
+                </a:solidFill>
+              </a:defRPr>
+            </a:pPr>
+            <a:r>
+              <a:t>t=1</a:t>
+            </a:r>
+          </a:p>
+        </p:txBody>
+      </p:sp>
+      <p:sp>
+        <p:nvSpPr>
+          <p:cNvPr id="4" name="Rounded Rectangle 3"/>
+          <p:cNvSpPr/>
+          <p:nvPr/>
+        </p:nvSpPr>
+        <p:spPr>
+          <a:xfrm>
+            <a:off x="1691640" y="1463040"/>
+            <a:ext cx="777240" cy="548640"/>
+          </a:xfrm>
+          <a:prstGeom prst="roundRect">
+            <a:avLst/>
+          </a:prstGeom>
+          <a:solidFill>
+            <a:srgbClr val="FFFFFF"/>
+          </a:solidFill>
+          <a:ln w="17780">
+            <a:solidFill>
+              <a:srgbClr val="666666"/>
+            </a:solidFill>
+          </a:ln>
+        </p:spPr>
+        <p:style>
+          <a:lnRef idx="1">
+            <a:schemeClr val="accent1"/>
+          </a:lnRef>
+          <a:fillRef idx="3">
+            <a:schemeClr val="accent1"/>
+          </a:fillRef>
+          <a:effectRef idx="2">
+            <a:schemeClr val="accent1"/>
+          </a:effectRef>
+          <a:fontRef idx="minor">
+            <a:schemeClr val="lt1"/>
+          </a:fontRef>
+        </p:style>
+        <p:txBody>
+          <a:bodyPr rtlCol="0" anchor="ctr" wrap="square" lIns="45720" rIns="45720" tIns="22860" bIns="22860"/>
+          <a:lstStyle/>
+          <a:p>
+            <a:pPr algn="ctr">
+              <a:defRPr sz="1100" b="0">
+                <a:solidFill>
+                  <a:srgbClr val="111111"/>
+                </a:solidFill>
+              </a:defRPr>
+            </a:pPr>
+            <a:r>
+              <a:t>t=2</a:t>
+            </a:r>
+          </a:p>
+        </p:txBody>
+      </p:sp>
+      <p:sp>
+        <p:nvSpPr>
+          <p:cNvPr id="5" name="Rounded Rectangle 4"/>
+          <p:cNvSpPr/>
+          <p:nvPr/>
+        </p:nvSpPr>
+        <p:spPr>
+          <a:xfrm>
+            <a:off x="2651760" y="1463040"/>
+            <a:ext cx="777240" cy="548640"/>
+          </a:xfrm>
+          <a:prstGeom prst="roundRect">
+            <a:avLst/>
+          </a:prstGeom>
+          <a:solidFill>
+            <a:srgbClr val="FFFFFF"/>
+          </a:solidFill>
+          <a:ln w="17780">
+            <a:solidFill>
+              <a:srgbClr val="666666"/>
+            </a:solidFill>
+          </a:ln>
+        </p:spPr>
+        <p:style>
+          <a:lnRef idx="1">
+            <a:schemeClr val="accent1"/>
+          </a:lnRef>
+          <a:fillRef idx="3">
+            <a:schemeClr val="accent1"/>
+          </a:fillRef>
+          <a:effectRef idx="2">
+            <a:schemeClr val="accent1"/>
+          </a:effectRef>
+          <a:fontRef idx="minor">
+            <a:schemeClr val="lt1"/>
+          </a:fontRef>
+        </p:style>
+        <p:txBody>
+          <a:bodyPr rtlCol="0" anchor="ctr" wrap="square" lIns="45720" rIns="45720" tIns="22860" bIns="22860"/>
+          <a:lstStyle/>
+          <a:p>
+            <a:pPr algn="ctr">
+              <a:defRPr sz="1100" b="0">
+                <a:solidFill>
+                  <a:srgbClr val="111111"/>
+                </a:solidFill>
+              </a:defRPr>
+            </a:pPr>
+            <a:r>
+              <a:t>t=3</a:t>
+            </a:r>
+          </a:p>
+        </p:txBody>
+      </p:sp>
+      <p:sp>
+        <p:nvSpPr>
+          <p:cNvPr id="6" name="Rounded Rectangle 5"/>
+          <p:cNvSpPr/>
+          <p:nvPr/>
+        </p:nvSpPr>
+        <p:spPr>
+          <a:xfrm>
+            <a:off x="3611880" y="1463040"/>
+            <a:ext cx="777240" cy="548640"/>
+          </a:xfrm>
+          <a:prstGeom prst="roundRect">
+            <a:avLst/>
+          </a:prstGeom>
+          <a:solidFill>
+            <a:srgbClr val="FFFFFF"/>
+          </a:solidFill>
+          <a:ln w="17780">
+            <a:solidFill>
+              <a:srgbClr val="666666"/>
+            </a:solidFill>
+          </a:ln>
+        </p:spPr>
+        <p:style>
+          <a:lnRef idx="1">
+            <a:schemeClr val="accent1"/>
+          </a:lnRef>
+          <a:fillRef idx="3">
+            <a:schemeClr val="accent1"/>
+          </a:fillRef>
+          <a:effectRef idx="2">
+            <a:schemeClr val="accent1"/>
+          </a:effectRef>
+          <a:fontRef idx="minor">
+            <a:schemeClr val="lt1"/>
+          </a:fontRef>
+        </p:style>
+        <p:txBody>
+          <a:bodyPr rtlCol="0" anchor="ctr" wrap="square" lIns="45720" rIns="45720" tIns="22860" bIns="22860"/>
+          <a:lstStyle/>
+          <a:p>
+            <a:pPr algn="ctr">
+              <a:defRPr sz="1100" b="0">
+                <a:solidFill>
+                  <a:srgbClr val="111111"/>
+                </a:solidFill>
+              </a:defRPr>
+            </a:pPr>
+            <a:r>
+              <a:t>t=4</a:t>
+            </a:r>
+          </a:p>
+        </p:txBody>
+      </p:sp>
+      <p:sp>
+        <p:nvSpPr>
+          <p:cNvPr id="7" name="Rounded Rectangle 6"/>
+          <p:cNvSpPr/>
+          <p:nvPr/>
+        </p:nvSpPr>
+        <p:spPr>
+          <a:xfrm>
+            <a:off x="4572000" y="1463040"/>
+            <a:ext cx="777240" cy="548640"/>
+          </a:xfrm>
+          <a:prstGeom prst="roundRect">
+            <a:avLst/>
+          </a:prstGeom>
+          <a:solidFill>
+            <a:srgbClr val="FFFFFF"/>
+          </a:solidFill>
+          <a:ln w="17780">
+            <a:solidFill>
+              <a:srgbClr val="666666"/>
+            </a:solidFill>
+          </a:ln>
+        </p:spPr>
+        <p:style>
+          <a:lnRef idx="1">
+            <a:schemeClr val="accent1"/>
+          </a:lnRef>
+          <a:fillRef idx="3">
+            <a:schemeClr val="accent1"/>
+          </a:fillRef>
+          <a:effectRef idx="2">
+            <a:schemeClr val="accent1"/>
+          </a:effectRef>
+          <a:fontRef idx="minor">
+            <a:schemeClr val="lt1"/>
+          </a:fontRef>
+        </p:style>
+        <p:txBody>
+          <a:bodyPr rtlCol="0" anchor="ctr" wrap="square" lIns="45720" rIns="45720" tIns="22860" bIns="22860"/>
+          <a:lstStyle/>
+          <a:p>
+            <a:pPr algn="ctr">
+              <a:defRPr sz="1100" b="0">
+                <a:solidFill>
+                  <a:srgbClr val="111111"/>
+                </a:solidFill>
+              </a:defRPr>
+            </a:pPr>
+            <a:r>
+              <a:t>t=5</a:t>
+            </a:r>
+          </a:p>
+        </p:txBody>
+      </p:sp>
+      <p:sp>
+        <p:nvSpPr>
+          <p:cNvPr id="8" name="Rounded Rectangle 7"/>
+          <p:cNvSpPr/>
+          <p:nvPr/>
+        </p:nvSpPr>
+        <p:spPr>
+          <a:xfrm>
+            <a:off x="5532120" y="1463040"/>
+            <a:ext cx="777240" cy="548640"/>
+          </a:xfrm>
+          <a:prstGeom prst="roundRect">
+            <a:avLst/>
+          </a:prstGeom>
+          <a:solidFill>
+            <a:srgbClr val="FFFFFF"/>
+          </a:solidFill>
+          <a:ln w="17780">
+            <a:solidFill>
+              <a:srgbClr val="666666"/>
+            </a:solidFill>
+          </a:ln>
+        </p:spPr>
+        <p:style>
+          <a:lnRef idx="1">
+            <a:schemeClr val="accent1"/>
+          </a:lnRef>
+          <a:fillRef idx="3">
+            <a:schemeClr val="accent1"/>
+          </a:fillRef>
+          <a:effectRef idx="2">
+            <a:schemeClr val="accent1"/>
+          </a:effectRef>
+          <a:fontRef idx="minor">
+            <a:schemeClr val="lt1"/>
+          </a:fontRef>
+        </p:style>
+        <p:txBody>
+          <a:bodyPr rtlCol="0" anchor="ctr" wrap="square" lIns="45720" rIns="45720" tIns="22860" bIns="22860"/>
+          <a:lstStyle/>
+          <a:p>
+            <a:pPr algn="ctr">
+              <a:defRPr sz="1100" b="0">
+                <a:solidFill>
+                  <a:srgbClr val="111111"/>
+                </a:solidFill>
+              </a:defRPr>
+            </a:pPr>
+            <a:r>
+              <a:t>t=6</a:t>
+            </a:r>
+          </a:p>
+        </p:txBody>
+      </p:sp>
+      <p:sp>
+        <p:nvSpPr>
+          <p:cNvPr id="9" name="Rounded Rectangle 8"/>
+          <p:cNvSpPr/>
+          <p:nvPr/>
+        </p:nvSpPr>
+        <p:spPr>
+          <a:xfrm>
+            <a:off x="6492240" y="1463040"/>
+            <a:ext cx="777240" cy="548640"/>
+          </a:xfrm>
+          <a:prstGeom prst="roundRect">
+            <a:avLst/>
+          </a:prstGeom>
+          <a:solidFill>
+            <a:srgbClr val="FFFFFF"/>
+          </a:solidFill>
+          <a:ln w="17780">
+            <a:solidFill>
+              <a:srgbClr val="666666"/>
+            </a:solidFill>
+          </a:ln>
+        </p:spPr>
+        <p:style>
+          <a:lnRef idx="1">
+            <a:schemeClr val="accent1"/>
+          </a:lnRef>
+          <a:fillRef idx="3">
+            <a:schemeClr val="accent1"/>
+          </a:fillRef>
+          <a:effectRef idx="2">
+            <a:schemeClr val="accent1"/>
+          </a:effectRef>
+          <a:fontRef idx="minor">
+            <a:schemeClr val="lt1"/>
+          </a:fontRef>
+        </p:style>
+        <p:txBody>
+          <a:bodyPr rtlCol="0" anchor="ctr" wrap="square" lIns="45720" rIns="45720" tIns="22860" bIns="22860"/>
+          <a:lstStyle/>
+          <a:p>
+            <a:pPr algn="ctr">
+              <a:defRPr sz="1100" b="0">
+                <a:solidFill>
+                  <a:srgbClr val="111111"/>
+                </a:solidFill>
+              </a:defRPr>
+            </a:pPr>
+            <a:r>
+              <a:t>t=7</a:t>
+            </a:r>
+          </a:p>
+        </p:txBody>
+      </p:sp>
+      <p:sp>
+        <p:nvSpPr>
+          <p:cNvPr id="10" name="Rounded Rectangle 9"/>
+          <p:cNvSpPr/>
+          <p:nvPr/>
+        </p:nvSpPr>
+        <p:spPr>
+          <a:xfrm>
+            <a:off x="7452360" y="1463040"/>
+            <a:ext cx="777240" cy="548640"/>
+          </a:xfrm>
+          <a:prstGeom prst="roundRect">
+            <a:avLst/>
+          </a:prstGeom>
+          <a:solidFill>
+            <a:srgbClr val="FFFFFF"/>
+          </a:solidFill>
+          <a:ln w="17780">
+            <a:solidFill>
+              <a:srgbClr val="666666"/>
+            </a:solidFill>
+          </a:ln>
+        </p:spPr>
+        <p:style>
+          <a:lnRef idx="1">
+            <a:schemeClr val="accent1"/>
+          </a:lnRef>
+          <a:fillRef idx="3">
+            <a:schemeClr val="accent1"/>
+          </a:fillRef>
+          <a:effectRef idx="2">
+            <a:schemeClr val="accent1"/>
+          </a:effectRef>
+          <a:fontRef idx="minor">
+            <a:schemeClr val="lt1"/>
+          </a:fontRef>
+        </p:style>
+        <p:txBody>
+          <a:bodyPr rtlCol="0" anchor="ctr" wrap="square" lIns="45720" rIns="45720" tIns="22860" bIns="22860"/>
+          <a:lstStyle/>
+          <a:p>
+            <a:pPr algn="ctr">
+              <a:defRPr sz="1100" b="0">
+                <a:solidFill>
+                  <a:srgbClr val="111111"/>
+                </a:solidFill>
+              </a:defRPr>
+            </a:pPr>
+            <a:r>
+              <a:t>t=8</a:t>
+            </a:r>
+          </a:p>
+        </p:txBody>
+      </p:sp>
+      <p:sp>
+        <p:nvSpPr>
+          <p:cNvPr id="11" name="Rounded Rectangle 10"/>
+          <p:cNvSpPr/>
+          <p:nvPr/>
+        </p:nvSpPr>
+        <p:spPr>
+          <a:xfrm>
+            <a:off x="8778240" y="1463040"/>
+            <a:ext cx="2834640" cy="548640"/>
+          </a:xfrm>
+          <a:prstGeom prst="roundRect">
+            <a:avLst/>
+          </a:prstGeom>
+          <a:solidFill>
+            <a:srgbClr val="FEE2E2"/>
+          </a:solidFill>
+          <a:ln w="17780">
+            <a:solidFill>
+              <a:srgbClr val="D62728"/>
+            </a:solidFill>
+          </a:ln>
+        </p:spPr>
+        <p:style>
+          <a:lnRef idx="1">
+            <a:schemeClr val="accent1"/>
+          </a:lnRef>
+          <a:fillRef idx="3">
+            <a:schemeClr val="accent1"/>
+          </a:fillRef>
+          <a:effectRef idx="2">
+            <a:schemeClr val="accent1"/>
+          </a:effectRef>
+          <a:fontRef idx="minor">
+            <a:schemeClr val="lt1"/>
+          </a:fontRef>
+        </p:style>
+        <p:txBody>
+          <a:bodyPr rtlCol="0" anchor="ctr" wrap="square" lIns="45720" rIns="45720" tIns="22860" bIns="22860"/>
+          <a:lstStyle/>
+          <a:p>
+            <a:pPr algn="ctr">
+              <a:defRPr sz="1100" b="1">
+                <a:solidFill>
+                  <a:srgbClr val="111111"/>
+                </a:solidFill>
+              </a:defRPr>
+            </a:pPr>
+            <a:r>
+              <a:t>HOT: 매 토큰 R/W</a:t>
+            </a:r>
+          </a:p>
+        </p:txBody>
+      </p:sp>
+      <p:sp>
+        <p:nvSpPr>
+          <p:cNvPr id="12" name="Down Arrow 11"/>
+          <p:cNvSpPr/>
+          <p:nvPr/>
+        </p:nvSpPr>
+        <p:spPr>
+          <a:xfrm>
+            <a:off x="987552" y="2103120"/>
+            <a:ext cx="228600" cy="411480"/>
+          </a:xfrm>
+          <a:prstGeom prst="downArrow">
+            <a:avLst/>
+          </a:prstGeom>
+          <a:solidFill>
+            <a:srgbClr val="D62728"/>
+          </a:solidFill>
+          <a:ln>
+            <a:noFill/>
+          </a:ln>
+        </p:spPr>
+        <p:style>
+          <a:lnRef idx="1">
+            <a:schemeClr val="accent1"/>
+          </a:lnRef>
+          <a:fillRef idx="3">
+            <a:schemeClr val="accent1"/>
+          </a:fillRef>
+          <a:effectRef idx="2">
+            <a:schemeClr val="accent1"/>
+          </a:effectRef>
+          <a:fontRef idx="minor">
+            <a:schemeClr val="lt1"/>
+          </a:fontRef>
+        </p:style>
+        <p:txBody>
+          <a:bodyPr rtlCol="0" anchor="ctr"/>
+          <a:lstStyle/>
+          <a:p>
+            <a:pPr algn="ctr"/>
+          </a:p>
+        </p:txBody>
+      </p:sp>
+      <p:sp>
+        <p:nvSpPr>
+          <p:cNvPr id="13" name="Down Arrow 12"/>
+          <p:cNvSpPr/>
+          <p:nvPr/>
+        </p:nvSpPr>
+        <p:spPr>
+          <a:xfrm>
+            <a:off x="1947672" y="2103120"/>
+            <a:ext cx="228600" cy="411480"/>
+          </a:xfrm>
+          <a:prstGeom prst="downArrow">
+            <a:avLst/>
+          </a:prstGeom>
+          <a:solidFill>
+            <a:srgbClr val="D62728"/>
+          </a:solidFill>
+          <a:ln>
+            <a:noFill/>
+          </a:ln>
+        </p:spPr>
+        <p:style>
+          <a:lnRef idx="1">
+            <a:schemeClr val="accent1"/>
+          </a:lnRef>
+          <a:fillRef idx="3">
+            <a:schemeClr val="accent1"/>
+          </a:fillRef>
+          <a:effectRef idx="2">
+            <a:schemeClr val="accent1"/>
+          </a:effectRef>
+          <a:fontRef idx="minor">
+            <a:schemeClr val="lt1"/>
+          </a:fontRef>
+        </p:style>
+        <p:txBody>
+          <a:bodyPr rtlCol="0" anchor="ctr"/>
+          <a:lstStyle/>
+          <a:p>
+            <a:pPr algn="ctr"/>
+          </a:p>
+        </p:txBody>
+      </p:sp>
+      <p:sp>
+        <p:nvSpPr>
+          <p:cNvPr id="14" name="Down Arrow 13"/>
+          <p:cNvSpPr/>
+          <p:nvPr/>
+        </p:nvSpPr>
+        <p:spPr>
+          <a:xfrm>
+            <a:off x="2907792" y="2103120"/>
+            <a:ext cx="228600" cy="411480"/>
+          </a:xfrm>
+          <a:prstGeom prst="downArrow">
+            <a:avLst/>
+          </a:prstGeom>
+          <a:solidFill>
+            <a:srgbClr val="D62728"/>
+          </a:solidFill>
+          <a:ln>
+            <a:noFill/>
+          </a:ln>
+        </p:spPr>
+        <p:style>
+          <a:lnRef idx="1">
+            <a:schemeClr val="accent1"/>
+          </a:lnRef>
+          <a:fillRef idx="3">
+            <a:schemeClr val="accent1"/>
+          </a:fillRef>
+          <a:effectRef idx="2">
+            <a:schemeClr val="accent1"/>
+          </a:effectRef>
+          <a:fontRef idx="minor">
+            <a:schemeClr val="lt1"/>
+          </a:fontRef>
+        </p:style>
+        <p:txBody>
+          <a:bodyPr rtlCol="0" anchor="ctr"/>
+          <a:lstStyle/>
+          <a:p>
+            <a:pPr algn="ctr"/>
+          </a:p>
+        </p:txBody>
+      </p:sp>
+      <p:sp>
+        <p:nvSpPr>
+          <p:cNvPr id="15" name="Down Arrow 14"/>
+          <p:cNvSpPr/>
+          <p:nvPr/>
+        </p:nvSpPr>
+        <p:spPr>
+          <a:xfrm>
+            <a:off x="3867912" y="2103120"/>
+            <a:ext cx="228600" cy="411480"/>
+          </a:xfrm>
+          <a:prstGeom prst="downArrow">
+            <a:avLst/>
+          </a:prstGeom>
+          <a:solidFill>
+            <a:srgbClr val="D62728"/>
+          </a:solidFill>
+          <a:ln>
+            <a:noFill/>
+          </a:ln>
+        </p:spPr>
+        <p:style>
+          <a:lnRef idx="1">
+            <a:schemeClr val="accent1"/>
+          </a:lnRef>
+          <a:fillRef idx="3">
+            <a:schemeClr val="accent1"/>
+          </a:fillRef>
+          <a:effectRef idx="2">
+            <a:schemeClr val="accent1"/>
+          </a:effectRef>
+          <a:fontRef idx="minor">
+            <a:schemeClr val="lt1"/>
+          </a:fontRef>
+        </p:style>
+        <p:txBody>
+          <a:bodyPr rtlCol="0" anchor="ctr"/>
+          <a:lstStyle/>
+          <a:p>
+            <a:pPr algn="ctr"/>
+          </a:p>
+        </p:txBody>
+      </p:sp>
+      <p:sp>
+        <p:nvSpPr>
+          <p:cNvPr id="16" name="Down Arrow 15"/>
+          <p:cNvSpPr/>
+          <p:nvPr/>
+        </p:nvSpPr>
+        <p:spPr>
+          <a:xfrm>
+            <a:off x="4828032" y="2103120"/>
+            <a:ext cx="228600" cy="411480"/>
+          </a:xfrm>
+          <a:prstGeom prst="downArrow">
+            <a:avLst/>
+          </a:prstGeom>
+          <a:solidFill>
+            <a:srgbClr val="D62728"/>
+          </a:solidFill>
+          <a:ln>
+            <a:noFill/>
+          </a:ln>
+        </p:spPr>
+        <p:style>
+          <a:lnRef idx="1">
+            <a:schemeClr val="accent1"/>
+          </a:lnRef>
+          <a:fillRef idx="3">
+            <a:schemeClr val="accent1"/>
+          </a:fillRef>
+          <a:effectRef idx="2">
+            <a:schemeClr val="accent1"/>
+          </a:effectRef>
+          <a:fontRef idx="minor">
+            <a:schemeClr val="lt1"/>
+          </a:fontRef>
+        </p:style>
+        <p:txBody>
+          <a:bodyPr rtlCol="0" anchor="ctr"/>
+          <a:lstStyle/>
+          <a:p>
+            <a:pPr algn="ctr"/>
+          </a:p>
+        </p:txBody>
+      </p:sp>
+      <p:sp>
+        <p:nvSpPr>
+          <p:cNvPr id="17" name="Down Arrow 16"/>
+          <p:cNvSpPr/>
+          <p:nvPr/>
+        </p:nvSpPr>
+        <p:spPr>
+          <a:xfrm>
+            <a:off x="5788152" y="2103120"/>
+            <a:ext cx="228600" cy="411480"/>
+          </a:xfrm>
+          <a:prstGeom prst="downArrow">
+            <a:avLst/>
+          </a:prstGeom>
+          <a:solidFill>
+            <a:srgbClr val="D62728"/>
+          </a:solidFill>
+          <a:ln>
+            <a:noFill/>
+          </a:ln>
+        </p:spPr>
+        <p:style>
+          <a:lnRef idx="1">
+            <a:schemeClr val="accent1"/>
+          </a:lnRef>
+          <a:fillRef idx="3">
+            <a:schemeClr val="accent1"/>
+          </a:fillRef>
+          <a:effectRef idx="2">
+            <a:schemeClr val="accent1"/>
+          </a:effectRef>
+          <a:fontRef idx="minor">
+            <a:schemeClr val="lt1"/>
+          </a:fontRef>
+        </p:style>
+        <p:txBody>
+          <a:bodyPr rtlCol="0" anchor="ctr"/>
+          <a:lstStyle/>
+          <a:p>
+            <a:pPr algn="ctr"/>
+          </a:p>
+        </p:txBody>
+      </p:sp>
+      <p:sp>
+        <p:nvSpPr>
+          <p:cNvPr id="18" name="Down Arrow 17"/>
+          <p:cNvSpPr/>
+          <p:nvPr/>
+        </p:nvSpPr>
+        <p:spPr>
+          <a:xfrm>
+            <a:off x="6748272" y="2103120"/>
+            <a:ext cx="228600" cy="411480"/>
+          </a:xfrm>
+          <a:prstGeom prst="downArrow">
+            <a:avLst/>
+          </a:prstGeom>
+          <a:solidFill>
+            <a:srgbClr val="D62728"/>
+          </a:solidFill>
+          <a:ln>
+            <a:noFill/>
+          </a:ln>
+        </p:spPr>
+        <p:style>
+          <a:lnRef idx="1">
+            <a:schemeClr val="accent1"/>
+          </a:lnRef>
+          <a:fillRef idx="3">
+            <a:schemeClr val="accent1"/>
+          </a:fillRef>
+          <a:effectRef idx="2">
+            <a:schemeClr val="accent1"/>
+          </a:effectRef>
+          <a:fontRef idx="minor">
+            <a:schemeClr val="lt1"/>
+          </a:fontRef>
+        </p:style>
+        <p:txBody>
+          <a:bodyPr rtlCol="0" anchor="ctr"/>
+          <a:lstStyle/>
+          <a:p>
+            <a:pPr algn="ctr"/>
+          </a:p>
+        </p:txBody>
+      </p:sp>
+      <p:sp>
+        <p:nvSpPr>
+          <p:cNvPr id="19" name="Down Arrow 18"/>
+          <p:cNvSpPr/>
+          <p:nvPr/>
+        </p:nvSpPr>
+        <p:spPr>
+          <a:xfrm>
+            <a:off x="7708392" y="2103120"/>
+            <a:ext cx="228600" cy="411480"/>
+          </a:xfrm>
+          <a:prstGeom prst="downArrow">
+            <a:avLst/>
+          </a:prstGeom>
+          <a:solidFill>
+            <a:srgbClr val="D62728"/>
+          </a:solidFill>
+          <a:ln>
+            <a:noFill/>
+          </a:ln>
+        </p:spPr>
+        <p:style>
+          <a:lnRef idx="1">
+            <a:schemeClr val="accent1"/>
+          </a:lnRef>
+          <a:fillRef idx="3">
+            <a:schemeClr val="accent1"/>
+          </a:fillRef>
+          <a:effectRef idx="2">
+            <a:schemeClr val="accent1"/>
+          </a:effectRef>
+          <a:fontRef idx="minor">
+            <a:schemeClr val="lt1"/>
+          </a:fontRef>
+        </p:style>
+        <p:txBody>
+          <a:bodyPr rtlCol="0" anchor="ctr"/>
+          <a:lstStyle/>
+          <a:p>
+            <a:pPr algn="ctr"/>
+          </a:p>
+        </p:txBody>
+      </p:sp>
+      <p:sp>
+        <p:nvSpPr>
+          <p:cNvPr id="20" name="Rounded Rectangle 19"/>
+          <p:cNvSpPr/>
+          <p:nvPr/>
+        </p:nvSpPr>
+        <p:spPr>
+          <a:xfrm>
+            <a:off x="731520" y="2606040"/>
+            <a:ext cx="7863840" cy="548640"/>
+          </a:xfrm>
+          <a:prstGeom prst="roundRect">
+            <a:avLst/>
+          </a:prstGeom>
+          <a:solidFill>
+            <a:srgbClr val="FEE2E2"/>
+          </a:solidFill>
+          <a:ln w="17780">
+            <a:solidFill>
+              <a:srgbClr val="D62728"/>
+            </a:solidFill>
+          </a:ln>
+        </p:spPr>
+        <p:style>
+          <a:lnRef idx="1">
+            <a:schemeClr val="accent1"/>
+          </a:lnRef>
+          <a:fillRef idx="3">
+            <a:schemeClr val="accent1"/>
+          </a:fillRef>
+          <a:effectRef idx="2">
+            <a:schemeClr val="accent1"/>
+          </a:effectRef>
+          <a:fontRef idx="minor">
+            <a:schemeClr val="lt1"/>
+          </a:fontRef>
+        </p:style>
+        <p:txBody>
+          <a:bodyPr rtlCol="0" anchor="ctr" wrap="square" lIns="45720" rIns="45720" tIns="22860" bIns="22860"/>
+          <a:lstStyle/>
+          <a:p>
+            <a:pPr algn="ctr">
+              <a:defRPr sz="1200" b="0">
+                <a:solidFill>
+                  <a:srgbClr val="111111"/>
+                </a:solidFill>
+              </a:defRPr>
+            </a:pPr>
+            <a:r>
+              <a:t>hot state (항상 fresh)</a:t>
+            </a:r>
+          </a:p>
+        </p:txBody>
+      </p:sp>
+      <p:sp>
+        <p:nvSpPr>
+          <p:cNvPr id="21" name="Down Arrow 20"/>
+          <p:cNvSpPr/>
+          <p:nvPr/>
+        </p:nvSpPr>
+        <p:spPr>
+          <a:xfrm>
+            <a:off x="3867912" y="3246120"/>
+            <a:ext cx="274320" cy="457200"/>
+          </a:xfrm>
+          <a:prstGeom prst="downArrow">
+            <a:avLst/>
+          </a:prstGeom>
+          <a:solidFill>
+            <a:srgbClr val="1F77B4"/>
+          </a:solidFill>
+          <a:ln>
+            <a:noFill/>
+          </a:ln>
+        </p:spPr>
+        <p:style>
+          <a:lnRef idx="1">
+            <a:schemeClr val="accent1"/>
+          </a:lnRef>
+          <a:fillRef idx="3">
+            <a:schemeClr val="accent1"/>
+          </a:fillRef>
+          <a:effectRef idx="2">
+            <a:schemeClr val="accent1"/>
+          </a:effectRef>
+          <a:fontRef idx="minor">
+            <a:schemeClr val="lt1"/>
+          </a:fontRef>
+        </p:style>
+        <p:txBody>
+          <a:bodyPr rtlCol="0" anchor="ctr"/>
+          <a:lstStyle/>
+          <a:p>
+            <a:pPr algn="ctr"/>
+          </a:p>
+        </p:txBody>
+      </p:sp>
+      <p:sp>
+        <p:nvSpPr>
+          <p:cNvPr id="22" name="Down Arrow 21"/>
+          <p:cNvSpPr/>
+          <p:nvPr/>
+        </p:nvSpPr>
+        <p:spPr>
+          <a:xfrm>
+            <a:off x="7708392" y="3246120"/>
+            <a:ext cx="274320" cy="457200"/>
+          </a:xfrm>
+          <a:prstGeom prst="downArrow">
+            <a:avLst/>
+          </a:prstGeom>
+          <a:solidFill>
+            <a:srgbClr val="1F77B4"/>
+          </a:solidFill>
+          <a:ln>
+            <a:noFill/>
+          </a:ln>
+        </p:spPr>
+        <p:style>
+          <a:lnRef idx="1">
+            <a:schemeClr val="accent1"/>
+          </a:lnRef>
+          <a:fillRef idx="3">
+            <a:schemeClr val="accent1"/>
+          </a:fillRef>
+          <a:effectRef idx="2">
+            <a:schemeClr val="accent1"/>
+          </a:effectRef>
+          <a:fontRef idx="minor">
+            <a:schemeClr val="lt1"/>
+          </a:fontRef>
+        </p:style>
+        <p:txBody>
+          <a:bodyPr rtlCol="0" anchor="ctr"/>
+          <a:lstStyle/>
+          <a:p>
+            <a:pPr algn="ctr"/>
+          </a:p>
+        </p:txBody>
+      </p:sp>
+      <p:sp>
+        <p:nvSpPr>
+          <p:cNvPr id="23" name="Rounded Rectangle 22"/>
+          <p:cNvSpPr/>
+          <p:nvPr/>
+        </p:nvSpPr>
+        <p:spPr>
+          <a:xfrm>
+            <a:off x="731520" y="3794760"/>
+            <a:ext cx="7863840" cy="548640"/>
+          </a:xfrm>
+          <a:prstGeom prst="roundRect">
             <a:avLst/>
           </a:prstGeom>
           <a:solidFill>
@@ -4538,30 +4861,30 @@
           <a:lstStyle/>
           <a:p>
             <a:pPr algn="ctr">
-              <a:defRPr sz="1100" b="1">
-                <a:solidFill>
-                  <a:srgbClr val="111111"/>
-                </a:solidFill>
-              </a:defRPr>
-            </a:pPr>
-            <a:r>
-              <a:t>bench</a:t>
-            </a:r>
-          </a:p>
-        </p:txBody>
-      </p:sp>
-      <p:sp>
-        <p:nvSpPr>
-          <p:cNvPr id="4" name="Rectangle 3"/>
+              <a:defRPr sz="1200" b="0">
+                <a:solidFill>
+                  <a:srgbClr val="111111"/>
+                </a:solidFill>
+              </a:defRPr>
+            </a:pPr>
+            <a:r>
+              <a:t>cold state (c=4마다 chunk-exact write-back — 개루프, 수학적 exact)</a:t>
+            </a:r>
+          </a:p>
+        </p:txBody>
+      </p:sp>
+      <p:sp>
+        <p:nvSpPr>
+          <p:cNvPr id="24" name="Rounded Rectangle 23"/>
           <p:cNvSpPr/>
           <p:nvPr/>
         </p:nvSpPr>
         <p:spPr>
           <a:xfrm>
-            <a:off x="2880360" y="1325880"/>
-            <a:ext cx="1188720" cy="502920"/>
-          </a:xfrm>
-          <a:prstGeom prst="rect">
+            <a:off x="8778240" y="3794760"/>
+            <a:ext cx="2834640" cy="548640"/>
+          </a:xfrm>
+          <a:prstGeom prst="roundRect">
             <a:avLst/>
           </a:prstGeom>
           <a:solidFill>
@@ -4599,993 +4922,21 @@
               </a:defRPr>
             </a:pPr>
             <a:r>
-              <a:t>raw</a:t>
-            </a:r>
-          </a:p>
-        </p:txBody>
-      </p:sp>
-      <p:sp>
-        <p:nvSpPr>
-          <p:cNvPr id="5" name="Rectangle 4"/>
-          <p:cNvSpPr/>
-          <p:nvPr/>
-        </p:nvSpPr>
-        <p:spPr>
-          <a:xfrm>
-            <a:off x="4069080" y="1325880"/>
-            <a:ext cx="2377440" cy="502920"/>
-          </a:xfrm>
-          <a:prstGeom prst="rect">
-            <a:avLst/>
-          </a:prstGeom>
-          <a:solidFill>
-            <a:srgbClr val="DBEAFE"/>
-          </a:solidFill>
-          <a:ln w="17780">
-            <a:solidFill>
-              <a:srgbClr val="1F77B4"/>
-            </a:solidFill>
-          </a:ln>
-        </p:spPr>
-        <p:style>
-          <a:lnRef idx="1">
-            <a:schemeClr val="accent1"/>
-          </a:lnRef>
-          <a:fillRef idx="3">
-            <a:schemeClr val="accent1"/>
-          </a:fillRef>
-          <a:effectRef idx="2">
-            <a:schemeClr val="accent1"/>
-          </a:effectRef>
-          <a:fontRef idx="minor">
-            <a:schemeClr val="lt1"/>
-          </a:fontRef>
-        </p:style>
-        <p:txBody>
-          <a:bodyPr rtlCol="0" anchor="ctr" wrap="square" lIns="45720" rIns="45720" tIns="22860" bIns="22860"/>
-          <a:lstStyle/>
-          <a:p>
-            <a:pPr algn="ctr">
-              <a:defRPr sz="1100" b="1">
-                <a:solidFill>
-                  <a:srgbClr val="111111"/>
-                </a:solidFill>
-              </a:defRPr>
-            </a:pPr>
-            <a:r>
-              <a:t>fresh (R만 켬)</a:t>
-            </a:r>
-          </a:p>
-        </p:txBody>
-      </p:sp>
-      <p:sp>
-        <p:nvSpPr>
-          <p:cNvPr id="6" name="Rectangle 5"/>
-          <p:cNvSpPr/>
-          <p:nvPr/>
-        </p:nvSpPr>
-        <p:spPr>
-          <a:xfrm>
-            <a:off x="6446520" y="1325880"/>
-            <a:ext cx="3017520" cy="502920"/>
-          </a:xfrm>
-          <a:prstGeom prst="rect">
-            <a:avLst/>
-          </a:prstGeom>
-          <a:solidFill>
-            <a:srgbClr val="DBEAFE"/>
-          </a:solidFill>
-          <a:ln w="17780">
-            <a:solidFill>
-              <a:srgbClr val="1F77B4"/>
-            </a:solidFill>
-          </a:ln>
-        </p:spPr>
-        <p:style>
-          <a:lnRef idx="1">
-            <a:schemeClr val="accent1"/>
-          </a:lnRef>
-          <a:fillRef idx="3">
-            <a:schemeClr val="accent1"/>
-          </a:fillRef>
-          <a:effectRef idx="2">
-            <a:schemeClr val="accent1"/>
-          </a:effectRef>
-          <a:fontRef idx="minor">
-            <a:schemeClr val="lt1"/>
-          </a:fontRef>
-        </p:style>
-        <p:txBody>
-          <a:bodyPr rtlCol="0" anchor="ctr" wrap="square" lIns="45720" rIns="45720" tIns="22860" bIns="22860"/>
-          <a:lstStyle/>
-          <a:p>
-            <a:pPr algn="ctr">
-              <a:defRPr sz="1100" b="1">
-                <a:solidFill>
-                  <a:srgbClr val="111111"/>
-                </a:solidFill>
-              </a:defRPr>
-            </a:pPr>
-            <a:r>
-              <a:t>v4-c4-fp8 (배포점)</a:t>
-            </a:r>
-          </a:p>
-        </p:txBody>
-      </p:sp>
-      <p:sp>
-        <p:nvSpPr>
-          <p:cNvPr id="7" name="Rectangle 6"/>
-          <p:cNvSpPr/>
-          <p:nvPr/>
-        </p:nvSpPr>
-        <p:spPr>
-          <a:xfrm>
-            <a:off x="9464040" y="1325880"/>
-            <a:ext cx="2468880" cy="502920"/>
-          </a:xfrm>
-          <a:prstGeom prst="rect">
-            <a:avLst/>
-          </a:prstGeom>
-          <a:solidFill>
-            <a:srgbClr val="DBEAFE"/>
-          </a:solidFill>
-          <a:ln w="17780">
-            <a:solidFill>
-              <a:srgbClr val="1F77B4"/>
-            </a:solidFill>
-          </a:ln>
-        </p:spPr>
-        <p:style>
-          <a:lnRef idx="1">
-            <a:schemeClr val="accent1"/>
-          </a:lnRef>
-          <a:fillRef idx="3">
-            <a:schemeClr val="accent1"/>
-          </a:fillRef>
-          <a:effectRef idx="2">
-            <a:schemeClr val="accent1"/>
-          </a:effectRef>
-          <a:fontRef idx="minor">
-            <a:schemeClr val="lt1"/>
-          </a:fontRef>
-        </p:style>
-        <p:txBody>
-          <a:bodyPr rtlCol="0" anchor="ctr" wrap="square" lIns="45720" rIns="45720" tIns="22860" bIns="22860"/>
-          <a:lstStyle/>
-          <a:p>
-            <a:pPr algn="ctr">
-              <a:defRPr sz="1100" b="1">
-                <a:solidFill>
-                  <a:srgbClr val="111111"/>
-                </a:solidFill>
-              </a:defRPr>
-            </a:pPr>
-            <a:r>
-              <a:t>판정</a:t>
-            </a:r>
-          </a:p>
-        </p:txBody>
-      </p:sp>
-      <p:sp>
-        <p:nvSpPr>
-          <p:cNvPr id="8" name="Rectangle 7"/>
-          <p:cNvSpPr/>
-          <p:nvPr/>
-        </p:nvSpPr>
-        <p:spPr>
-          <a:xfrm>
-            <a:off x="594360" y="1828800"/>
-            <a:ext cx="2286000" cy="502920"/>
-          </a:xfrm>
-          <a:prstGeom prst="rect">
-            <a:avLst/>
-          </a:prstGeom>
-          <a:solidFill>
-            <a:srgbClr val="FFFFFF"/>
-          </a:solidFill>
-          <a:ln w="17780">
-            <a:solidFill>
-              <a:srgbClr val="1F77B4"/>
-            </a:solidFill>
-          </a:ln>
-        </p:spPr>
-        <p:style>
-          <a:lnRef idx="1">
-            <a:schemeClr val="accent1"/>
-          </a:lnRef>
-          <a:fillRef idx="3">
-            <a:schemeClr val="accent1"/>
-          </a:fillRef>
-          <a:effectRef idx="2">
-            <a:schemeClr val="accent1"/>
-          </a:effectRef>
-          <a:fontRef idx="minor">
-            <a:schemeClr val="lt1"/>
-          </a:fontRef>
-        </p:style>
-        <p:txBody>
-          <a:bodyPr rtlCol="0" anchor="ctr" wrap="square" lIns="45720" rIns="45720" tIns="22860" bIns="22860"/>
-          <a:lstStyle/>
-          <a:p>
-            <a:pPr algn="ctr">
-              <a:defRPr sz="1100" b="0">
-                <a:solidFill>
-                  <a:srgbClr val="111111"/>
-                </a:solidFill>
-              </a:defRPr>
-            </a:pPr>
-            <a:r>
-              <a:t>GSM8K (1319)</a:t>
-            </a:r>
-          </a:p>
-        </p:txBody>
-      </p:sp>
-      <p:sp>
-        <p:nvSpPr>
-          <p:cNvPr id="9" name="Rectangle 8"/>
-          <p:cNvSpPr/>
-          <p:nvPr/>
-        </p:nvSpPr>
-        <p:spPr>
-          <a:xfrm>
-            <a:off x="2880360" y="1828800"/>
-            <a:ext cx="1188720" cy="502920"/>
-          </a:xfrm>
-          <a:prstGeom prst="rect">
-            <a:avLst/>
-          </a:prstGeom>
-          <a:solidFill>
-            <a:srgbClr val="FFFFFF"/>
-          </a:solidFill>
-          <a:ln w="17780">
-            <a:solidFill>
-              <a:srgbClr val="1F77B4"/>
-            </a:solidFill>
-          </a:ln>
-        </p:spPr>
-        <p:style>
-          <a:lnRef idx="1">
-            <a:schemeClr val="accent1"/>
-          </a:lnRef>
-          <a:fillRef idx="3">
-            <a:schemeClr val="accent1"/>
-          </a:fillRef>
-          <a:effectRef idx="2">
-            <a:schemeClr val="accent1"/>
-          </a:effectRef>
-          <a:fontRef idx="minor">
-            <a:schemeClr val="lt1"/>
-          </a:fontRef>
-        </p:style>
-        <p:txBody>
-          <a:bodyPr rtlCol="0" anchor="ctr" wrap="square" lIns="45720" rIns="45720" tIns="22860" bIns="22860"/>
-          <a:lstStyle/>
-          <a:p>
-            <a:pPr algn="ctr">
-              <a:defRPr sz="1100" b="0">
-                <a:solidFill>
-                  <a:srgbClr val="111111"/>
-                </a:solidFill>
-              </a:defRPr>
-            </a:pPr>
-            <a:r>
-              <a:t>95.0</a:t>
-            </a:r>
-          </a:p>
-        </p:txBody>
-      </p:sp>
-      <p:sp>
-        <p:nvSpPr>
-          <p:cNvPr id="10" name="Rectangle 9"/>
-          <p:cNvSpPr/>
-          <p:nvPr/>
-        </p:nvSpPr>
-        <p:spPr>
-          <a:xfrm>
-            <a:off x="4069080" y="1828800"/>
-            <a:ext cx="2377440" cy="502920"/>
-          </a:xfrm>
-          <a:prstGeom prst="rect">
-            <a:avLst/>
-          </a:prstGeom>
-          <a:solidFill>
-            <a:srgbClr val="FFFFFF"/>
-          </a:solidFill>
-          <a:ln w="17780">
-            <a:solidFill>
-              <a:srgbClr val="1F77B4"/>
-            </a:solidFill>
-          </a:ln>
-        </p:spPr>
-        <p:style>
-          <a:lnRef idx="1">
-            <a:schemeClr val="accent1"/>
-          </a:lnRef>
-          <a:fillRef idx="3">
-            <a:schemeClr val="accent1"/>
-          </a:fillRef>
-          <a:effectRef idx="2">
-            <a:schemeClr val="accent1"/>
-          </a:effectRef>
-          <a:fontRef idx="minor">
-            <a:schemeClr val="lt1"/>
-          </a:fontRef>
-        </p:style>
-        <p:txBody>
-          <a:bodyPr rtlCol="0" anchor="ctr" wrap="square" lIns="45720" rIns="45720" tIns="22860" bIns="22860"/>
-          <a:lstStyle/>
-          <a:p>
-            <a:pPr algn="ctr">
-              <a:defRPr sz="1100" b="0">
-                <a:solidFill>
-                  <a:srgbClr val="111111"/>
-                </a:solidFill>
-              </a:defRPr>
-            </a:pPr>
-            <a:r>
-              <a:t>95.0 (정답수 동일)</a:t>
-            </a:r>
-          </a:p>
-        </p:txBody>
-      </p:sp>
-      <p:sp>
-        <p:nvSpPr>
-          <p:cNvPr id="11" name="Rectangle 10"/>
-          <p:cNvSpPr/>
-          <p:nvPr/>
-        </p:nvSpPr>
-        <p:spPr>
-          <a:xfrm>
-            <a:off x="6446520" y="1828800"/>
-            <a:ext cx="3017520" cy="502920"/>
-          </a:xfrm>
-          <a:prstGeom prst="rect">
-            <a:avLst/>
-          </a:prstGeom>
-          <a:solidFill>
-            <a:srgbClr val="FFFFFF"/>
-          </a:solidFill>
-          <a:ln w="17780">
-            <a:solidFill>
-              <a:srgbClr val="1F77B4"/>
-            </a:solidFill>
-          </a:ln>
-        </p:spPr>
-        <p:style>
-          <a:lnRef idx="1">
-            <a:schemeClr val="accent1"/>
-          </a:lnRef>
-          <a:fillRef idx="3">
-            <a:schemeClr val="accent1"/>
-          </a:fillRef>
-          <a:effectRef idx="2">
-            <a:schemeClr val="accent1"/>
-          </a:effectRef>
-          <a:fontRef idx="minor">
-            <a:schemeClr val="lt1"/>
-          </a:fontRef>
-        </p:style>
-        <p:txBody>
-          <a:bodyPr rtlCol="0" anchor="ctr" wrap="square" lIns="45720" rIns="45720" tIns="22860" bIns="22860"/>
-          <a:lstStyle/>
-          <a:p>
-            <a:pPr algn="ctr">
-              <a:defRPr sz="1100" b="0">
-                <a:solidFill>
-                  <a:srgbClr val="111111"/>
-                </a:solidFill>
-              </a:defRPr>
-            </a:pPr>
-            <a:r>
-              <a:t>94.6</a:t>
-            </a:r>
-          </a:p>
-        </p:txBody>
-      </p:sp>
-      <p:sp>
-        <p:nvSpPr>
-          <p:cNvPr id="12" name="Rectangle 11"/>
-          <p:cNvSpPr/>
-          <p:nvPr/>
-        </p:nvSpPr>
-        <p:spPr>
-          <a:xfrm>
-            <a:off x="9464040" y="1828800"/>
-            <a:ext cx="2468880" cy="502920"/>
-          </a:xfrm>
-          <a:prstGeom prst="rect">
-            <a:avLst/>
-          </a:prstGeom>
-          <a:solidFill>
-            <a:srgbClr val="FFFFFF"/>
-          </a:solidFill>
-          <a:ln w="17780">
-            <a:solidFill>
-              <a:srgbClr val="1F77B4"/>
-            </a:solidFill>
-          </a:ln>
-        </p:spPr>
-        <p:style>
-          <a:lnRef idx="1">
-            <a:schemeClr val="accent1"/>
-          </a:lnRef>
-          <a:fillRef idx="3">
-            <a:schemeClr val="accent1"/>
-          </a:fillRef>
-          <a:effectRef idx="2">
-            <a:schemeClr val="accent1"/>
-          </a:effectRef>
-          <a:fontRef idx="minor">
-            <a:schemeClr val="lt1"/>
-          </a:fontRef>
-        </p:style>
-        <p:txBody>
-          <a:bodyPr rtlCol="0" anchor="ctr" wrap="square" lIns="45720" rIns="45720" tIns="22860" bIns="22860"/>
-          <a:lstStyle/>
-          <a:p>
-            <a:pPr algn="ctr">
-              <a:defRPr sz="1100" b="0">
-                <a:solidFill>
-                  <a:srgbClr val="111111"/>
-                </a:solidFill>
-              </a:defRPr>
-            </a:pPr>
-            <a:r>
-              <a:t>lossless</a:t>
-            </a:r>
-          </a:p>
-        </p:txBody>
-      </p:sp>
-      <p:sp>
-        <p:nvSpPr>
-          <p:cNvPr id="13" name="Rectangle 12"/>
-          <p:cNvSpPr/>
-          <p:nvPr/>
-        </p:nvSpPr>
-        <p:spPr>
-          <a:xfrm>
-            <a:off x="594360" y="2331720"/>
-            <a:ext cx="2286000" cy="502920"/>
-          </a:xfrm>
-          <a:prstGeom prst="rect">
-            <a:avLst/>
-          </a:prstGeom>
-          <a:solidFill>
-            <a:srgbClr val="FFFFFF"/>
-          </a:solidFill>
-          <a:ln w="17780">
-            <a:solidFill>
-              <a:srgbClr val="1F77B4"/>
-            </a:solidFill>
-          </a:ln>
-        </p:spPr>
-        <p:style>
-          <a:lnRef idx="1">
-            <a:schemeClr val="accent1"/>
-          </a:lnRef>
-          <a:fillRef idx="3">
-            <a:schemeClr val="accent1"/>
-          </a:fillRef>
-          <a:effectRef idx="2">
-            <a:schemeClr val="accent1"/>
-          </a:effectRef>
-          <a:fontRef idx="minor">
-            <a:schemeClr val="lt1"/>
-          </a:fontRef>
-        </p:style>
-        <p:txBody>
-          <a:bodyPr rtlCol="0" anchor="ctr" wrap="square" lIns="45720" rIns="45720" tIns="22860" bIns="22860"/>
-          <a:lstStyle/>
-          <a:p>
-            <a:pPr algn="ctr">
-              <a:defRPr sz="1100" b="0">
-                <a:solidFill>
-                  <a:srgbClr val="111111"/>
-                </a:solidFill>
-              </a:defRPr>
-            </a:pPr>
-            <a:r>
-              <a:t>MATH-500</a:t>
-            </a:r>
-          </a:p>
-        </p:txBody>
-      </p:sp>
-      <p:sp>
-        <p:nvSpPr>
-          <p:cNvPr id="14" name="Rectangle 13"/>
-          <p:cNvSpPr/>
-          <p:nvPr/>
-        </p:nvSpPr>
-        <p:spPr>
-          <a:xfrm>
-            <a:off x="2880360" y="2331720"/>
-            <a:ext cx="1188720" cy="502920"/>
-          </a:xfrm>
-          <a:prstGeom prst="rect">
-            <a:avLst/>
-          </a:prstGeom>
-          <a:solidFill>
-            <a:srgbClr val="FFFFFF"/>
-          </a:solidFill>
-          <a:ln w="17780">
-            <a:solidFill>
-              <a:srgbClr val="1F77B4"/>
-            </a:solidFill>
-          </a:ln>
-        </p:spPr>
-        <p:style>
-          <a:lnRef idx="1">
-            <a:schemeClr val="accent1"/>
-          </a:lnRef>
-          <a:fillRef idx="3">
-            <a:schemeClr val="accent1"/>
-          </a:fillRef>
-          <a:effectRef idx="2">
-            <a:schemeClr val="accent1"/>
-          </a:effectRef>
-          <a:fontRef idx="minor">
-            <a:schemeClr val="lt1"/>
-          </a:fontRef>
-        </p:style>
-        <p:txBody>
-          <a:bodyPr rtlCol="0" anchor="ctr" wrap="square" lIns="45720" rIns="45720" tIns="22860" bIns="22860"/>
-          <a:lstStyle/>
-          <a:p>
-            <a:pPr algn="ctr">
-              <a:defRPr sz="1100" b="0">
-                <a:solidFill>
-                  <a:srgbClr val="111111"/>
-                </a:solidFill>
-              </a:defRPr>
-            </a:pPr>
-            <a:r>
-              <a:t>97.6</a:t>
-            </a:r>
-          </a:p>
-        </p:txBody>
-      </p:sp>
-      <p:sp>
-        <p:nvSpPr>
-          <p:cNvPr id="15" name="Rectangle 14"/>
-          <p:cNvSpPr/>
-          <p:nvPr/>
-        </p:nvSpPr>
-        <p:spPr>
-          <a:xfrm>
-            <a:off x="4069080" y="2331720"/>
-            <a:ext cx="2377440" cy="502920"/>
-          </a:xfrm>
-          <a:prstGeom prst="rect">
-            <a:avLst/>
-          </a:prstGeom>
-          <a:solidFill>
-            <a:srgbClr val="FFFFFF"/>
-          </a:solidFill>
-          <a:ln w="17780">
-            <a:solidFill>
-              <a:srgbClr val="1F77B4"/>
-            </a:solidFill>
-          </a:ln>
-        </p:spPr>
-        <p:style>
-          <a:lnRef idx="1">
-            <a:schemeClr val="accent1"/>
-          </a:lnRef>
-          <a:fillRef idx="3">
-            <a:schemeClr val="accent1"/>
-          </a:fillRef>
-          <a:effectRef idx="2">
-            <a:schemeClr val="accent1"/>
-          </a:effectRef>
-          <a:fontRef idx="minor">
-            <a:schemeClr val="lt1"/>
-          </a:fontRef>
-        </p:style>
-        <p:txBody>
-          <a:bodyPr rtlCol="0" anchor="ctr" wrap="square" lIns="45720" rIns="45720" tIns="22860" bIns="22860"/>
-          <a:lstStyle/>
-          <a:p>
-            <a:pPr algn="ctr">
-              <a:defRPr sz="1100" b="0">
-                <a:solidFill>
-                  <a:srgbClr val="111111"/>
-                </a:solidFill>
-              </a:defRPr>
-            </a:pPr>
-            <a:r>
-              <a:t>98.2</a:t>
-            </a:r>
-          </a:p>
-        </p:txBody>
-      </p:sp>
-      <p:sp>
-        <p:nvSpPr>
-          <p:cNvPr id="16" name="Rectangle 15"/>
-          <p:cNvSpPr/>
-          <p:nvPr/>
-        </p:nvSpPr>
-        <p:spPr>
-          <a:xfrm>
-            <a:off x="6446520" y="2331720"/>
-            <a:ext cx="3017520" cy="502920"/>
-          </a:xfrm>
-          <a:prstGeom prst="rect">
-            <a:avLst/>
-          </a:prstGeom>
-          <a:solidFill>
-            <a:srgbClr val="FFFFFF"/>
-          </a:solidFill>
-          <a:ln w="17780">
-            <a:solidFill>
-              <a:srgbClr val="1F77B4"/>
-            </a:solidFill>
-          </a:ln>
-        </p:spPr>
-        <p:style>
-          <a:lnRef idx="1">
-            <a:schemeClr val="accent1"/>
-          </a:lnRef>
-          <a:fillRef idx="3">
-            <a:schemeClr val="accent1"/>
-          </a:fillRef>
-          <a:effectRef idx="2">
-            <a:schemeClr val="accent1"/>
-          </a:effectRef>
-          <a:fontRef idx="minor">
-            <a:schemeClr val="lt1"/>
-          </a:fontRef>
-        </p:style>
-        <p:txBody>
-          <a:bodyPr rtlCol="0" anchor="ctr" wrap="square" lIns="45720" rIns="45720" tIns="22860" bIns="22860"/>
-          <a:lstStyle/>
-          <a:p>
-            <a:pPr algn="ctr">
-              <a:defRPr sz="1100" b="0">
-                <a:solidFill>
-                  <a:srgbClr val="111111"/>
-                </a:solidFill>
-              </a:defRPr>
-            </a:pPr>
-            <a:r>
-              <a:t>95.2 → longcot2로 봉합 중</a:t>
-            </a:r>
-          </a:p>
-        </p:txBody>
-      </p:sp>
-      <p:sp>
-        <p:nvSpPr>
-          <p:cNvPr id="17" name="Rectangle 16"/>
-          <p:cNvSpPr/>
-          <p:nvPr/>
-        </p:nvSpPr>
-        <p:spPr>
-          <a:xfrm>
-            <a:off x="9464040" y="2331720"/>
-            <a:ext cx="2468880" cy="502920"/>
-          </a:xfrm>
-          <a:prstGeom prst="rect">
-            <a:avLst/>
-          </a:prstGeom>
-          <a:solidFill>
-            <a:srgbClr val="FFFFFF"/>
-          </a:solidFill>
-          <a:ln w="17780">
-            <a:solidFill>
-              <a:srgbClr val="1F77B4"/>
-            </a:solidFill>
-          </a:ln>
-        </p:spPr>
-        <p:style>
-          <a:lnRef idx="1">
-            <a:schemeClr val="accent1"/>
-          </a:lnRef>
-          <a:fillRef idx="3">
-            <a:schemeClr val="accent1"/>
-          </a:fillRef>
-          <a:effectRef idx="2">
-            <a:schemeClr val="accent1"/>
-          </a:effectRef>
-          <a:fontRef idx="minor">
-            <a:schemeClr val="lt1"/>
-          </a:fontRef>
-        </p:style>
-        <p:txBody>
-          <a:bodyPr rtlCol="0" anchor="ctr" wrap="square" lIns="45720" rIns="45720" tIns="22860" bIns="22860"/>
-          <a:lstStyle/>
-          <a:p>
-            <a:pPr algn="ctr">
-              <a:defRPr sz="1100" b="0">
-                <a:solidFill>
-                  <a:srgbClr val="111111"/>
-                </a:solidFill>
-              </a:defRPr>
-            </a:pPr>
-            <a:r>
-              <a:t>−2.4 (staleness, 정밀도 무관)</a:t>
-            </a:r>
-          </a:p>
-        </p:txBody>
-      </p:sp>
-      <p:sp>
-        <p:nvSpPr>
-          <p:cNvPr id="18" name="Rectangle 17"/>
-          <p:cNvSpPr/>
-          <p:nvPr/>
-        </p:nvSpPr>
-        <p:spPr>
-          <a:xfrm>
-            <a:off x="594360" y="2834639"/>
-            <a:ext cx="2286000" cy="502920"/>
-          </a:xfrm>
-          <a:prstGeom prst="rect">
-            <a:avLst/>
-          </a:prstGeom>
-          <a:solidFill>
-            <a:srgbClr val="FFFFFF"/>
-          </a:solidFill>
-          <a:ln w="17780">
-            <a:solidFill>
-              <a:srgbClr val="1F77B4"/>
-            </a:solidFill>
-          </a:ln>
-        </p:spPr>
-        <p:style>
-          <a:lnRef idx="1">
-            <a:schemeClr val="accent1"/>
-          </a:lnRef>
-          <a:fillRef idx="3">
-            <a:schemeClr val="accent1"/>
-          </a:fillRef>
-          <a:effectRef idx="2">
-            <a:schemeClr val="accent1"/>
-          </a:effectRef>
-          <a:fontRef idx="minor">
-            <a:schemeClr val="lt1"/>
-          </a:fontRef>
-        </p:style>
-        <p:txBody>
-          <a:bodyPr rtlCol="0" anchor="ctr" wrap="square" lIns="45720" rIns="45720" tIns="22860" bIns="22860"/>
-          <a:lstStyle/>
-          <a:p>
-            <a:pPr algn="ctr">
-              <a:defRPr sz="1100" b="0">
-                <a:solidFill>
-                  <a:srgbClr val="111111"/>
-                </a:solidFill>
-              </a:defRPr>
-            </a:pPr>
-            <a:r>
-              <a:t>RULER@4k niah 5종</a:t>
-            </a:r>
-          </a:p>
-        </p:txBody>
-      </p:sp>
-      <p:sp>
-        <p:nvSpPr>
-          <p:cNvPr id="19" name="Rectangle 18"/>
-          <p:cNvSpPr/>
-          <p:nvPr/>
-        </p:nvSpPr>
-        <p:spPr>
-          <a:xfrm>
-            <a:off x="2880360" y="2834639"/>
-            <a:ext cx="1188720" cy="502920"/>
-          </a:xfrm>
-          <a:prstGeom prst="rect">
-            <a:avLst/>
-          </a:prstGeom>
-          <a:solidFill>
-            <a:srgbClr val="FFFFFF"/>
-          </a:solidFill>
-          <a:ln w="17780">
-            <a:solidFill>
-              <a:srgbClr val="1F77B4"/>
-            </a:solidFill>
-          </a:ln>
-        </p:spPr>
-        <p:style>
-          <a:lnRef idx="1">
-            <a:schemeClr val="accent1"/>
-          </a:lnRef>
-          <a:fillRef idx="3">
-            <a:schemeClr val="accent1"/>
-          </a:fillRef>
-          <a:effectRef idx="2">
-            <a:schemeClr val="accent1"/>
-          </a:effectRef>
-          <a:fontRef idx="minor">
-            <a:schemeClr val="lt1"/>
-          </a:fontRef>
-        </p:style>
-        <p:txBody>
-          <a:bodyPr rtlCol="0" anchor="ctr" wrap="square" lIns="45720" rIns="45720" tIns="22860" bIns="22860"/>
-          <a:lstStyle/>
-          <a:p>
-            <a:pPr algn="ctr">
-              <a:defRPr sz="1100" b="0">
-                <a:solidFill>
-                  <a:srgbClr val="111111"/>
-                </a:solidFill>
-              </a:defRPr>
-            </a:pPr>
-            <a:r>
-              <a:t>98–100</a:t>
-            </a:r>
-          </a:p>
-        </p:txBody>
-      </p:sp>
-      <p:sp>
-        <p:nvSpPr>
-          <p:cNvPr id="20" name="Rectangle 19"/>
-          <p:cNvSpPr/>
-          <p:nvPr/>
-        </p:nvSpPr>
-        <p:spPr>
-          <a:xfrm>
-            <a:off x="4069080" y="2834639"/>
-            <a:ext cx="2377440" cy="502920"/>
-          </a:xfrm>
-          <a:prstGeom prst="rect">
-            <a:avLst/>
-          </a:prstGeom>
-          <a:solidFill>
-            <a:srgbClr val="FFFFFF"/>
-          </a:solidFill>
-          <a:ln w="17780">
-            <a:solidFill>
-              <a:srgbClr val="1F77B4"/>
-            </a:solidFill>
-          </a:ln>
-        </p:spPr>
-        <p:style>
-          <a:lnRef idx="1">
-            <a:schemeClr val="accent1"/>
-          </a:lnRef>
-          <a:fillRef idx="3">
-            <a:schemeClr val="accent1"/>
-          </a:fillRef>
-          <a:effectRef idx="2">
-            <a:schemeClr val="accent1"/>
-          </a:effectRef>
-          <a:fontRef idx="minor">
-            <a:schemeClr val="lt1"/>
-          </a:fontRef>
-        </p:style>
-        <p:txBody>
-          <a:bodyPr rtlCol="0" anchor="ctr" wrap="square" lIns="45720" rIns="45720" tIns="22860" bIns="22860"/>
-          <a:lstStyle/>
-          <a:p>
-            <a:pPr algn="ctr">
-              <a:defRPr sz="1100" b="0">
-                <a:solidFill>
-                  <a:srgbClr val="111111"/>
-                </a:solidFill>
-              </a:defRPr>
-            </a:pPr>
-            <a:r>
-              <a:t>—</a:t>
-            </a:r>
-          </a:p>
-        </p:txBody>
-      </p:sp>
-      <p:sp>
-        <p:nvSpPr>
-          <p:cNvPr id="21" name="Rectangle 20"/>
-          <p:cNvSpPr/>
-          <p:nvPr/>
-        </p:nvSpPr>
-        <p:spPr>
-          <a:xfrm>
-            <a:off x="6446520" y="2834639"/>
-            <a:ext cx="3017520" cy="502920"/>
-          </a:xfrm>
-          <a:prstGeom prst="rect">
-            <a:avLst/>
-          </a:prstGeom>
-          <a:solidFill>
-            <a:srgbClr val="FFFFFF"/>
-          </a:solidFill>
-          <a:ln w="17780">
-            <a:solidFill>
-              <a:srgbClr val="1F77B4"/>
-            </a:solidFill>
-          </a:ln>
-        </p:spPr>
-        <p:style>
-          <a:lnRef idx="1">
-            <a:schemeClr val="accent1"/>
-          </a:lnRef>
-          <a:fillRef idx="3">
-            <a:schemeClr val="accent1"/>
-          </a:fillRef>
-          <a:effectRef idx="2">
-            <a:schemeClr val="accent1"/>
-          </a:effectRef>
-          <a:fontRef idx="minor">
-            <a:schemeClr val="lt1"/>
-          </a:fontRef>
-        </p:style>
-        <p:txBody>
-          <a:bodyPr rtlCol="0" anchor="ctr" wrap="square" lIns="45720" rIns="45720" tIns="22860" bIns="22860"/>
-          <a:lstStyle/>
-          <a:p>
-            <a:pPr algn="ctr">
-              <a:defRPr sz="1100" b="0">
-                <a:solidFill>
-                  <a:srgbClr val="111111"/>
-                </a:solidFill>
-              </a:defRPr>
-            </a:pPr>
-            <a:r>
-              <a:t>98–100</a:t>
-            </a:r>
-          </a:p>
-        </p:txBody>
-      </p:sp>
-      <p:sp>
-        <p:nvSpPr>
-          <p:cNvPr id="22" name="Rectangle 21"/>
-          <p:cNvSpPr/>
-          <p:nvPr/>
-        </p:nvSpPr>
-        <p:spPr>
-          <a:xfrm>
-            <a:off x="9464040" y="2834639"/>
-            <a:ext cx="2468880" cy="502920"/>
-          </a:xfrm>
-          <a:prstGeom prst="rect">
-            <a:avLst/>
-          </a:prstGeom>
-          <a:solidFill>
-            <a:srgbClr val="FFFFFF"/>
-          </a:solidFill>
-          <a:ln w="17780">
-            <a:solidFill>
-              <a:srgbClr val="1F77B4"/>
-            </a:solidFill>
-          </a:ln>
-        </p:spPr>
-        <p:style>
-          <a:lnRef idx="1">
-            <a:schemeClr val="accent1"/>
-          </a:lnRef>
-          <a:fillRef idx="3">
-            <a:schemeClr val="accent1"/>
-          </a:fillRef>
-          <a:effectRef idx="2">
-            <a:schemeClr val="accent1"/>
-          </a:effectRef>
-          <a:fontRef idx="minor">
-            <a:schemeClr val="lt1"/>
-          </a:fontRef>
-        </p:style>
-        <p:txBody>
-          <a:bodyPr rtlCol="0" anchor="ctr" wrap="square" lIns="45720" rIns="45720" tIns="22860" bIns="22860"/>
-          <a:lstStyle/>
-          <a:p>
-            <a:pPr algn="ctr">
-              <a:defRPr sz="1100" b="0">
-                <a:solidFill>
-                  <a:srgbClr val="111111"/>
-                </a:solidFill>
-              </a:defRPr>
-            </a:pPr>
-            <a:r>
-              <a:t>lossless</a:t>
-            </a:r>
-          </a:p>
-        </p:txBody>
-      </p:sp>
-      <p:sp>
-        <p:nvSpPr>
-          <p:cNvPr id="23" name="TextBox 22"/>
+              <a:t>COLD 쓰기: c마다 몰아서</a:t>
+            </a:r>
+          </a:p>
+        </p:txBody>
+      </p:sp>
+      <p:sp>
+        <p:nvSpPr>
+          <p:cNvPr id="25" name="TextBox 24"/>
           <p:cNvSpPr txBox="1"/>
           <p:nvPr/>
         </p:nvSpPr>
         <p:spPr>
           <a:xfrm>
-            <a:off x="594360" y="3566160"/>
-            <a:ext cx="11155680" cy="457200"/>
+            <a:off x="640080" y="4663440"/>
+            <a:ext cx="11155680" cy="1737360"/>
           </a:xfrm>
           <a:prstGeom prst="rect">
             <a:avLst/>
@@ -5599,432 +4950,16 @@
           <a:lstStyle/>
           <a:p>
             <a:pPr algn="l">
-              <a:defRPr sz="1400" b="1">
-                <a:solidFill>
-                  <a:srgbClr val="1A365D"/>
-                </a:solidFill>
-              </a:defRPr>
-            </a:pPr>
-            <a:r>
-              <a:t>속도 (B200 실측, B=256, fused-only):</a:t>
-            </a:r>
-          </a:p>
-        </p:txBody>
-      </p:sp>
-      <p:sp>
-        <p:nvSpPr>
-          <p:cNvPr id="24" name="Rounded Rectangle 23"/>
-          <p:cNvSpPr/>
-          <p:nvPr/>
-        </p:nvSpPr>
-        <p:spPr>
-          <a:xfrm>
-            <a:off x="594360" y="4023360"/>
-            <a:ext cx="2651760" cy="731520"/>
-          </a:xfrm>
-          <a:prstGeom prst="roundRect">
-            <a:avLst/>
-          </a:prstGeom>
-          <a:solidFill>
-            <a:srgbClr val="FFFFFF"/>
-          </a:solidFill>
-          <a:ln w="17780">
-            <a:solidFill>
-              <a:srgbClr val="666666"/>
-            </a:solidFill>
-          </a:ln>
-        </p:spPr>
-        <p:style>
-          <a:lnRef idx="1">
-            <a:schemeClr val="accent1"/>
-          </a:lnRef>
-          <a:fillRef idx="3">
-            <a:schemeClr val="accent1"/>
-          </a:fillRef>
-          <a:effectRef idx="2">
-            <a:schemeClr val="accent1"/>
-          </a:effectRef>
-          <a:fontRef idx="minor">
-            <a:schemeClr val="lt1"/>
-          </a:fontRef>
-        </p:style>
-        <p:txBody>
-          <a:bodyPr rtlCol="0" anchor="ctr" wrap="square" lIns="45720" rIns="45720" tIns="22860" bIns="22860"/>
-          <a:lstStyle/>
-          <a:p>
-            <a:pPr algn="ctr">
-              <a:defRPr sz="1200" b="0">
-                <a:solidFill>
-                  <a:srgbClr val="111111"/>
-                </a:solidFill>
-              </a:defRPr>
-            </a:pPr>
-            <a:r>
-              <a:t>fresh (fp32)</a:t>
-            </a:r>
-          </a:p>
-          <a:p>
-            <a:pPr algn="ctr">
-              <a:defRPr sz="1200" b="0">
-                <a:solidFill>
-                  <a:srgbClr val="111111"/>
-                </a:solidFill>
-              </a:defRPr>
-            </a:pPr>
-            <a:r>
-              <a:t>1.00×</a:t>
-            </a:r>
-          </a:p>
-        </p:txBody>
-      </p:sp>
-      <p:sp>
-        <p:nvSpPr>
-          <p:cNvPr id="25" name="Right Arrow 24"/>
-          <p:cNvSpPr/>
-          <p:nvPr/>
-        </p:nvSpPr>
-        <p:spPr>
-          <a:xfrm>
-            <a:off x="3291840" y="4206240"/>
-            <a:ext cx="457200" cy="292608"/>
-          </a:xfrm>
-          <a:prstGeom prst="rightArrow">
-            <a:avLst/>
-          </a:prstGeom>
-          <a:solidFill>
-            <a:srgbClr val="666666"/>
-          </a:solidFill>
-          <a:ln>
-            <a:noFill/>
-          </a:ln>
-        </p:spPr>
-        <p:style>
-          <a:lnRef idx="1">
-            <a:schemeClr val="accent1"/>
-          </a:lnRef>
-          <a:fillRef idx="3">
-            <a:schemeClr val="accent1"/>
-          </a:fillRef>
-          <a:effectRef idx="2">
-            <a:schemeClr val="accent1"/>
-          </a:effectRef>
-          <a:fontRef idx="minor">
-            <a:schemeClr val="lt1"/>
-          </a:fontRef>
-        </p:style>
-        <p:txBody>
-          <a:bodyPr rtlCol="0" anchor="ctr"/>
-          <a:lstStyle/>
-          <a:p>
-            <a:pPr algn="ctr"/>
-          </a:p>
-        </p:txBody>
-      </p:sp>
-      <p:sp>
-        <p:nvSpPr>
-          <p:cNvPr id="26" name="Rounded Rectangle 25"/>
-          <p:cNvSpPr/>
-          <p:nvPr/>
-        </p:nvSpPr>
-        <p:spPr>
-          <a:xfrm>
-            <a:off x="3794760" y="4023360"/>
-            <a:ext cx="3017520" cy="731520"/>
-          </a:xfrm>
-          <a:prstGeom prst="roundRect">
-            <a:avLst/>
-          </a:prstGeom>
-          <a:solidFill>
-            <a:srgbClr val="FEE2E2"/>
-          </a:solidFill>
-          <a:ln w="17780">
-            <a:solidFill>
-              <a:srgbClr val="D62728"/>
-            </a:solidFill>
-          </a:ln>
-        </p:spPr>
-        <p:style>
-          <a:lnRef idx="1">
-            <a:schemeClr val="accent1"/>
-          </a:lnRef>
-          <a:fillRef idx="3">
-            <a:schemeClr val="accent1"/>
-          </a:fillRef>
-          <a:effectRef idx="2">
-            <a:schemeClr val="accent1"/>
-          </a:effectRef>
-          <a:fontRef idx="minor">
-            <a:schemeClr val="lt1"/>
-          </a:fontRef>
-        </p:style>
-        <p:txBody>
-          <a:bodyPr rtlCol="0" anchor="ctr" wrap="square" lIns="45720" rIns="45720" tIns="22860" bIns="22860"/>
-          <a:lstStyle/>
-          <a:p>
-            <a:pPr algn="ctr">
-              <a:defRPr sz="1200" b="0">
-                <a:solidFill>
-                  <a:srgbClr val="111111"/>
-                </a:solidFill>
-              </a:defRPr>
-            </a:pPr>
-            <a:r>
-              <a:t>+ lazy write (tiering c4)</a:t>
-            </a:r>
-          </a:p>
-          <a:p>
-            <a:pPr algn="ctr">
-              <a:defRPr sz="1200" b="0">
-                <a:solidFill>
-                  <a:srgbClr val="111111"/>
-                </a:solidFill>
-              </a:defRPr>
-            </a:pPr>
-            <a:r>
-              <a:t>1.62× — WRITE −61%</a:t>
-            </a:r>
-          </a:p>
-        </p:txBody>
-      </p:sp>
-      <p:sp>
-        <p:nvSpPr>
-          <p:cNvPr id="27" name="Right Arrow 26"/>
-          <p:cNvSpPr/>
-          <p:nvPr/>
-        </p:nvSpPr>
-        <p:spPr>
-          <a:xfrm>
-            <a:off x="6858000" y="4206240"/>
-            <a:ext cx="457200" cy="292608"/>
-          </a:xfrm>
-          <a:prstGeom prst="rightArrow">
-            <a:avLst/>
-          </a:prstGeom>
-          <a:solidFill>
-            <a:srgbClr val="666666"/>
-          </a:solidFill>
-          <a:ln>
-            <a:noFill/>
-          </a:ln>
-        </p:spPr>
-        <p:style>
-          <a:lnRef idx="1">
-            <a:schemeClr val="accent1"/>
-          </a:lnRef>
-          <a:fillRef idx="3">
-            <a:schemeClr val="accent1"/>
-          </a:fillRef>
-          <a:effectRef idx="2">
-            <a:schemeClr val="accent1"/>
-          </a:effectRef>
-          <a:fontRef idx="minor">
-            <a:schemeClr val="lt1"/>
-          </a:fontRef>
-        </p:style>
-        <p:txBody>
-          <a:bodyPr rtlCol="0" anchor="ctr"/>
-          <a:lstStyle/>
-          <a:p>
-            <a:pPr algn="ctr"/>
-          </a:p>
-        </p:txBody>
-      </p:sp>
-      <p:sp>
-        <p:nvSpPr>
-          <p:cNvPr id="28" name="Rounded Rectangle 27"/>
-          <p:cNvSpPr/>
-          <p:nvPr/>
-        </p:nvSpPr>
-        <p:spPr>
-          <a:xfrm>
-            <a:off x="7360920" y="4023360"/>
-            <a:ext cx="2103120" cy="731520"/>
-          </a:xfrm>
-          <a:prstGeom prst="roundRect">
-            <a:avLst/>
-          </a:prstGeom>
-          <a:solidFill>
-            <a:srgbClr val="DBEAFE"/>
-          </a:solidFill>
-          <a:ln w="17780">
-            <a:solidFill>
-              <a:srgbClr val="1F77B4"/>
-            </a:solidFill>
-          </a:ln>
-        </p:spPr>
-        <p:style>
-          <a:lnRef idx="1">
-            <a:schemeClr val="accent1"/>
-          </a:lnRef>
-          <a:fillRef idx="3">
-            <a:schemeClr val="accent1"/>
-          </a:fillRef>
-          <a:effectRef idx="2">
-            <a:schemeClr val="accent1"/>
-          </a:effectRef>
-          <a:fontRef idx="minor">
-            <a:schemeClr val="lt1"/>
-          </a:fontRef>
-        </p:style>
-        <p:txBody>
-          <a:bodyPr rtlCol="0" anchor="ctr" wrap="square" lIns="45720" rIns="45720" tIns="22860" bIns="22860"/>
-          <a:lstStyle/>
-          <a:p>
-            <a:pPr algn="ctr">
-              <a:defRPr sz="1200" b="1">
-                <a:solidFill>
-                  <a:srgbClr val="111111"/>
-                </a:solidFill>
-              </a:defRPr>
-            </a:pPr>
-            <a:r>
-              <a:t>+ bf16-cold (c16)</a:t>
-            </a:r>
-          </a:p>
-          <a:p>
-            <a:pPr algn="ctr">
-              <a:defRPr sz="1200" b="1">
-                <a:solidFill>
-                  <a:srgbClr val="111111"/>
-                </a:solidFill>
-              </a:defRPr>
-            </a:pPr>
-            <a:r>
-              <a:t>2.42×</a:t>
-            </a:r>
-          </a:p>
-        </p:txBody>
-      </p:sp>
-      <p:sp>
-        <p:nvSpPr>
-          <p:cNvPr id="29" name="Right Arrow 28"/>
-          <p:cNvSpPr/>
-          <p:nvPr/>
-        </p:nvSpPr>
-        <p:spPr>
-          <a:xfrm>
-            <a:off x="9509760" y="4206240"/>
-            <a:ext cx="457200" cy="292608"/>
-          </a:xfrm>
-          <a:prstGeom prst="rightArrow">
-            <a:avLst/>
-          </a:prstGeom>
-          <a:solidFill>
-            <a:srgbClr val="666666"/>
-          </a:solidFill>
-          <a:ln>
-            <a:noFill/>
-          </a:ln>
-        </p:spPr>
-        <p:style>
-          <a:lnRef idx="1">
-            <a:schemeClr val="accent1"/>
-          </a:lnRef>
-          <a:fillRef idx="3">
-            <a:schemeClr val="accent1"/>
-          </a:fillRef>
-          <a:effectRef idx="2">
-            <a:schemeClr val="accent1"/>
-          </a:effectRef>
-          <a:fontRef idx="minor">
-            <a:schemeClr val="lt1"/>
-          </a:fontRef>
-        </p:style>
-        <p:txBody>
-          <a:bodyPr rtlCol="0" anchor="ctr"/>
-          <a:lstStyle/>
-          <a:p>
-            <a:pPr algn="ctr"/>
-          </a:p>
-        </p:txBody>
-      </p:sp>
-      <p:sp>
-        <p:nvSpPr>
-          <p:cNvPr id="30" name="Rounded Rectangle 29"/>
-          <p:cNvSpPr/>
-          <p:nvPr/>
-        </p:nvSpPr>
-        <p:spPr>
-          <a:xfrm>
-            <a:off x="10012680" y="4023360"/>
-            <a:ext cx="1737360" cy="731520"/>
-          </a:xfrm>
-          <a:prstGeom prst="roundRect">
-            <a:avLst/>
-          </a:prstGeom>
-          <a:solidFill>
-            <a:srgbClr val="D1FAE5"/>
-          </a:solidFill>
-          <a:ln w="17780">
-            <a:solidFill>
-              <a:srgbClr val="047857"/>
-            </a:solidFill>
-          </a:ln>
-        </p:spPr>
-        <p:style>
-          <a:lnRef idx="1">
-            <a:schemeClr val="accent1"/>
-          </a:lnRef>
-          <a:fillRef idx="3">
-            <a:schemeClr val="accent1"/>
-          </a:fillRef>
-          <a:effectRef idx="2">
-            <a:schemeClr val="accent1"/>
-          </a:effectRef>
-          <a:fontRef idx="minor">
-            <a:schemeClr val="lt1"/>
-          </a:fontRef>
-        </p:style>
-        <p:txBody>
-          <a:bodyPr rtlCol="0" anchor="ctr" wrap="square" lIns="45720" rIns="45720" tIns="22860" bIns="22860"/>
-          <a:lstStyle/>
-          <a:p>
-            <a:pPr algn="ctr">
-              <a:defRPr sz="1100" b="0">
-                <a:solidFill>
-                  <a:srgbClr val="111111"/>
-                </a:solidFill>
-              </a:defRPr>
-            </a:pPr>
-            <a:r>
-              <a:t>+ fp8-cold</a:t>
-            </a:r>
-          </a:p>
-          <a:p>
-            <a:pPr algn="ctr">
-              <a:defRPr sz="1100" b="0">
-                <a:solidFill>
-                  <a:srgbClr val="111111"/>
-                </a:solidFill>
-              </a:defRPr>
-            </a:pPr>
-            <a:r>
-              <a:t>~2.8× (analytic)</a:t>
-            </a:r>
-          </a:p>
-        </p:txBody>
-      </p:sp>
-      <p:sp>
-        <p:nvSpPr>
-          <p:cNvPr id="31" name="TextBox 30"/>
-          <p:cNvSpPr txBox="1"/>
-          <p:nvPr/>
-        </p:nvSpPr>
-        <p:spPr>
-          <a:xfrm>
-            <a:off x="594360" y="5029200"/>
-            <a:ext cx="11155680" cy="1463040"/>
-          </a:xfrm>
-          <a:prstGeom prst="rect">
-            <a:avLst/>
-          </a:prstGeom>
-          <a:noFill/>
-        </p:spPr>
-        <p:txBody>
-          <a:bodyPr wrap="square">
-            <a:spAutoFit/>
-          </a:bodyPr>
-          <a:lstStyle/>
+              <a:defRPr sz="1300" b="0">
+                <a:solidFill>
+                  <a:srgbClr val="111111"/>
+                </a:solidFill>
+              </a:defRPr>
+            </a:pPr>
+            <a:r>
+              <a:t>· 읽기: y_t = C_t·S_hot(최신) + C_t·S_cold(snapshot)·exp(G_t) — 감쇠는 정확히 보상, 늦는 건 최근 c토큰의 cold 성분뿐.</a:t>
+            </a:r>
+          </a:p>
           <a:p>
             <a:pPr algn="l">
               <a:defRPr sz="1300" b="0">
@@ -6034,7 +4969,7 @@
               </a:defRPr>
             </a:pPr>
             <a:r>
-              <a:t>· 그 밖의 축 전부 3-arm 동률: commonsense 8 · recall-intensive 6(BASED) · RULER 11종 · HumanEval · needle 1.00 · ppl 0%.</a:t>
+              <a:t>· flush가 개루프(청크 단위 재계산)라는 점이 뒤의 정밀도 면허(fp8-cold)의 근원 — 라운딩 오차가 재귀에 복리로 쌓이지 않음.</a:t>
             </a:r>
           </a:p>
           <a:p>
@@ -6046,7 +4981,7 @@
               </a:defRPr>
             </a:pPr>
             <a:r>
-              <a:t>· 부정 결과도 자산: async flush 이득 0(BW 포화 — 바이트만이 화폐) · 동적 골라읽기 붕괴(read 레버는 정밀도뿐).</a:t>
+              <a:t>· c = 정확도↔속도 다이얼: 생성이 긴 태스크(수학 CoT)는 c4, 짧은 답(recall)은 c16 — 재학습 없이 config로.</a:t>
             </a:r>
           </a:p>
         </p:txBody>
@@ -6099,7 +5034,7 @@
               </a:defRPr>
             </a:pPr>
             <a:r>
-              <a:t>11. 보너스 — 비대칭 정밀도 면허 (티어링이 fp8을 공짜로 만든다)</a:t>
+              <a:t>11. 결과 — 공식 스택 3-arm 매트릭스 + B200 속도</a:t>
             </a:r>
           </a:p>
           <a:p>
@@ -6111,21 +5046,1245 @@
               </a:defRPr>
             </a:pPr>
             <a:r>
-              <a:t>같은 fp8인데: 매 토큰 재귀에 넣으면 붕괴, cold snapshot에 넣으면 무손실 — 4-cell 전부 실측</a:t>
-            </a:r>
-          </a:p>
-        </p:txBody>
-      </p:sp>
-      <p:sp>
-        <p:nvSpPr>
-          <p:cNvPr id="3" name="Rounded Rectangle 2"/>
+              <a:t>acc = NeMo-Skills + vLLM (공식 논문과 동일 측정), 3-arm = raw / fresh / v4</a:t>
+            </a:r>
+          </a:p>
+        </p:txBody>
+      </p:sp>
+      <p:sp>
+        <p:nvSpPr>
+          <p:cNvPr id="3" name="Rectangle 2"/>
           <p:cNvSpPr/>
           <p:nvPr/>
         </p:nvSpPr>
         <p:spPr>
           <a:xfrm>
-            <a:off x="731520" y="1371600"/>
-            <a:ext cx="5486400" cy="1463040"/>
+            <a:off x="594360" y="1325880"/>
+            <a:ext cx="2286000" cy="502920"/>
+          </a:xfrm>
+          <a:prstGeom prst="rect">
+            <a:avLst/>
+          </a:prstGeom>
+          <a:solidFill>
+            <a:srgbClr val="DBEAFE"/>
+          </a:solidFill>
+          <a:ln w="17780">
+            <a:solidFill>
+              <a:srgbClr val="1F77B4"/>
+            </a:solidFill>
+          </a:ln>
+        </p:spPr>
+        <p:style>
+          <a:lnRef idx="1">
+            <a:schemeClr val="accent1"/>
+          </a:lnRef>
+          <a:fillRef idx="3">
+            <a:schemeClr val="accent1"/>
+          </a:fillRef>
+          <a:effectRef idx="2">
+            <a:schemeClr val="accent1"/>
+          </a:effectRef>
+          <a:fontRef idx="minor">
+            <a:schemeClr val="lt1"/>
+          </a:fontRef>
+        </p:style>
+        <p:txBody>
+          <a:bodyPr rtlCol="0" anchor="ctr" wrap="square" lIns="45720" rIns="45720" tIns="22860" bIns="22860"/>
+          <a:lstStyle/>
+          <a:p>
+            <a:pPr algn="ctr">
+              <a:defRPr sz="1100" b="1">
+                <a:solidFill>
+                  <a:srgbClr val="111111"/>
+                </a:solidFill>
+              </a:defRPr>
+            </a:pPr>
+            <a:r>
+              <a:t>bench</a:t>
+            </a:r>
+          </a:p>
+        </p:txBody>
+      </p:sp>
+      <p:sp>
+        <p:nvSpPr>
+          <p:cNvPr id="4" name="Rectangle 3"/>
+          <p:cNvSpPr/>
+          <p:nvPr/>
+        </p:nvSpPr>
+        <p:spPr>
+          <a:xfrm>
+            <a:off x="2880360" y="1325880"/>
+            <a:ext cx="1188720" cy="502920"/>
+          </a:xfrm>
+          <a:prstGeom prst="rect">
+            <a:avLst/>
+          </a:prstGeom>
+          <a:solidFill>
+            <a:srgbClr val="DBEAFE"/>
+          </a:solidFill>
+          <a:ln w="17780">
+            <a:solidFill>
+              <a:srgbClr val="1F77B4"/>
+            </a:solidFill>
+          </a:ln>
+        </p:spPr>
+        <p:style>
+          <a:lnRef idx="1">
+            <a:schemeClr val="accent1"/>
+          </a:lnRef>
+          <a:fillRef idx="3">
+            <a:schemeClr val="accent1"/>
+          </a:fillRef>
+          <a:effectRef idx="2">
+            <a:schemeClr val="accent1"/>
+          </a:effectRef>
+          <a:fontRef idx="minor">
+            <a:schemeClr val="lt1"/>
+          </a:fontRef>
+        </p:style>
+        <p:txBody>
+          <a:bodyPr rtlCol="0" anchor="ctr" wrap="square" lIns="45720" rIns="45720" tIns="22860" bIns="22860"/>
+          <a:lstStyle/>
+          <a:p>
+            <a:pPr algn="ctr">
+              <a:defRPr sz="1100" b="1">
+                <a:solidFill>
+                  <a:srgbClr val="111111"/>
+                </a:solidFill>
+              </a:defRPr>
+            </a:pPr>
+            <a:r>
+              <a:t>raw</a:t>
+            </a:r>
+          </a:p>
+        </p:txBody>
+      </p:sp>
+      <p:sp>
+        <p:nvSpPr>
+          <p:cNvPr id="5" name="Rectangle 4"/>
+          <p:cNvSpPr/>
+          <p:nvPr/>
+        </p:nvSpPr>
+        <p:spPr>
+          <a:xfrm>
+            <a:off x="4069080" y="1325880"/>
+            <a:ext cx="2377440" cy="502920"/>
+          </a:xfrm>
+          <a:prstGeom prst="rect">
+            <a:avLst/>
+          </a:prstGeom>
+          <a:solidFill>
+            <a:srgbClr val="DBEAFE"/>
+          </a:solidFill>
+          <a:ln w="17780">
+            <a:solidFill>
+              <a:srgbClr val="1F77B4"/>
+            </a:solidFill>
+          </a:ln>
+        </p:spPr>
+        <p:style>
+          <a:lnRef idx="1">
+            <a:schemeClr val="accent1"/>
+          </a:lnRef>
+          <a:fillRef idx="3">
+            <a:schemeClr val="accent1"/>
+          </a:fillRef>
+          <a:effectRef idx="2">
+            <a:schemeClr val="accent1"/>
+          </a:effectRef>
+          <a:fontRef idx="minor">
+            <a:schemeClr val="lt1"/>
+          </a:fontRef>
+        </p:style>
+        <p:txBody>
+          <a:bodyPr rtlCol="0" anchor="ctr" wrap="square" lIns="45720" rIns="45720" tIns="22860" bIns="22860"/>
+          <a:lstStyle/>
+          <a:p>
+            <a:pPr algn="ctr">
+              <a:defRPr sz="1100" b="1">
+                <a:solidFill>
+                  <a:srgbClr val="111111"/>
+                </a:solidFill>
+              </a:defRPr>
+            </a:pPr>
+            <a:r>
+              <a:t>fresh (R만 켬)</a:t>
+            </a:r>
+          </a:p>
+        </p:txBody>
+      </p:sp>
+      <p:sp>
+        <p:nvSpPr>
+          <p:cNvPr id="6" name="Rectangle 5"/>
+          <p:cNvSpPr/>
+          <p:nvPr/>
+        </p:nvSpPr>
+        <p:spPr>
+          <a:xfrm>
+            <a:off x="6446520" y="1325880"/>
+            <a:ext cx="3017520" cy="502920"/>
+          </a:xfrm>
+          <a:prstGeom prst="rect">
+            <a:avLst/>
+          </a:prstGeom>
+          <a:solidFill>
+            <a:srgbClr val="DBEAFE"/>
+          </a:solidFill>
+          <a:ln w="17780">
+            <a:solidFill>
+              <a:srgbClr val="1F77B4"/>
+            </a:solidFill>
+          </a:ln>
+        </p:spPr>
+        <p:style>
+          <a:lnRef idx="1">
+            <a:schemeClr val="accent1"/>
+          </a:lnRef>
+          <a:fillRef idx="3">
+            <a:schemeClr val="accent1"/>
+          </a:fillRef>
+          <a:effectRef idx="2">
+            <a:schemeClr val="accent1"/>
+          </a:effectRef>
+          <a:fontRef idx="minor">
+            <a:schemeClr val="lt1"/>
+          </a:fontRef>
+        </p:style>
+        <p:txBody>
+          <a:bodyPr rtlCol="0" anchor="ctr" wrap="square" lIns="45720" rIns="45720" tIns="22860" bIns="22860"/>
+          <a:lstStyle/>
+          <a:p>
+            <a:pPr algn="ctr">
+              <a:defRPr sz="1100" b="1">
+                <a:solidFill>
+                  <a:srgbClr val="111111"/>
+                </a:solidFill>
+              </a:defRPr>
+            </a:pPr>
+            <a:r>
+              <a:t>v4-c4-fp8 (배포점)</a:t>
+            </a:r>
+          </a:p>
+        </p:txBody>
+      </p:sp>
+      <p:sp>
+        <p:nvSpPr>
+          <p:cNvPr id="7" name="Rectangle 6"/>
+          <p:cNvSpPr/>
+          <p:nvPr/>
+        </p:nvSpPr>
+        <p:spPr>
+          <a:xfrm>
+            <a:off x="9464040" y="1325880"/>
+            <a:ext cx="2468880" cy="502920"/>
+          </a:xfrm>
+          <a:prstGeom prst="rect">
+            <a:avLst/>
+          </a:prstGeom>
+          <a:solidFill>
+            <a:srgbClr val="DBEAFE"/>
+          </a:solidFill>
+          <a:ln w="17780">
+            <a:solidFill>
+              <a:srgbClr val="1F77B4"/>
+            </a:solidFill>
+          </a:ln>
+        </p:spPr>
+        <p:style>
+          <a:lnRef idx="1">
+            <a:schemeClr val="accent1"/>
+          </a:lnRef>
+          <a:fillRef idx="3">
+            <a:schemeClr val="accent1"/>
+          </a:fillRef>
+          <a:effectRef idx="2">
+            <a:schemeClr val="accent1"/>
+          </a:effectRef>
+          <a:fontRef idx="minor">
+            <a:schemeClr val="lt1"/>
+          </a:fontRef>
+        </p:style>
+        <p:txBody>
+          <a:bodyPr rtlCol="0" anchor="ctr" wrap="square" lIns="45720" rIns="45720" tIns="22860" bIns="22860"/>
+          <a:lstStyle/>
+          <a:p>
+            <a:pPr algn="ctr">
+              <a:defRPr sz="1100" b="1">
+                <a:solidFill>
+                  <a:srgbClr val="111111"/>
+                </a:solidFill>
+              </a:defRPr>
+            </a:pPr>
+            <a:r>
+              <a:t>판정</a:t>
+            </a:r>
+          </a:p>
+        </p:txBody>
+      </p:sp>
+      <p:sp>
+        <p:nvSpPr>
+          <p:cNvPr id="8" name="Rectangle 7"/>
+          <p:cNvSpPr/>
+          <p:nvPr/>
+        </p:nvSpPr>
+        <p:spPr>
+          <a:xfrm>
+            <a:off x="594360" y="1828800"/>
+            <a:ext cx="2286000" cy="502920"/>
+          </a:xfrm>
+          <a:prstGeom prst="rect">
+            <a:avLst/>
+          </a:prstGeom>
+          <a:solidFill>
+            <a:srgbClr val="FFFFFF"/>
+          </a:solidFill>
+          <a:ln w="17780">
+            <a:solidFill>
+              <a:srgbClr val="1F77B4"/>
+            </a:solidFill>
+          </a:ln>
+        </p:spPr>
+        <p:style>
+          <a:lnRef idx="1">
+            <a:schemeClr val="accent1"/>
+          </a:lnRef>
+          <a:fillRef idx="3">
+            <a:schemeClr val="accent1"/>
+          </a:fillRef>
+          <a:effectRef idx="2">
+            <a:schemeClr val="accent1"/>
+          </a:effectRef>
+          <a:fontRef idx="minor">
+            <a:schemeClr val="lt1"/>
+          </a:fontRef>
+        </p:style>
+        <p:txBody>
+          <a:bodyPr rtlCol="0" anchor="ctr" wrap="square" lIns="45720" rIns="45720" tIns="22860" bIns="22860"/>
+          <a:lstStyle/>
+          <a:p>
+            <a:pPr algn="ctr">
+              <a:defRPr sz="1100" b="0">
+                <a:solidFill>
+                  <a:srgbClr val="111111"/>
+                </a:solidFill>
+              </a:defRPr>
+            </a:pPr>
+            <a:r>
+              <a:t>GSM8K (1319)</a:t>
+            </a:r>
+          </a:p>
+        </p:txBody>
+      </p:sp>
+      <p:sp>
+        <p:nvSpPr>
+          <p:cNvPr id="9" name="Rectangle 8"/>
+          <p:cNvSpPr/>
+          <p:nvPr/>
+        </p:nvSpPr>
+        <p:spPr>
+          <a:xfrm>
+            <a:off x="2880360" y="1828800"/>
+            <a:ext cx="1188720" cy="502920"/>
+          </a:xfrm>
+          <a:prstGeom prst="rect">
+            <a:avLst/>
+          </a:prstGeom>
+          <a:solidFill>
+            <a:srgbClr val="FFFFFF"/>
+          </a:solidFill>
+          <a:ln w="17780">
+            <a:solidFill>
+              <a:srgbClr val="1F77B4"/>
+            </a:solidFill>
+          </a:ln>
+        </p:spPr>
+        <p:style>
+          <a:lnRef idx="1">
+            <a:schemeClr val="accent1"/>
+          </a:lnRef>
+          <a:fillRef idx="3">
+            <a:schemeClr val="accent1"/>
+          </a:fillRef>
+          <a:effectRef idx="2">
+            <a:schemeClr val="accent1"/>
+          </a:effectRef>
+          <a:fontRef idx="minor">
+            <a:schemeClr val="lt1"/>
+          </a:fontRef>
+        </p:style>
+        <p:txBody>
+          <a:bodyPr rtlCol="0" anchor="ctr" wrap="square" lIns="45720" rIns="45720" tIns="22860" bIns="22860"/>
+          <a:lstStyle/>
+          <a:p>
+            <a:pPr algn="ctr">
+              <a:defRPr sz="1100" b="0">
+                <a:solidFill>
+                  <a:srgbClr val="111111"/>
+                </a:solidFill>
+              </a:defRPr>
+            </a:pPr>
+            <a:r>
+              <a:t>95.0</a:t>
+            </a:r>
+          </a:p>
+        </p:txBody>
+      </p:sp>
+      <p:sp>
+        <p:nvSpPr>
+          <p:cNvPr id="10" name="Rectangle 9"/>
+          <p:cNvSpPr/>
+          <p:nvPr/>
+        </p:nvSpPr>
+        <p:spPr>
+          <a:xfrm>
+            <a:off x="4069080" y="1828800"/>
+            <a:ext cx="2377440" cy="502920"/>
+          </a:xfrm>
+          <a:prstGeom prst="rect">
+            <a:avLst/>
+          </a:prstGeom>
+          <a:solidFill>
+            <a:srgbClr val="FFFFFF"/>
+          </a:solidFill>
+          <a:ln w="17780">
+            <a:solidFill>
+              <a:srgbClr val="1F77B4"/>
+            </a:solidFill>
+          </a:ln>
+        </p:spPr>
+        <p:style>
+          <a:lnRef idx="1">
+            <a:schemeClr val="accent1"/>
+          </a:lnRef>
+          <a:fillRef idx="3">
+            <a:schemeClr val="accent1"/>
+          </a:fillRef>
+          <a:effectRef idx="2">
+            <a:schemeClr val="accent1"/>
+          </a:effectRef>
+          <a:fontRef idx="minor">
+            <a:schemeClr val="lt1"/>
+          </a:fontRef>
+        </p:style>
+        <p:txBody>
+          <a:bodyPr rtlCol="0" anchor="ctr" wrap="square" lIns="45720" rIns="45720" tIns="22860" bIns="22860"/>
+          <a:lstStyle/>
+          <a:p>
+            <a:pPr algn="ctr">
+              <a:defRPr sz="1100" b="0">
+                <a:solidFill>
+                  <a:srgbClr val="111111"/>
+                </a:solidFill>
+              </a:defRPr>
+            </a:pPr>
+            <a:r>
+              <a:t>95.0 (정답수 동일)</a:t>
+            </a:r>
+          </a:p>
+        </p:txBody>
+      </p:sp>
+      <p:sp>
+        <p:nvSpPr>
+          <p:cNvPr id="11" name="Rectangle 10"/>
+          <p:cNvSpPr/>
+          <p:nvPr/>
+        </p:nvSpPr>
+        <p:spPr>
+          <a:xfrm>
+            <a:off x="6446520" y="1828800"/>
+            <a:ext cx="3017520" cy="502920"/>
+          </a:xfrm>
+          <a:prstGeom prst="rect">
+            <a:avLst/>
+          </a:prstGeom>
+          <a:solidFill>
+            <a:srgbClr val="FFFFFF"/>
+          </a:solidFill>
+          <a:ln w="17780">
+            <a:solidFill>
+              <a:srgbClr val="1F77B4"/>
+            </a:solidFill>
+          </a:ln>
+        </p:spPr>
+        <p:style>
+          <a:lnRef idx="1">
+            <a:schemeClr val="accent1"/>
+          </a:lnRef>
+          <a:fillRef idx="3">
+            <a:schemeClr val="accent1"/>
+          </a:fillRef>
+          <a:effectRef idx="2">
+            <a:schemeClr val="accent1"/>
+          </a:effectRef>
+          <a:fontRef idx="minor">
+            <a:schemeClr val="lt1"/>
+          </a:fontRef>
+        </p:style>
+        <p:txBody>
+          <a:bodyPr rtlCol="0" anchor="ctr" wrap="square" lIns="45720" rIns="45720" tIns="22860" bIns="22860"/>
+          <a:lstStyle/>
+          <a:p>
+            <a:pPr algn="ctr">
+              <a:defRPr sz="1100" b="0">
+                <a:solidFill>
+                  <a:srgbClr val="111111"/>
+                </a:solidFill>
+              </a:defRPr>
+            </a:pPr>
+            <a:r>
+              <a:t>94.6</a:t>
+            </a:r>
+          </a:p>
+        </p:txBody>
+      </p:sp>
+      <p:sp>
+        <p:nvSpPr>
+          <p:cNvPr id="12" name="Rectangle 11"/>
+          <p:cNvSpPr/>
+          <p:nvPr/>
+        </p:nvSpPr>
+        <p:spPr>
+          <a:xfrm>
+            <a:off x="9464040" y="1828800"/>
+            <a:ext cx="2468880" cy="502920"/>
+          </a:xfrm>
+          <a:prstGeom prst="rect">
+            <a:avLst/>
+          </a:prstGeom>
+          <a:solidFill>
+            <a:srgbClr val="FFFFFF"/>
+          </a:solidFill>
+          <a:ln w="17780">
+            <a:solidFill>
+              <a:srgbClr val="1F77B4"/>
+            </a:solidFill>
+          </a:ln>
+        </p:spPr>
+        <p:style>
+          <a:lnRef idx="1">
+            <a:schemeClr val="accent1"/>
+          </a:lnRef>
+          <a:fillRef idx="3">
+            <a:schemeClr val="accent1"/>
+          </a:fillRef>
+          <a:effectRef idx="2">
+            <a:schemeClr val="accent1"/>
+          </a:effectRef>
+          <a:fontRef idx="minor">
+            <a:schemeClr val="lt1"/>
+          </a:fontRef>
+        </p:style>
+        <p:txBody>
+          <a:bodyPr rtlCol="0" anchor="ctr" wrap="square" lIns="45720" rIns="45720" tIns="22860" bIns="22860"/>
+          <a:lstStyle/>
+          <a:p>
+            <a:pPr algn="ctr">
+              <a:defRPr sz="1100" b="0">
+                <a:solidFill>
+                  <a:srgbClr val="111111"/>
+                </a:solidFill>
+              </a:defRPr>
+            </a:pPr>
+            <a:r>
+              <a:t>lossless</a:t>
+            </a:r>
+          </a:p>
+        </p:txBody>
+      </p:sp>
+      <p:sp>
+        <p:nvSpPr>
+          <p:cNvPr id="13" name="Rectangle 12"/>
+          <p:cNvSpPr/>
+          <p:nvPr/>
+        </p:nvSpPr>
+        <p:spPr>
+          <a:xfrm>
+            <a:off x="594360" y="2331720"/>
+            <a:ext cx="2286000" cy="502920"/>
+          </a:xfrm>
+          <a:prstGeom prst="rect">
+            <a:avLst/>
+          </a:prstGeom>
+          <a:solidFill>
+            <a:srgbClr val="FFFFFF"/>
+          </a:solidFill>
+          <a:ln w="17780">
+            <a:solidFill>
+              <a:srgbClr val="1F77B4"/>
+            </a:solidFill>
+          </a:ln>
+        </p:spPr>
+        <p:style>
+          <a:lnRef idx="1">
+            <a:schemeClr val="accent1"/>
+          </a:lnRef>
+          <a:fillRef idx="3">
+            <a:schemeClr val="accent1"/>
+          </a:fillRef>
+          <a:effectRef idx="2">
+            <a:schemeClr val="accent1"/>
+          </a:effectRef>
+          <a:fontRef idx="minor">
+            <a:schemeClr val="lt1"/>
+          </a:fontRef>
+        </p:style>
+        <p:txBody>
+          <a:bodyPr rtlCol="0" anchor="ctr" wrap="square" lIns="45720" rIns="45720" tIns="22860" bIns="22860"/>
+          <a:lstStyle/>
+          <a:p>
+            <a:pPr algn="ctr">
+              <a:defRPr sz="1100" b="0">
+                <a:solidFill>
+                  <a:srgbClr val="111111"/>
+                </a:solidFill>
+              </a:defRPr>
+            </a:pPr>
+            <a:r>
+              <a:t>MATH-500</a:t>
+            </a:r>
+          </a:p>
+        </p:txBody>
+      </p:sp>
+      <p:sp>
+        <p:nvSpPr>
+          <p:cNvPr id="14" name="Rectangle 13"/>
+          <p:cNvSpPr/>
+          <p:nvPr/>
+        </p:nvSpPr>
+        <p:spPr>
+          <a:xfrm>
+            <a:off x="2880360" y="2331720"/>
+            <a:ext cx="1188720" cy="502920"/>
+          </a:xfrm>
+          <a:prstGeom prst="rect">
+            <a:avLst/>
+          </a:prstGeom>
+          <a:solidFill>
+            <a:srgbClr val="FFFFFF"/>
+          </a:solidFill>
+          <a:ln w="17780">
+            <a:solidFill>
+              <a:srgbClr val="1F77B4"/>
+            </a:solidFill>
+          </a:ln>
+        </p:spPr>
+        <p:style>
+          <a:lnRef idx="1">
+            <a:schemeClr val="accent1"/>
+          </a:lnRef>
+          <a:fillRef idx="3">
+            <a:schemeClr val="accent1"/>
+          </a:fillRef>
+          <a:effectRef idx="2">
+            <a:schemeClr val="accent1"/>
+          </a:effectRef>
+          <a:fontRef idx="minor">
+            <a:schemeClr val="lt1"/>
+          </a:fontRef>
+        </p:style>
+        <p:txBody>
+          <a:bodyPr rtlCol="0" anchor="ctr" wrap="square" lIns="45720" rIns="45720" tIns="22860" bIns="22860"/>
+          <a:lstStyle/>
+          <a:p>
+            <a:pPr algn="ctr">
+              <a:defRPr sz="1100" b="0">
+                <a:solidFill>
+                  <a:srgbClr val="111111"/>
+                </a:solidFill>
+              </a:defRPr>
+            </a:pPr>
+            <a:r>
+              <a:t>97.6</a:t>
+            </a:r>
+          </a:p>
+        </p:txBody>
+      </p:sp>
+      <p:sp>
+        <p:nvSpPr>
+          <p:cNvPr id="15" name="Rectangle 14"/>
+          <p:cNvSpPr/>
+          <p:nvPr/>
+        </p:nvSpPr>
+        <p:spPr>
+          <a:xfrm>
+            <a:off x="4069080" y="2331720"/>
+            <a:ext cx="2377440" cy="502920"/>
+          </a:xfrm>
+          <a:prstGeom prst="rect">
+            <a:avLst/>
+          </a:prstGeom>
+          <a:solidFill>
+            <a:srgbClr val="FFFFFF"/>
+          </a:solidFill>
+          <a:ln w="17780">
+            <a:solidFill>
+              <a:srgbClr val="1F77B4"/>
+            </a:solidFill>
+          </a:ln>
+        </p:spPr>
+        <p:style>
+          <a:lnRef idx="1">
+            <a:schemeClr val="accent1"/>
+          </a:lnRef>
+          <a:fillRef idx="3">
+            <a:schemeClr val="accent1"/>
+          </a:fillRef>
+          <a:effectRef idx="2">
+            <a:schemeClr val="accent1"/>
+          </a:effectRef>
+          <a:fontRef idx="minor">
+            <a:schemeClr val="lt1"/>
+          </a:fontRef>
+        </p:style>
+        <p:txBody>
+          <a:bodyPr rtlCol="0" anchor="ctr" wrap="square" lIns="45720" rIns="45720" tIns="22860" bIns="22860"/>
+          <a:lstStyle/>
+          <a:p>
+            <a:pPr algn="ctr">
+              <a:defRPr sz="1100" b="0">
+                <a:solidFill>
+                  <a:srgbClr val="111111"/>
+                </a:solidFill>
+              </a:defRPr>
+            </a:pPr>
+            <a:r>
+              <a:t>98.2</a:t>
+            </a:r>
+          </a:p>
+        </p:txBody>
+      </p:sp>
+      <p:sp>
+        <p:nvSpPr>
+          <p:cNvPr id="16" name="Rectangle 15"/>
+          <p:cNvSpPr/>
+          <p:nvPr/>
+        </p:nvSpPr>
+        <p:spPr>
+          <a:xfrm>
+            <a:off x="6446520" y="2331720"/>
+            <a:ext cx="3017520" cy="502920"/>
+          </a:xfrm>
+          <a:prstGeom prst="rect">
+            <a:avLst/>
+          </a:prstGeom>
+          <a:solidFill>
+            <a:srgbClr val="FFFFFF"/>
+          </a:solidFill>
+          <a:ln w="17780">
+            <a:solidFill>
+              <a:srgbClr val="1F77B4"/>
+            </a:solidFill>
+          </a:ln>
+        </p:spPr>
+        <p:style>
+          <a:lnRef idx="1">
+            <a:schemeClr val="accent1"/>
+          </a:lnRef>
+          <a:fillRef idx="3">
+            <a:schemeClr val="accent1"/>
+          </a:fillRef>
+          <a:effectRef idx="2">
+            <a:schemeClr val="accent1"/>
+          </a:effectRef>
+          <a:fontRef idx="minor">
+            <a:schemeClr val="lt1"/>
+          </a:fontRef>
+        </p:style>
+        <p:txBody>
+          <a:bodyPr rtlCol="0" anchor="ctr" wrap="square" lIns="45720" rIns="45720" tIns="22860" bIns="22860"/>
+          <a:lstStyle/>
+          <a:p>
+            <a:pPr algn="ctr">
+              <a:defRPr sz="1100" b="0">
+                <a:solidFill>
+                  <a:srgbClr val="111111"/>
+                </a:solidFill>
+              </a:defRPr>
+            </a:pPr>
+            <a:r>
+              <a:t>95.2 → longcot2로 봉합 중</a:t>
+            </a:r>
+          </a:p>
+        </p:txBody>
+      </p:sp>
+      <p:sp>
+        <p:nvSpPr>
+          <p:cNvPr id="17" name="Rectangle 16"/>
+          <p:cNvSpPr/>
+          <p:nvPr/>
+        </p:nvSpPr>
+        <p:spPr>
+          <a:xfrm>
+            <a:off x="9464040" y="2331720"/>
+            <a:ext cx="2468880" cy="502920"/>
+          </a:xfrm>
+          <a:prstGeom prst="rect">
+            <a:avLst/>
+          </a:prstGeom>
+          <a:solidFill>
+            <a:srgbClr val="FFFFFF"/>
+          </a:solidFill>
+          <a:ln w="17780">
+            <a:solidFill>
+              <a:srgbClr val="1F77B4"/>
+            </a:solidFill>
+          </a:ln>
+        </p:spPr>
+        <p:style>
+          <a:lnRef idx="1">
+            <a:schemeClr val="accent1"/>
+          </a:lnRef>
+          <a:fillRef idx="3">
+            <a:schemeClr val="accent1"/>
+          </a:fillRef>
+          <a:effectRef idx="2">
+            <a:schemeClr val="accent1"/>
+          </a:effectRef>
+          <a:fontRef idx="minor">
+            <a:schemeClr val="lt1"/>
+          </a:fontRef>
+        </p:style>
+        <p:txBody>
+          <a:bodyPr rtlCol="0" anchor="ctr" wrap="square" lIns="45720" rIns="45720" tIns="22860" bIns="22860"/>
+          <a:lstStyle/>
+          <a:p>
+            <a:pPr algn="ctr">
+              <a:defRPr sz="1100" b="0">
+                <a:solidFill>
+                  <a:srgbClr val="111111"/>
+                </a:solidFill>
+              </a:defRPr>
+            </a:pPr>
+            <a:r>
+              <a:t>−2.4 (staleness, 정밀도 무관)</a:t>
+            </a:r>
+          </a:p>
+        </p:txBody>
+      </p:sp>
+      <p:sp>
+        <p:nvSpPr>
+          <p:cNvPr id="18" name="Rectangle 17"/>
+          <p:cNvSpPr/>
+          <p:nvPr/>
+        </p:nvSpPr>
+        <p:spPr>
+          <a:xfrm>
+            <a:off x="594360" y="2834639"/>
+            <a:ext cx="2286000" cy="502920"/>
+          </a:xfrm>
+          <a:prstGeom prst="rect">
+            <a:avLst/>
+          </a:prstGeom>
+          <a:solidFill>
+            <a:srgbClr val="FFFFFF"/>
+          </a:solidFill>
+          <a:ln w="17780">
+            <a:solidFill>
+              <a:srgbClr val="1F77B4"/>
+            </a:solidFill>
+          </a:ln>
+        </p:spPr>
+        <p:style>
+          <a:lnRef idx="1">
+            <a:schemeClr val="accent1"/>
+          </a:lnRef>
+          <a:fillRef idx="3">
+            <a:schemeClr val="accent1"/>
+          </a:fillRef>
+          <a:effectRef idx="2">
+            <a:schemeClr val="accent1"/>
+          </a:effectRef>
+          <a:fontRef idx="minor">
+            <a:schemeClr val="lt1"/>
+          </a:fontRef>
+        </p:style>
+        <p:txBody>
+          <a:bodyPr rtlCol="0" anchor="ctr" wrap="square" lIns="45720" rIns="45720" tIns="22860" bIns="22860"/>
+          <a:lstStyle/>
+          <a:p>
+            <a:pPr algn="ctr">
+              <a:defRPr sz="1100" b="0">
+                <a:solidFill>
+                  <a:srgbClr val="111111"/>
+                </a:solidFill>
+              </a:defRPr>
+            </a:pPr>
+            <a:r>
+              <a:t>RULER@4k niah 5종</a:t>
+            </a:r>
+          </a:p>
+        </p:txBody>
+      </p:sp>
+      <p:sp>
+        <p:nvSpPr>
+          <p:cNvPr id="19" name="Rectangle 18"/>
+          <p:cNvSpPr/>
+          <p:nvPr/>
+        </p:nvSpPr>
+        <p:spPr>
+          <a:xfrm>
+            <a:off x="2880360" y="2834639"/>
+            <a:ext cx="1188720" cy="502920"/>
+          </a:xfrm>
+          <a:prstGeom prst="rect">
+            <a:avLst/>
+          </a:prstGeom>
+          <a:solidFill>
+            <a:srgbClr val="FFFFFF"/>
+          </a:solidFill>
+          <a:ln w="17780">
+            <a:solidFill>
+              <a:srgbClr val="1F77B4"/>
+            </a:solidFill>
+          </a:ln>
+        </p:spPr>
+        <p:style>
+          <a:lnRef idx="1">
+            <a:schemeClr val="accent1"/>
+          </a:lnRef>
+          <a:fillRef idx="3">
+            <a:schemeClr val="accent1"/>
+          </a:fillRef>
+          <a:effectRef idx="2">
+            <a:schemeClr val="accent1"/>
+          </a:effectRef>
+          <a:fontRef idx="minor">
+            <a:schemeClr val="lt1"/>
+          </a:fontRef>
+        </p:style>
+        <p:txBody>
+          <a:bodyPr rtlCol="0" anchor="ctr" wrap="square" lIns="45720" rIns="45720" tIns="22860" bIns="22860"/>
+          <a:lstStyle/>
+          <a:p>
+            <a:pPr algn="ctr">
+              <a:defRPr sz="1100" b="0">
+                <a:solidFill>
+                  <a:srgbClr val="111111"/>
+                </a:solidFill>
+              </a:defRPr>
+            </a:pPr>
+            <a:r>
+              <a:t>98–100</a:t>
+            </a:r>
+          </a:p>
+        </p:txBody>
+      </p:sp>
+      <p:sp>
+        <p:nvSpPr>
+          <p:cNvPr id="20" name="Rectangle 19"/>
+          <p:cNvSpPr/>
+          <p:nvPr/>
+        </p:nvSpPr>
+        <p:spPr>
+          <a:xfrm>
+            <a:off x="4069080" y="2834639"/>
+            <a:ext cx="2377440" cy="502920"/>
+          </a:xfrm>
+          <a:prstGeom prst="rect">
+            <a:avLst/>
+          </a:prstGeom>
+          <a:solidFill>
+            <a:srgbClr val="FFFFFF"/>
+          </a:solidFill>
+          <a:ln w="17780">
+            <a:solidFill>
+              <a:srgbClr val="1F77B4"/>
+            </a:solidFill>
+          </a:ln>
+        </p:spPr>
+        <p:style>
+          <a:lnRef idx="1">
+            <a:schemeClr val="accent1"/>
+          </a:lnRef>
+          <a:fillRef idx="3">
+            <a:schemeClr val="accent1"/>
+          </a:fillRef>
+          <a:effectRef idx="2">
+            <a:schemeClr val="accent1"/>
+          </a:effectRef>
+          <a:fontRef idx="minor">
+            <a:schemeClr val="lt1"/>
+          </a:fontRef>
+        </p:style>
+        <p:txBody>
+          <a:bodyPr rtlCol="0" anchor="ctr" wrap="square" lIns="45720" rIns="45720" tIns="22860" bIns="22860"/>
+          <a:lstStyle/>
+          <a:p>
+            <a:pPr algn="ctr">
+              <a:defRPr sz="1100" b="0">
+                <a:solidFill>
+                  <a:srgbClr val="111111"/>
+                </a:solidFill>
+              </a:defRPr>
+            </a:pPr>
+            <a:r>
+              <a:t>—</a:t>
+            </a:r>
+          </a:p>
+        </p:txBody>
+      </p:sp>
+      <p:sp>
+        <p:nvSpPr>
+          <p:cNvPr id="21" name="Rectangle 20"/>
+          <p:cNvSpPr/>
+          <p:nvPr/>
+        </p:nvSpPr>
+        <p:spPr>
+          <a:xfrm>
+            <a:off x="6446520" y="2834639"/>
+            <a:ext cx="3017520" cy="502920"/>
+          </a:xfrm>
+          <a:prstGeom prst="rect">
+            <a:avLst/>
+          </a:prstGeom>
+          <a:solidFill>
+            <a:srgbClr val="FFFFFF"/>
+          </a:solidFill>
+          <a:ln w="17780">
+            <a:solidFill>
+              <a:srgbClr val="1F77B4"/>
+            </a:solidFill>
+          </a:ln>
+        </p:spPr>
+        <p:style>
+          <a:lnRef idx="1">
+            <a:schemeClr val="accent1"/>
+          </a:lnRef>
+          <a:fillRef idx="3">
+            <a:schemeClr val="accent1"/>
+          </a:fillRef>
+          <a:effectRef idx="2">
+            <a:schemeClr val="accent1"/>
+          </a:effectRef>
+          <a:fontRef idx="minor">
+            <a:schemeClr val="lt1"/>
+          </a:fontRef>
+        </p:style>
+        <p:txBody>
+          <a:bodyPr rtlCol="0" anchor="ctr" wrap="square" lIns="45720" rIns="45720" tIns="22860" bIns="22860"/>
+          <a:lstStyle/>
+          <a:p>
+            <a:pPr algn="ctr">
+              <a:defRPr sz="1100" b="0">
+                <a:solidFill>
+                  <a:srgbClr val="111111"/>
+                </a:solidFill>
+              </a:defRPr>
+            </a:pPr>
+            <a:r>
+              <a:t>98–100</a:t>
+            </a:r>
+          </a:p>
+        </p:txBody>
+      </p:sp>
+      <p:sp>
+        <p:nvSpPr>
+          <p:cNvPr id="22" name="Rectangle 21"/>
+          <p:cNvSpPr/>
+          <p:nvPr/>
+        </p:nvSpPr>
+        <p:spPr>
+          <a:xfrm>
+            <a:off x="9464040" y="2834639"/>
+            <a:ext cx="2468880" cy="502920"/>
+          </a:xfrm>
+          <a:prstGeom prst="rect">
+            <a:avLst/>
+          </a:prstGeom>
+          <a:solidFill>
+            <a:srgbClr val="FFFFFF"/>
+          </a:solidFill>
+          <a:ln w="17780">
+            <a:solidFill>
+              <a:srgbClr val="1F77B4"/>
+            </a:solidFill>
+          </a:ln>
+        </p:spPr>
+        <p:style>
+          <a:lnRef idx="1">
+            <a:schemeClr val="accent1"/>
+          </a:lnRef>
+          <a:fillRef idx="3">
+            <a:schemeClr val="accent1"/>
+          </a:fillRef>
+          <a:effectRef idx="2">
+            <a:schemeClr val="accent1"/>
+          </a:effectRef>
+          <a:fontRef idx="minor">
+            <a:schemeClr val="lt1"/>
+          </a:fontRef>
+        </p:style>
+        <p:txBody>
+          <a:bodyPr rtlCol="0" anchor="ctr" wrap="square" lIns="45720" rIns="45720" tIns="22860" bIns="22860"/>
+          <a:lstStyle/>
+          <a:p>
+            <a:pPr algn="ctr">
+              <a:defRPr sz="1100" b="0">
+                <a:solidFill>
+                  <a:srgbClr val="111111"/>
+                </a:solidFill>
+              </a:defRPr>
+            </a:pPr>
+            <a:r>
+              <a:t>lossless</a:t>
+            </a:r>
+          </a:p>
+        </p:txBody>
+      </p:sp>
+      <p:sp>
+        <p:nvSpPr>
+          <p:cNvPr id="23" name="TextBox 22"/>
+          <p:cNvSpPr txBox="1"/>
+          <p:nvPr/>
+        </p:nvSpPr>
+        <p:spPr>
+          <a:xfrm>
+            <a:off x="594360" y="3566160"/>
+            <a:ext cx="11155680" cy="457200"/>
+          </a:xfrm>
+          <a:prstGeom prst="rect">
+            <a:avLst/>
+          </a:prstGeom>
+          <a:noFill/>
+        </p:spPr>
+        <p:txBody>
+          <a:bodyPr wrap="square">
+            <a:spAutoFit/>
+          </a:bodyPr>
+          <a:lstStyle/>
+          <a:p>
+            <a:pPr algn="l">
+              <a:defRPr sz="1400" b="1">
+                <a:solidFill>
+                  <a:srgbClr val="1A365D"/>
+                </a:solidFill>
+              </a:defRPr>
+            </a:pPr>
+            <a:r>
+              <a:t>속도 (B200 실측, B=256, fused-only):</a:t>
+            </a:r>
+          </a:p>
+        </p:txBody>
+      </p:sp>
+      <p:sp>
+        <p:nvSpPr>
+          <p:cNvPr id="24" name="Rounded Rectangle 23"/>
+          <p:cNvSpPr/>
+          <p:nvPr/>
+        </p:nvSpPr>
+        <p:spPr>
+          <a:xfrm>
+            <a:off x="594360" y="4023360"/>
+            <a:ext cx="2651760" cy="731520"/>
+          </a:xfrm>
+          <a:prstGeom prst="roundRect">
+            <a:avLst/>
+          </a:prstGeom>
+          <a:solidFill>
+            <a:srgbClr val="FFFFFF"/>
+          </a:solidFill>
+          <a:ln w="17780">
+            <a:solidFill>
+              <a:srgbClr val="666666"/>
+            </a:solidFill>
+          </a:ln>
+        </p:spPr>
+        <p:style>
+          <a:lnRef idx="1">
+            <a:schemeClr val="accent1"/>
+          </a:lnRef>
+          <a:fillRef idx="3">
+            <a:schemeClr val="accent1"/>
+          </a:fillRef>
+          <a:effectRef idx="2">
+            <a:schemeClr val="accent1"/>
+          </a:effectRef>
+          <a:fontRef idx="minor">
+            <a:schemeClr val="lt1"/>
+          </a:fontRef>
+        </p:style>
+        <p:txBody>
+          <a:bodyPr rtlCol="0" anchor="ctr" wrap="square" lIns="45720" rIns="45720" tIns="22860" bIns="22860"/>
+          <a:lstStyle/>
+          <a:p>
+            <a:pPr algn="ctr">
+              <a:defRPr sz="1200" b="0">
+                <a:solidFill>
+                  <a:srgbClr val="111111"/>
+                </a:solidFill>
+              </a:defRPr>
+            </a:pPr>
+            <a:r>
+              <a:t>fresh (fp32)</a:t>
+            </a:r>
+          </a:p>
+          <a:p>
+            <a:pPr algn="ctr">
+              <a:defRPr sz="1200" b="0">
+                <a:solidFill>
+                  <a:srgbClr val="111111"/>
+                </a:solidFill>
+              </a:defRPr>
+            </a:pPr>
+            <a:r>
+              <a:t>1.00×</a:t>
+            </a:r>
+          </a:p>
+        </p:txBody>
+      </p:sp>
+      <p:sp>
+        <p:nvSpPr>
+          <p:cNvPr id="25" name="Right Arrow 24"/>
+          <p:cNvSpPr/>
+          <p:nvPr/>
+        </p:nvSpPr>
+        <p:spPr>
+          <a:xfrm>
+            <a:off x="3291840" y="4206240"/>
+            <a:ext cx="457200" cy="292608"/>
+          </a:xfrm>
+          <a:prstGeom prst="rightArrow">
+            <a:avLst/>
+          </a:prstGeom>
+          <a:solidFill>
+            <a:srgbClr val="666666"/>
+          </a:solidFill>
+          <a:ln>
+            <a:noFill/>
+          </a:ln>
+        </p:spPr>
+        <p:style>
+          <a:lnRef idx="1">
+            <a:schemeClr val="accent1"/>
+          </a:lnRef>
+          <a:fillRef idx="3">
+            <a:schemeClr val="accent1"/>
+          </a:fillRef>
+          <a:effectRef idx="2">
+            <a:schemeClr val="accent1"/>
+          </a:effectRef>
+          <a:fontRef idx="minor">
+            <a:schemeClr val="lt1"/>
+          </a:fontRef>
+        </p:style>
+        <p:txBody>
+          <a:bodyPr rtlCol="0" anchor="ctr"/>
+          <a:lstStyle/>
+          <a:p>
+            <a:pPr algn="ctr"/>
+          </a:p>
+        </p:txBody>
+      </p:sp>
+      <p:sp>
+        <p:nvSpPr>
+          <p:cNvPr id="26" name="Rounded Rectangle 25"/>
+          <p:cNvSpPr/>
+          <p:nvPr/>
+        </p:nvSpPr>
+        <p:spPr>
+          <a:xfrm>
+            <a:off x="3794760" y="4023360"/>
+            <a:ext cx="3017520" cy="731520"/>
           </a:xfrm>
           <a:prstGeom prst="roundRect">
             <a:avLst/>
@@ -6158,63 +6317,49 @@
           <a:lstStyle/>
           <a:p>
             <a:pPr algn="ctr">
-              <a:defRPr sz="1400" b="1">
-                <a:solidFill>
-                  <a:srgbClr val="111111"/>
-                </a:solidFill>
-              </a:defRPr>
-            </a:pPr>
-            <a:r>
-              <a:t>raw + fp8 매토큰 (폐루프)</a:t>
-            </a:r>
-          </a:p>
-          <a:p>
-            <a:pPr algn="ctr">
-              <a:defRPr sz="1400" b="1">
-                <a:solidFill>
-                  <a:srgbClr val="111111"/>
-                </a:solidFill>
-              </a:defRPr>
-            </a:pPr>
-            <a:r>
-              <a:t>MATH 93.2 붕괴</a:t>
-            </a:r>
-          </a:p>
-          <a:p>
-            <a:pPr algn="ctr">
-              <a:defRPr sz="1400" b="1">
-                <a:solidFill>
-                  <a:srgbClr val="111111"/>
-                </a:solidFill>
-              </a:defRPr>
-            </a:pPr>
-            <a:r>
-              <a:t>생성 2.2× 방황</a:t>
-            </a:r>
-          </a:p>
-        </p:txBody>
-      </p:sp>
-      <p:sp>
-        <p:nvSpPr>
-          <p:cNvPr id="4" name="Rounded Rectangle 3"/>
+              <a:defRPr sz="1200" b="0">
+                <a:solidFill>
+                  <a:srgbClr val="111111"/>
+                </a:solidFill>
+              </a:defRPr>
+            </a:pPr>
+            <a:r>
+              <a:t>+ lazy write (tiering c4)</a:t>
+            </a:r>
+          </a:p>
+          <a:p>
+            <a:pPr algn="ctr">
+              <a:defRPr sz="1200" b="0">
+                <a:solidFill>
+                  <a:srgbClr val="111111"/>
+                </a:solidFill>
+              </a:defRPr>
+            </a:pPr>
+            <a:r>
+              <a:t>1.62× — WRITE −61%</a:t>
+            </a:r>
+          </a:p>
+        </p:txBody>
+      </p:sp>
+      <p:sp>
+        <p:nvSpPr>
+          <p:cNvPr id="27" name="Right Arrow 26"/>
           <p:cNvSpPr/>
           <p:nvPr/>
         </p:nvSpPr>
         <p:spPr>
           <a:xfrm>
-            <a:off x="6400800" y="1371600"/>
-            <a:ext cx="5486400" cy="1463040"/>
-          </a:xfrm>
-          <a:prstGeom prst="roundRect">
-            <a:avLst/>
-          </a:prstGeom>
-          <a:solidFill>
-            <a:srgbClr val="FEE2E2"/>
-          </a:solidFill>
-          <a:ln w="17780">
-            <a:solidFill>
-              <a:srgbClr val="D62728"/>
-            </a:solidFill>
+            <a:off x="6858000" y="4206240"/>
+            <a:ext cx="457200" cy="292608"/>
+          </a:xfrm>
+          <a:prstGeom prst="rightArrow">
+            <a:avLst/>
+          </a:prstGeom>
+          <a:solidFill>
+            <a:srgbClr val="666666"/>
+          </a:solidFill>
+          <a:ln>
+            <a:noFill/>
           </a:ln>
         </p:spPr>
         <p:style>
@@ -6232,56 +6377,132 @@
           </a:fontRef>
         </p:style>
         <p:txBody>
+          <a:bodyPr rtlCol="0" anchor="ctr"/>
+          <a:lstStyle/>
+          <a:p>
+            <a:pPr algn="ctr"/>
+          </a:p>
+        </p:txBody>
+      </p:sp>
+      <p:sp>
+        <p:nvSpPr>
+          <p:cNvPr id="28" name="Rounded Rectangle 27"/>
+          <p:cNvSpPr/>
+          <p:nvPr/>
+        </p:nvSpPr>
+        <p:spPr>
+          <a:xfrm>
+            <a:off x="7360920" y="4023360"/>
+            <a:ext cx="2103120" cy="731520"/>
+          </a:xfrm>
+          <a:prstGeom prst="roundRect">
+            <a:avLst/>
+          </a:prstGeom>
+          <a:solidFill>
+            <a:srgbClr val="DBEAFE"/>
+          </a:solidFill>
+          <a:ln w="17780">
+            <a:solidFill>
+              <a:srgbClr val="1F77B4"/>
+            </a:solidFill>
+          </a:ln>
+        </p:spPr>
+        <p:style>
+          <a:lnRef idx="1">
+            <a:schemeClr val="accent1"/>
+          </a:lnRef>
+          <a:fillRef idx="3">
+            <a:schemeClr val="accent1"/>
+          </a:fillRef>
+          <a:effectRef idx="2">
+            <a:schemeClr val="accent1"/>
+          </a:effectRef>
+          <a:fontRef idx="minor">
+            <a:schemeClr val="lt1"/>
+          </a:fontRef>
+        </p:style>
+        <p:txBody>
           <a:bodyPr rtlCol="0" anchor="ctr" wrap="square" lIns="45720" rIns="45720" tIns="22860" bIns="22860"/>
           <a:lstStyle/>
           <a:p>
             <a:pPr algn="ctr">
-              <a:defRPr sz="1400" b="1">
-                <a:solidFill>
-                  <a:srgbClr val="111111"/>
-                </a:solidFill>
-              </a:defRPr>
-            </a:pPr>
-            <a:r>
-              <a:t>미학습 + 티어링</a:t>
-            </a:r>
-          </a:p>
-          <a:p>
-            <a:pPr algn="ctr">
-              <a:defRPr sz="1400" b="1">
-                <a:solidFill>
-                  <a:srgbClr val="111111"/>
-                </a:solidFill>
-              </a:defRPr>
-            </a:pPr>
-            <a:r>
-              <a:t>GSM8K 33.0 붕괴</a:t>
-            </a:r>
-          </a:p>
-          <a:p>
-            <a:pPr algn="ctr">
-              <a:defRPr sz="1400" b="1">
-                <a:solidFill>
-                  <a:srgbClr val="111111"/>
-                </a:solidFill>
-              </a:defRPr>
-            </a:pPr>
-            <a:r>
-              <a:t>(정밀도 무관)</a:t>
-            </a:r>
-          </a:p>
-        </p:txBody>
-      </p:sp>
-      <p:sp>
-        <p:nvSpPr>
-          <p:cNvPr id="5" name="Rounded Rectangle 4"/>
+              <a:defRPr sz="1200" b="1">
+                <a:solidFill>
+                  <a:srgbClr val="111111"/>
+                </a:solidFill>
+              </a:defRPr>
+            </a:pPr>
+            <a:r>
+              <a:t>+ bf16-cold (c16)</a:t>
+            </a:r>
+          </a:p>
+          <a:p>
+            <a:pPr algn="ctr">
+              <a:defRPr sz="1200" b="1">
+                <a:solidFill>
+                  <a:srgbClr val="111111"/>
+                </a:solidFill>
+              </a:defRPr>
+            </a:pPr>
+            <a:r>
+              <a:t>2.42×</a:t>
+            </a:r>
+          </a:p>
+        </p:txBody>
+      </p:sp>
+      <p:sp>
+        <p:nvSpPr>
+          <p:cNvPr id="29" name="Right Arrow 28"/>
           <p:cNvSpPr/>
           <p:nvPr/>
         </p:nvSpPr>
         <p:spPr>
           <a:xfrm>
-            <a:off x="731520" y="3063240"/>
-            <a:ext cx="5486400" cy="1463040"/>
+            <a:off x="9509760" y="4206240"/>
+            <a:ext cx="457200" cy="292608"/>
+          </a:xfrm>
+          <a:prstGeom prst="rightArrow">
+            <a:avLst/>
+          </a:prstGeom>
+          <a:solidFill>
+            <a:srgbClr val="666666"/>
+          </a:solidFill>
+          <a:ln>
+            <a:noFill/>
+          </a:ln>
+        </p:spPr>
+        <p:style>
+          <a:lnRef idx="1">
+            <a:schemeClr val="accent1"/>
+          </a:lnRef>
+          <a:fillRef idx="3">
+            <a:schemeClr val="accent1"/>
+          </a:fillRef>
+          <a:effectRef idx="2">
+            <a:schemeClr val="accent1"/>
+          </a:effectRef>
+          <a:fontRef idx="minor">
+            <a:schemeClr val="lt1"/>
+          </a:fontRef>
+        </p:style>
+        <p:txBody>
+          <a:bodyPr rtlCol="0" anchor="ctr"/>
+          <a:lstStyle/>
+          <a:p>
+            <a:pPr algn="ctr"/>
+          </a:p>
+        </p:txBody>
+      </p:sp>
+      <p:sp>
+        <p:nvSpPr>
+          <p:cNvPr id="30" name="Rounded Rectangle 29"/>
+          <p:cNvSpPr/>
+          <p:nvPr/>
+        </p:nvSpPr>
+        <p:spPr>
+          <a:xfrm>
+            <a:off x="10012680" y="4023360"/>
+            <a:ext cx="1737360" cy="731520"/>
           </a:xfrm>
           <a:prstGeom prst="roundRect">
             <a:avLst/>
@@ -6314,130 +6535,40 @@
           <a:lstStyle/>
           <a:p>
             <a:pPr algn="ctr">
-              <a:defRPr sz="1400" b="1">
-                <a:solidFill>
-                  <a:srgbClr val="111111"/>
-                </a:solidFill>
-              </a:defRPr>
-            </a:pPr>
-            <a:r>
-              <a:t>학습 R + 티어링 + fp32-cold</a:t>
-            </a:r>
-          </a:p>
-          <a:p>
-            <a:pPr algn="ctr">
-              <a:defRPr sz="1400" b="1">
-                <a:solidFill>
-                  <a:srgbClr val="111111"/>
-                </a:solidFill>
-              </a:defRPr>
-            </a:pPr>
-            <a:r>
-              <a:t>lossless</a:t>
-            </a:r>
-          </a:p>
-          <a:p>
-            <a:pPr algn="ctr">
-              <a:defRPr sz="1400" b="1">
-                <a:solidFill>
-                  <a:srgbClr val="111111"/>
-                </a:solidFill>
-              </a:defRPr>
-            </a:pPr>
-            <a:r>
-              <a:t>(81.6 = fresh)</a:t>
-            </a:r>
-          </a:p>
-        </p:txBody>
-      </p:sp>
-      <p:sp>
-        <p:nvSpPr>
-          <p:cNvPr id="6" name="Rounded Rectangle 5"/>
-          <p:cNvSpPr/>
-          <p:nvPr/>
-        </p:nvSpPr>
-        <p:spPr>
-          <a:xfrm>
-            <a:off x="6400800" y="3063240"/>
-            <a:ext cx="5486400" cy="1463040"/>
-          </a:xfrm>
-          <a:prstGeom prst="roundRect">
-            <a:avLst/>
-          </a:prstGeom>
-          <a:solidFill>
-            <a:srgbClr val="D1FAE5"/>
-          </a:solidFill>
-          <a:ln w="17780">
-            <a:solidFill>
-              <a:srgbClr val="047857"/>
-            </a:solidFill>
-          </a:ln>
-        </p:spPr>
-        <p:style>
-          <a:lnRef idx="1">
-            <a:schemeClr val="accent1"/>
-          </a:lnRef>
-          <a:fillRef idx="3">
-            <a:schemeClr val="accent1"/>
-          </a:fillRef>
-          <a:effectRef idx="2">
-            <a:schemeClr val="accent1"/>
-          </a:effectRef>
-          <a:fontRef idx="minor">
-            <a:schemeClr val="lt1"/>
-          </a:fontRef>
-        </p:style>
-        <p:txBody>
-          <a:bodyPr rtlCol="0" anchor="ctr" wrap="square" lIns="45720" rIns="45720" tIns="22860" bIns="22860"/>
-          <a:lstStyle/>
-          <a:p>
-            <a:pPr algn="ctr">
-              <a:defRPr sz="1400" b="1">
-                <a:solidFill>
-                  <a:srgbClr val="111111"/>
-                </a:solidFill>
-              </a:defRPr>
-            </a:pPr>
-            <a:r>
-              <a:t>학습 R + 티어링 + fp8-cold</a:t>
-            </a:r>
-          </a:p>
-          <a:p>
-            <a:pPr algn="ctr">
-              <a:defRPr sz="1400" b="1">
-                <a:solidFill>
-                  <a:srgbClr val="111111"/>
-                </a:solidFill>
-              </a:defRPr>
-            </a:pPr>
-            <a:r>
-              <a:t>95.2 공식</a:t>
-            </a:r>
-          </a:p>
-          <a:p>
-            <a:pPr algn="ctr">
-              <a:defRPr sz="1400" b="1">
-                <a:solidFill>
-                  <a:srgbClr val="111111"/>
-                </a:solidFill>
-              </a:defRPr>
-            </a:pPr>
-            <a:r>
-              <a:t>= fp32 = bf16</a:t>
-            </a:r>
-          </a:p>
-        </p:txBody>
-      </p:sp>
-      <p:sp>
-        <p:nvSpPr>
-          <p:cNvPr id="7" name="TextBox 6"/>
+              <a:defRPr sz="1100" b="0">
+                <a:solidFill>
+                  <a:srgbClr val="111111"/>
+                </a:solidFill>
+              </a:defRPr>
+            </a:pPr>
+            <a:r>
+              <a:t>+ fp8-cold</a:t>
+            </a:r>
+          </a:p>
+          <a:p>
+            <a:pPr algn="ctr">
+              <a:defRPr sz="1100" b="0">
+                <a:solidFill>
+                  <a:srgbClr val="111111"/>
+                </a:solidFill>
+              </a:defRPr>
+            </a:pPr>
+            <a:r>
+              <a:t>~2.8× (analytic)</a:t>
+            </a:r>
+          </a:p>
+        </p:txBody>
+      </p:sp>
+      <p:sp>
+        <p:nvSpPr>
+          <p:cNvPr id="31" name="TextBox 30"/>
           <p:cNvSpPr txBox="1"/>
           <p:nvPr/>
         </p:nvSpPr>
         <p:spPr>
           <a:xfrm>
-            <a:off x="731520" y="4937760"/>
-            <a:ext cx="10972800" cy="1554480"/>
+            <a:off x="594360" y="5029200"/>
+            <a:ext cx="11155680" cy="1463040"/>
           </a:xfrm>
           <a:prstGeom prst="rect">
             <a:avLst/>
@@ -6458,7 +6589,7 @@
               </a:defRPr>
             </a:pPr>
             <a:r>
-              <a:t>메커니즘: 라운딩 주입 횟수가 T회(매 토큰 재귀 — 오차 복리) → T/c회(청크 개루프 — 복리 없음)로 줄기 때문.</a:t>
+              <a:t>· 그 밖의 축 전부 3-arm 동률: commonsense 8 · recall-intensive 6(BASED) · RULER 11종 · HumanEval · needle 1.00 · ppl 0%.</a:t>
             </a:r>
           </a:p>
           <a:p>
@@ -6470,19 +6601,7 @@
               </a:defRPr>
             </a:pPr>
             <a:r>
-              <a:t>사슬: [R 학습 0.04%] → [티어링 실행권] → [청크 개루프] → [fp8 공짜]. 관문마다 실측으로 잠김.</a:t>
-            </a:r>
-          </a:p>
-          <a:p>
-            <a:pPr algn="l">
-              <a:defRPr sz="1300" b="0">
-                <a:solidFill>
-                  <a:srgbClr val="111111"/>
-                </a:solidFill>
-              </a:defRPr>
-            </a:pPr>
-            <a:r>
-              <a:t>capacity 회계: bf16-cold는 총 state 메모리도 0.625× (대역폭 2.17×와 용량 −37%를 동시에) — "용량 태워 속도 샀다" 비판의 답.</a:t>
+              <a:t>· 부정 결과도 자산: async flush 이득 0(BW 포화 — 바이트만이 화폐) · 동적 골라읽기 붕괴(read 레버는 정밀도뿐).</a:t>
             </a:r>
           </a:p>
         </p:txBody>
@@ -6535,7 +6654,443 @@
               </a:defRPr>
             </a:pPr>
             <a:r>
-              <a:t>12. 현재 상태와 로드맵</a:t>
+              <a:t>12. 보너스 — 비대칭 정밀도 면허 (티어링이 fp8을 공짜로 만든다)</a:t>
+            </a:r>
+          </a:p>
+          <a:p>
+            <a:pPr>
+              <a:defRPr sz="1200">
+                <a:solidFill>
+                  <a:srgbClr val="666666"/>
+                </a:solidFill>
+              </a:defRPr>
+            </a:pPr>
+            <a:r>
+              <a:t>같은 fp8인데: 매 토큰 재귀에 넣으면 붕괴, cold snapshot에 넣으면 무손실 — 4-cell 전부 실측</a:t>
+            </a:r>
+          </a:p>
+        </p:txBody>
+      </p:sp>
+      <p:sp>
+        <p:nvSpPr>
+          <p:cNvPr id="3" name="Rounded Rectangle 2"/>
+          <p:cNvSpPr/>
+          <p:nvPr/>
+        </p:nvSpPr>
+        <p:spPr>
+          <a:xfrm>
+            <a:off x="731520" y="1371600"/>
+            <a:ext cx="5486400" cy="1463040"/>
+          </a:xfrm>
+          <a:prstGeom prst="roundRect">
+            <a:avLst/>
+          </a:prstGeom>
+          <a:solidFill>
+            <a:srgbClr val="FEE2E2"/>
+          </a:solidFill>
+          <a:ln w="17780">
+            <a:solidFill>
+              <a:srgbClr val="D62728"/>
+            </a:solidFill>
+          </a:ln>
+        </p:spPr>
+        <p:style>
+          <a:lnRef idx="1">
+            <a:schemeClr val="accent1"/>
+          </a:lnRef>
+          <a:fillRef idx="3">
+            <a:schemeClr val="accent1"/>
+          </a:fillRef>
+          <a:effectRef idx="2">
+            <a:schemeClr val="accent1"/>
+          </a:effectRef>
+          <a:fontRef idx="minor">
+            <a:schemeClr val="lt1"/>
+          </a:fontRef>
+        </p:style>
+        <p:txBody>
+          <a:bodyPr rtlCol="0" anchor="ctr" wrap="square" lIns="45720" rIns="45720" tIns="22860" bIns="22860"/>
+          <a:lstStyle/>
+          <a:p>
+            <a:pPr algn="ctr">
+              <a:defRPr sz="1400" b="1">
+                <a:solidFill>
+                  <a:srgbClr val="111111"/>
+                </a:solidFill>
+              </a:defRPr>
+            </a:pPr>
+            <a:r>
+              <a:t>raw + fp8 매토큰 (폐루프)</a:t>
+            </a:r>
+          </a:p>
+          <a:p>
+            <a:pPr algn="ctr">
+              <a:defRPr sz="1400" b="1">
+                <a:solidFill>
+                  <a:srgbClr val="111111"/>
+                </a:solidFill>
+              </a:defRPr>
+            </a:pPr>
+            <a:r>
+              <a:t>MATH 93.2 붕괴</a:t>
+            </a:r>
+          </a:p>
+          <a:p>
+            <a:pPr algn="ctr">
+              <a:defRPr sz="1400" b="1">
+                <a:solidFill>
+                  <a:srgbClr val="111111"/>
+                </a:solidFill>
+              </a:defRPr>
+            </a:pPr>
+            <a:r>
+              <a:t>생성 2.2× 방황</a:t>
+            </a:r>
+          </a:p>
+        </p:txBody>
+      </p:sp>
+      <p:sp>
+        <p:nvSpPr>
+          <p:cNvPr id="4" name="Rounded Rectangle 3"/>
+          <p:cNvSpPr/>
+          <p:nvPr/>
+        </p:nvSpPr>
+        <p:spPr>
+          <a:xfrm>
+            <a:off x="6400800" y="1371600"/>
+            <a:ext cx="5486400" cy="1463040"/>
+          </a:xfrm>
+          <a:prstGeom prst="roundRect">
+            <a:avLst/>
+          </a:prstGeom>
+          <a:solidFill>
+            <a:srgbClr val="FEE2E2"/>
+          </a:solidFill>
+          <a:ln w="17780">
+            <a:solidFill>
+              <a:srgbClr val="D62728"/>
+            </a:solidFill>
+          </a:ln>
+        </p:spPr>
+        <p:style>
+          <a:lnRef idx="1">
+            <a:schemeClr val="accent1"/>
+          </a:lnRef>
+          <a:fillRef idx="3">
+            <a:schemeClr val="accent1"/>
+          </a:fillRef>
+          <a:effectRef idx="2">
+            <a:schemeClr val="accent1"/>
+          </a:effectRef>
+          <a:fontRef idx="minor">
+            <a:schemeClr val="lt1"/>
+          </a:fontRef>
+        </p:style>
+        <p:txBody>
+          <a:bodyPr rtlCol="0" anchor="ctr" wrap="square" lIns="45720" rIns="45720" tIns="22860" bIns="22860"/>
+          <a:lstStyle/>
+          <a:p>
+            <a:pPr algn="ctr">
+              <a:defRPr sz="1400" b="1">
+                <a:solidFill>
+                  <a:srgbClr val="111111"/>
+                </a:solidFill>
+              </a:defRPr>
+            </a:pPr>
+            <a:r>
+              <a:t>미학습 + 티어링</a:t>
+            </a:r>
+          </a:p>
+          <a:p>
+            <a:pPr algn="ctr">
+              <a:defRPr sz="1400" b="1">
+                <a:solidFill>
+                  <a:srgbClr val="111111"/>
+                </a:solidFill>
+              </a:defRPr>
+            </a:pPr>
+            <a:r>
+              <a:t>GSM8K 33.0 붕괴</a:t>
+            </a:r>
+          </a:p>
+          <a:p>
+            <a:pPr algn="ctr">
+              <a:defRPr sz="1400" b="1">
+                <a:solidFill>
+                  <a:srgbClr val="111111"/>
+                </a:solidFill>
+              </a:defRPr>
+            </a:pPr>
+            <a:r>
+              <a:t>(정밀도 무관)</a:t>
+            </a:r>
+          </a:p>
+        </p:txBody>
+      </p:sp>
+      <p:sp>
+        <p:nvSpPr>
+          <p:cNvPr id="5" name="Rounded Rectangle 4"/>
+          <p:cNvSpPr/>
+          <p:nvPr/>
+        </p:nvSpPr>
+        <p:spPr>
+          <a:xfrm>
+            <a:off x="731520" y="3063240"/>
+            <a:ext cx="5486400" cy="1463040"/>
+          </a:xfrm>
+          <a:prstGeom prst="roundRect">
+            <a:avLst/>
+          </a:prstGeom>
+          <a:solidFill>
+            <a:srgbClr val="D1FAE5"/>
+          </a:solidFill>
+          <a:ln w="17780">
+            <a:solidFill>
+              <a:srgbClr val="047857"/>
+            </a:solidFill>
+          </a:ln>
+        </p:spPr>
+        <p:style>
+          <a:lnRef idx="1">
+            <a:schemeClr val="accent1"/>
+          </a:lnRef>
+          <a:fillRef idx="3">
+            <a:schemeClr val="accent1"/>
+          </a:fillRef>
+          <a:effectRef idx="2">
+            <a:schemeClr val="accent1"/>
+          </a:effectRef>
+          <a:fontRef idx="minor">
+            <a:schemeClr val="lt1"/>
+          </a:fontRef>
+        </p:style>
+        <p:txBody>
+          <a:bodyPr rtlCol="0" anchor="ctr" wrap="square" lIns="45720" rIns="45720" tIns="22860" bIns="22860"/>
+          <a:lstStyle/>
+          <a:p>
+            <a:pPr algn="ctr">
+              <a:defRPr sz="1400" b="1">
+                <a:solidFill>
+                  <a:srgbClr val="111111"/>
+                </a:solidFill>
+              </a:defRPr>
+            </a:pPr>
+            <a:r>
+              <a:t>학습 R + 티어링 + fp32-cold</a:t>
+            </a:r>
+          </a:p>
+          <a:p>
+            <a:pPr algn="ctr">
+              <a:defRPr sz="1400" b="1">
+                <a:solidFill>
+                  <a:srgbClr val="111111"/>
+                </a:solidFill>
+              </a:defRPr>
+            </a:pPr>
+            <a:r>
+              <a:t>lossless</a:t>
+            </a:r>
+          </a:p>
+          <a:p>
+            <a:pPr algn="ctr">
+              <a:defRPr sz="1400" b="1">
+                <a:solidFill>
+                  <a:srgbClr val="111111"/>
+                </a:solidFill>
+              </a:defRPr>
+            </a:pPr>
+            <a:r>
+              <a:t>(81.6 = fresh)</a:t>
+            </a:r>
+          </a:p>
+        </p:txBody>
+      </p:sp>
+      <p:sp>
+        <p:nvSpPr>
+          <p:cNvPr id="6" name="Rounded Rectangle 5"/>
+          <p:cNvSpPr/>
+          <p:nvPr/>
+        </p:nvSpPr>
+        <p:spPr>
+          <a:xfrm>
+            <a:off x="6400800" y="3063240"/>
+            <a:ext cx="5486400" cy="1463040"/>
+          </a:xfrm>
+          <a:prstGeom prst="roundRect">
+            <a:avLst/>
+          </a:prstGeom>
+          <a:solidFill>
+            <a:srgbClr val="D1FAE5"/>
+          </a:solidFill>
+          <a:ln w="17780">
+            <a:solidFill>
+              <a:srgbClr val="047857"/>
+            </a:solidFill>
+          </a:ln>
+        </p:spPr>
+        <p:style>
+          <a:lnRef idx="1">
+            <a:schemeClr val="accent1"/>
+          </a:lnRef>
+          <a:fillRef idx="3">
+            <a:schemeClr val="accent1"/>
+          </a:fillRef>
+          <a:effectRef idx="2">
+            <a:schemeClr val="accent1"/>
+          </a:effectRef>
+          <a:fontRef idx="minor">
+            <a:schemeClr val="lt1"/>
+          </a:fontRef>
+        </p:style>
+        <p:txBody>
+          <a:bodyPr rtlCol="0" anchor="ctr" wrap="square" lIns="45720" rIns="45720" tIns="22860" bIns="22860"/>
+          <a:lstStyle/>
+          <a:p>
+            <a:pPr algn="ctr">
+              <a:defRPr sz="1400" b="1">
+                <a:solidFill>
+                  <a:srgbClr val="111111"/>
+                </a:solidFill>
+              </a:defRPr>
+            </a:pPr>
+            <a:r>
+              <a:t>학습 R + 티어링 + fp8-cold</a:t>
+            </a:r>
+          </a:p>
+          <a:p>
+            <a:pPr algn="ctr">
+              <a:defRPr sz="1400" b="1">
+                <a:solidFill>
+                  <a:srgbClr val="111111"/>
+                </a:solidFill>
+              </a:defRPr>
+            </a:pPr>
+            <a:r>
+              <a:t>95.2 공식</a:t>
+            </a:r>
+          </a:p>
+          <a:p>
+            <a:pPr algn="ctr">
+              <a:defRPr sz="1400" b="1">
+                <a:solidFill>
+                  <a:srgbClr val="111111"/>
+                </a:solidFill>
+              </a:defRPr>
+            </a:pPr>
+            <a:r>
+              <a:t>= fp32 = bf16</a:t>
+            </a:r>
+          </a:p>
+        </p:txBody>
+      </p:sp>
+      <p:sp>
+        <p:nvSpPr>
+          <p:cNvPr id="7" name="TextBox 6"/>
+          <p:cNvSpPr txBox="1"/>
+          <p:nvPr/>
+        </p:nvSpPr>
+        <p:spPr>
+          <a:xfrm>
+            <a:off x="731520" y="4937760"/>
+            <a:ext cx="10972800" cy="1554480"/>
+          </a:xfrm>
+          <a:prstGeom prst="rect">
+            <a:avLst/>
+          </a:prstGeom>
+          <a:noFill/>
+        </p:spPr>
+        <p:txBody>
+          <a:bodyPr wrap="square">
+            <a:spAutoFit/>
+          </a:bodyPr>
+          <a:lstStyle/>
+          <a:p>
+            <a:pPr algn="l">
+              <a:defRPr sz="1300" b="0">
+                <a:solidFill>
+                  <a:srgbClr val="111111"/>
+                </a:solidFill>
+              </a:defRPr>
+            </a:pPr>
+            <a:r>
+              <a:t>메커니즘: 라운딩 주입 횟수가 T회(매 토큰 재귀 — 오차 복리) → T/c회(청크 개루프 — 복리 없음)로 줄기 때문.</a:t>
+            </a:r>
+          </a:p>
+          <a:p>
+            <a:pPr algn="l">
+              <a:defRPr sz="1300" b="0">
+                <a:solidFill>
+                  <a:srgbClr val="111111"/>
+                </a:solidFill>
+              </a:defRPr>
+            </a:pPr>
+            <a:r>
+              <a:t>사슬: [R 학습 0.04%] → [티어링 실행권] → [청크 개루프] → [fp8 공짜]. 관문마다 실측으로 잠김.</a:t>
+            </a:r>
+          </a:p>
+          <a:p>
+            <a:pPr algn="l">
+              <a:defRPr sz="1300" b="0">
+                <a:solidFill>
+                  <a:srgbClr val="111111"/>
+                </a:solidFill>
+              </a:defRPr>
+            </a:pPr>
+            <a:r>
+              <a:t>capacity 회계: bf16-cold는 총 state 메모리도 0.625× (대역폭 2.17×와 용량 −37%를 동시에) — "용량 태워 속도 샀다" 비판의 답.</a:t>
+            </a:r>
+          </a:p>
+        </p:txBody>
+      </p:sp>
+    </p:spTree>
+  </p:cSld>
+  <p:clrMapOvr>
+    <a:masterClrMapping/>
+  </p:clrMapOvr>
+</p:sld>
+</file>
+
+<file path=ppt/slides/slide14.xml><?xml version="1.0" encoding="utf-8"?>
+<p:sld xmlns:a="http://schemas.openxmlformats.org/drawingml/2006/main" xmlns:p="http://schemas.openxmlformats.org/presentationml/2006/main" xmlns:r="http://schemas.openxmlformats.org/officeDocument/2006/relationships">
+  <p:cSld>
+    <p:spTree>
+      <p:nvGrpSpPr>
+        <p:cNvPr id="1" name=""/>
+        <p:cNvGrpSpPr/>
+        <p:nvPr/>
+      </p:nvGrpSpPr>
+      <p:grpSpPr/>
+      <p:sp>
+        <p:nvSpPr>
+          <p:cNvPr id="2" name="TextBox 1"/>
+          <p:cNvSpPr txBox="1"/>
+          <p:nvPr/>
+        </p:nvSpPr>
+        <p:spPr>
+          <a:xfrm>
+            <a:off x="411480" y="164592"/>
+            <a:ext cx="11368735" cy="731520"/>
+          </a:xfrm>
+          <a:prstGeom prst="rect">
+            <a:avLst/>
+          </a:prstGeom>
+          <a:noFill/>
+        </p:spPr>
+        <p:txBody>
+          <a:bodyPr wrap="none">
+            <a:spAutoFit/>
+          </a:bodyPr>
+          <a:lstStyle/>
+          <a:p>
+            <a:pPr>
+              <a:defRPr sz="2500" b="1">
+                <a:solidFill>
+                  <a:srgbClr val="1A365D"/>
+                </a:solidFill>
+              </a:defRPr>
+            </a:pPr>
+            <a:r>
+              <a:t>13. 현재 상태와 로드맵</a:t>
             </a:r>
           </a:p>
         </p:txBody>
@@ -9487,7 +10042,7 @@
               </a:defRPr>
             </a:pPr>
             <a:r>
-              <a:t>6. '차원을 정렬한다'의 수학 — 트래픽 연산자 M의 고유기저</a:t>
+              <a:t>6. 정렬의 수학 ① — readout을 채널로 쪼개면 '트래픽'이 정의된다</a:t>
             </a:r>
           </a:p>
           <a:p>
@@ -9499,121 +10054,27 @@
               </a:defRPr>
             </a:pPr>
             <a:r>
-              <a:t>집중은 이미 존재한다; R은 그것을 좌표축에 맞출 뿐</a:t>
-            </a:r>
-          </a:p>
-        </p:txBody>
-      </p:sp>
-      <p:sp>
-        <p:nvSpPr>
-          <p:cNvPr id="3" name="TextBox 2"/>
-          <p:cNvSpPr txBox="1"/>
-          <p:nvPr/>
-        </p:nvSpPr>
-        <p:spPr>
-          <a:xfrm>
-            <a:off x="502920" y="1005840"/>
-            <a:ext cx="11338560" cy="1737360"/>
-          </a:xfrm>
-          <a:prstGeom prst="rect">
-            <a:avLst/>
-          </a:prstGeom>
-          <a:noFill/>
-        </p:spPr>
-        <p:txBody>
-          <a:bodyPr wrap="square">
-            <a:spAutoFit/>
-          </a:bodyPr>
-          <a:lstStyle/>
-          <a:p>
-            <a:pPr algn="l">
-              <a:defRPr sz="1400" b="0">
-                <a:solidFill>
-                  <a:srgbClr val="111111"/>
-                </a:solidFill>
-              </a:defRPr>
-            </a:pPr>
-            <a:r>
-              <a:t>방향 r ∈ ℝ^N 이 나르는 평균 트래픽:   T(r) = rᵀ M r,    M = E[ C Bᵀ · w ]   (w = loss 민감도 가중)</a:t>
-            </a:r>
-          </a:p>
-          <a:p>
-            <a:pPr algn="l">
-              <a:defRPr sz="1400" b="0">
-                <a:solidFill>
-                  <a:srgbClr val="111111"/>
-                </a:solidFill>
-              </a:defRPr>
-            </a:pPr>
-            <a:r>
-              <a:t>앞 k개 좌표가 트래픽을 최대로 담게 하는 R = M(대칭화)의 고유기저, 고유값 내림차순 — nested dropout → PCA 정리의 연산자판.</a:t>
-            </a:r>
-          </a:p>
-          <a:p>
-            <a:pPr algn="l">
-              <a:defRPr sz="1400" b="0">
-                <a:solidFill>
-                  <a:srgbClr val="111111"/>
-                </a:solidFill>
-              </a:defRPr>
-            </a:pPr>
-            <a:r>
-              <a:t>s→t 기여식은 어느 직교 기저에서 계산해도 동일하므로(불변성), '정렬'은 성능이 아니라 배치(placement)의 문제.</a:t>
-            </a:r>
-          </a:p>
-        </p:txBody>
-      </p:sp>
-      <p:sp>
-        <p:nvSpPr>
-          <p:cNvPr id="4" name="TextBox 3"/>
-          <p:cNvSpPr txBox="1"/>
-          <p:nvPr/>
-        </p:nvSpPr>
-        <p:spPr>
-          <a:xfrm>
-            <a:off x="914400" y="2487168"/>
-            <a:ext cx="4937760" cy="365760"/>
-          </a:xfrm>
-          <a:prstGeom prst="rect">
-            <a:avLst/>
-          </a:prstGeom>
-          <a:noFill/>
-        </p:spPr>
-        <p:txBody>
-          <a:bodyPr wrap="square">
-            <a:spAutoFit/>
-          </a:bodyPr>
-          <a:lstStyle/>
-          <a:p>
-            <a:pPr algn="l">
-              <a:defRPr sz="1200" b="1">
-                <a:solidFill>
-                  <a:srgbClr val="111111"/>
-                </a:solidFill>
-              </a:defRPr>
-            </a:pPr>
-            <a:r>
-              <a:t>원 좌표: T = (0.22, 0.22, 0.12, 0.22, 0.22) — 균등해 보임</a:t>
-            </a:r>
-          </a:p>
-        </p:txBody>
-      </p:sp>
-      <p:sp>
-        <p:nvSpPr>
-          <p:cNvPr id="5" name="Rectangle 4"/>
+              <a:t>슬라이드 1의 갱신식에서 세 줄로 유도 (새 가정 0개)</a:t>
+            </a:r>
+          </a:p>
+        </p:txBody>
+      </p:sp>
+      <p:sp>
+        <p:nvSpPr>
+          <p:cNvPr id="3" name="Rounded Rectangle 2"/>
           <p:cNvSpPr/>
           <p:nvPr/>
         </p:nvSpPr>
         <p:spPr>
           <a:xfrm>
-            <a:off x="1097280" y="4412894"/>
-            <a:ext cx="640080" cy="844905"/>
-          </a:xfrm>
-          <a:prstGeom prst="rect">
-            <a:avLst/>
-          </a:prstGeom>
-          <a:solidFill>
-            <a:srgbClr val="DBEAFE"/>
+            <a:off x="502920" y="1051560"/>
+            <a:ext cx="6949440" cy="868680"/>
+          </a:xfrm>
+          <a:prstGeom prst="roundRect">
+            <a:avLst/>
+          </a:prstGeom>
+          <a:solidFill>
+            <a:srgbClr val="FFFFFF"/>
           </a:solidFill>
           <a:ln w="17780">
             <a:solidFill>
@@ -9639,32 +10100,90 @@
           <a:bodyPr rtlCol="0" anchor="ctr" wrap="square" lIns="45720" rIns="45720" tIns="22860" bIns="22860"/>
           <a:lstStyle/>
           <a:p>
-            <a:pPr algn="ctr">
-              <a:defRPr sz="1200" b="0">
-                <a:solidFill>
-                  <a:srgbClr val="111111"/>
-                </a:solidFill>
-              </a:defRPr>
-            </a:pPr>
-          </a:p>
-        </p:txBody>
-      </p:sp>
-      <p:sp>
-        <p:nvSpPr>
-          <p:cNvPr id="6" name="Rectangle 5"/>
+            <a:pPr algn="l">
+              <a:defRPr sz="1250" b="0">
+                <a:solidFill>
+                  <a:srgbClr val="111111"/>
+                </a:solidFill>
+              </a:defRPr>
+            </a:pPr>
+            <a:r>
+              <a:t>① 갱신식을 재귀 대입으로 펼친다:</a:t>
+            </a:r>
+          </a:p>
+          <a:p>
+            <a:pPr algn="l">
+              <a:defRPr sz="1250" b="0">
+                <a:solidFill>
+                  <a:srgbClr val="111111"/>
+                </a:solidFill>
+              </a:defRPr>
+            </a:pPr>
+            <a:r>
+              <a:t>y_t = Σ_s  A_{s,t} · ⟨B_s, C_t⟩ · Δx_s        (A_{s,t} = a_{s+1}···a_t : 감쇠 생존율)</a:t>
+            </a:r>
+          </a:p>
+        </p:txBody>
+      </p:sp>
+      <p:sp>
+        <p:nvSpPr>
+          <p:cNvPr id="4" name="Down Arrow 3"/>
           <p:cNvSpPr/>
           <p:nvPr/>
         </p:nvSpPr>
         <p:spPr>
           <a:xfrm>
-            <a:off x="1965960" y="4412894"/>
-            <a:ext cx="640080" cy="844905"/>
-          </a:xfrm>
-          <a:prstGeom prst="rect">
-            <a:avLst/>
-          </a:prstGeom>
-          <a:solidFill>
-            <a:srgbClr val="DBEAFE"/>
+            <a:off x="3840480" y="1993392"/>
+            <a:ext cx="274320" cy="256032"/>
+          </a:xfrm>
+          <a:prstGeom prst="downArrow">
+            <a:avLst/>
+          </a:prstGeom>
+          <a:solidFill>
+            <a:srgbClr val="666666"/>
+          </a:solidFill>
+          <a:ln>
+            <a:noFill/>
+          </a:ln>
+        </p:spPr>
+        <p:style>
+          <a:lnRef idx="1">
+            <a:schemeClr val="accent1"/>
+          </a:lnRef>
+          <a:fillRef idx="3">
+            <a:schemeClr val="accent1"/>
+          </a:fillRef>
+          <a:effectRef idx="2">
+            <a:schemeClr val="accent1"/>
+          </a:effectRef>
+          <a:fontRef idx="minor">
+            <a:schemeClr val="lt1"/>
+          </a:fontRef>
+        </p:style>
+        <p:txBody>
+          <a:bodyPr rtlCol="0" anchor="ctr"/>
+          <a:lstStyle/>
+          <a:p>
+            <a:pPr algn="ctr"/>
+          </a:p>
+        </p:txBody>
+      </p:sp>
+      <p:sp>
+        <p:nvSpPr>
+          <p:cNvPr id="5" name="Rounded Rectangle 4"/>
+          <p:cNvSpPr/>
+          <p:nvPr/>
+        </p:nvSpPr>
+        <p:spPr>
+          <a:xfrm>
+            <a:off x="502920" y="2304288"/>
+            <a:ext cx="6949440" cy="1143000"/>
+          </a:xfrm>
+          <a:prstGeom prst="roundRect">
+            <a:avLst/>
+          </a:prstGeom>
+          <a:solidFill>
+            <a:srgbClr val="FFFFFF"/>
           </a:solidFill>
           <a:ln w="17780">
             <a:solidFill>
@@ -9690,26 +10209,383 @@
           <a:bodyPr rtlCol="0" anchor="ctr" wrap="square" lIns="45720" rIns="45720" tIns="22860" bIns="22860"/>
           <a:lstStyle/>
           <a:p>
-            <a:pPr algn="ctr">
+            <a:pPr algn="l">
+              <a:defRPr sz="1250" b="0">
+                <a:solidFill>
+                  <a:srgbClr val="111111"/>
+                </a:solidFill>
+              </a:defRPr>
+            </a:pPr>
+            <a:r>
+              <a:t>② 항등식 I = Σ_n r_n r_nᵀ 을 내적 사이에 삽입 (r_n = R의 n번째 행, 정규직교):</a:t>
+            </a:r>
+          </a:p>
+          <a:p>
+            <a:pPr algn="l">
+              <a:defRPr sz="1250" b="0">
+                <a:solidFill>
+                  <a:srgbClr val="111111"/>
+                </a:solidFill>
+              </a:defRPr>
+            </a:pPr>
+            <a:r>
+              <a:t>⟨B_s, C_t⟩ = Σ_n ⟨r_n, B_s⟩ · ⟨r_n, C_t⟩</a:t>
+            </a:r>
+          </a:p>
+          <a:p>
+            <a:pPr algn="l">
+              <a:defRPr sz="1250" b="0">
+                <a:solidFill>
+                  <a:srgbClr val="111111"/>
+                </a:solidFill>
+              </a:defRPr>
+            </a:pPr>
+            <a:r>
+              <a:t>→ 총 통신이 N개 채널의 몫으로 정확히 쪼개짐 — 회전된 state의 '열 n' = 통신 채널 n</a:t>
+            </a:r>
+          </a:p>
+        </p:txBody>
+      </p:sp>
+      <p:sp>
+        <p:nvSpPr>
+          <p:cNvPr id="6" name="Down Arrow 5"/>
+          <p:cNvSpPr/>
+          <p:nvPr/>
+        </p:nvSpPr>
+        <p:spPr>
+          <a:xfrm>
+            <a:off x="3840480" y="3520440"/>
+            <a:ext cx="274320" cy="256032"/>
+          </a:xfrm>
+          <a:prstGeom prst="downArrow">
+            <a:avLst/>
+          </a:prstGeom>
+          <a:solidFill>
+            <a:srgbClr val="666666"/>
+          </a:solidFill>
+          <a:ln>
+            <a:noFill/>
+          </a:ln>
+        </p:spPr>
+        <p:style>
+          <a:lnRef idx="1">
+            <a:schemeClr val="accent1"/>
+          </a:lnRef>
+          <a:fillRef idx="3">
+            <a:schemeClr val="accent1"/>
+          </a:fillRef>
+          <a:effectRef idx="2">
+            <a:schemeClr val="accent1"/>
+          </a:effectRef>
+          <a:fontRef idx="minor">
+            <a:schemeClr val="lt1"/>
+          </a:fontRef>
+        </p:style>
+        <p:txBody>
+          <a:bodyPr rtlCol="0" anchor="ctr"/>
+          <a:lstStyle/>
+          <a:p>
+            <a:pPr algn="ctr"/>
+          </a:p>
+        </p:txBody>
+      </p:sp>
+      <p:sp>
+        <p:nvSpPr>
+          <p:cNvPr id="7" name="Rounded Rectangle 6"/>
+          <p:cNvSpPr/>
+          <p:nvPr/>
+        </p:nvSpPr>
+        <p:spPr>
+          <a:xfrm>
+            <a:off x="502920" y="3822191"/>
+            <a:ext cx="6949440" cy="868680"/>
+          </a:xfrm>
+          <a:prstGeom prst="roundRect">
+            <a:avLst/>
+          </a:prstGeom>
+          <a:solidFill>
+            <a:srgbClr val="FFF7ED"/>
+          </a:solidFill>
+          <a:ln w="17780">
+            <a:solidFill>
+              <a:srgbClr val="C2410C"/>
+            </a:solidFill>
+          </a:ln>
+        </p:spPr>
+        <p:style>
+          <a:lnRef idx="1">
+            <a:schemeClr val="accent1"/>
+          </a:lnRef>
+          <a:fillRef idx="3">
+            <a:schemeClr val="accent1"/>
+          </a:fillRef>
+          <a:effectRef idx="2">
+            <a:schemeClr val="accent1"/>
+          </a:effectRef>
+          <a:fontRef idx="minor">
+            <a:schemeClr val="lt1"/>
+          </a:fontRef>
+        </p:style>
+        <p:txBody>
+          <a:bodyPr rtlCol="0" anchor="ctr" wrap="square" lIns="45720" rIns="45720" tIns="22860" bIns="22860"/>
+          <a:lstStyle/>
+          <a:p>
+            <a:pPr algn="l">
+              <a:defRPr sz="1300" b="1">
+                <a:solidFill>
+                  <a:srgbClr val="111111"/>
+                </a:solidFill>
+              </a:defRPr>
+            </a:pPr>
+            <a:r>
+              <a:t>③ 채널 n이 나르는 평균 몫 = 트래픽:</a:t>
+            </a:r>
+          </a:p>
+          <a:p>
+            <a:pPr algn="l">
+              <a:defRPr sz="1300" b="1">
+                <a:solidFill>
+                  <a:srgbClr val="111111"/>
+                </a:solidFill>
+              </a:defRPr>
+            </a:pPr>
+            <a:r>
+              <a:t>T(r_n) = E[ ⟨C, r_n⟩⟨r_n, B⟩ ] = r_nᵀ · E[C Bᵀ] · r_n</a:t>
+            </a:r>
+          </a:p>
+        </p:txBody>
+      </p:sp>
+      <p:sp>
+        <p:nvSpPr>
+          <p:cNvPr id="8" name="Rounded Rectangle 7"/>
+          <p:cNvSpPr/>
+          <p:nvPr/>
+        </p:nvSpPr>
+        <p:spPr>
+          <a:xfrm>
+            <a:off x="7726679" y="1051560"/>
+            <a:ext cx="3931920" cy="3639312"/>
+          </a:xfrm>
+          <a:prstGeom prst="roundRect">
+            <a:avLst/>
+          </a:prstGeom>
+          <a:solidFill>
+            <a:srgbClr val="D1FAE5"/>
+          </a:solidFill>
+          <a:ln w="17780">
+            <a:solidFill>
+              <a:srgbClr val="047857"/>
+            </a:solidFill>
+          </a:ln>
+        </p:spPr>
+        <p:style>
+          <a:lnRef idx="1">
+            <a:schemeClr val="accent1"/>
+          </a:lnRef>
+          <a:fillRef idx="3">
+            <a:schemeClr val="accent1"/>
+          </a:fillRef>
+          <a:effectRef idx="2">
+            <a:schemeClr val="accent1"/>
+          </a:effectRef>
+          <a:fontRef idx="minor">
+            <a:schemeClr val="lt1"/>
+          </a:fontRef>
+        </p:style>
+        <p:txBody>
+          <a:bodyPr rtlCol="0" anchor="ctr" wrap="square" lIns="45720" rIns="45720" tIns="22860" bIns="22860"/>
+          <a:lstStyle/>
+          <a:p>
+            <a:pPr algn="l">
               <a:defRPr sz="1200" b="0">
                 <a:solidFill>
                   <a:srgbClr val="111111"/>
                 </a:solidFill>
               </a:defRPr>
             </a:pPr>
-          </a:p>
-        </p:txBody>
-      </p:sp>
-      <p:sp>
-        <p:nvSpPr>
-          <p:cNvPr id="7" name="Rectangle 6"/>
+            <a:r>
+              <a:t>숫자 예시 (N=2)</a:t>
+            </a:r>
+          </a:p>
+          <a:p>
+            <a:pPr algn="l">
+              <a:defRPr sz="1200" b="0">
+                <a:solidFill>
+                  <a:srgbClr val="111111"/>
+                </a:solidFill>
+              </a:defRPr>
+            </a:pPr>
+          </a:p>
+          <a:p>
+            <a:pPr algn="l">
+              <a:defRPr sz="1200" b="0">
+                <a:solidFill>
+                  <a:srgbClr val="111111"/>
+                </a:solidFill>
+              </a:defRPr>
+            </a:pPr>
+            <a:r>
+              <a:t>B=(3,4), C=(2,1) → 총 통신 ⟨B,C⟩ = 10</a:t>
+            </a:r>
+          </a:p>
+          <a:p>
+            <a:pPr algn="l">
+              <a:defRPr sz="1200" b="0">
+                <a:solidFill>
+                  <a:srgbClr val="111111"/>
+                </a:solidFill>
+              </a:defRPr>
+            </a:pPr>
+          </a:p>
+          <a:p>
+            <a:pPr algn="l">
+              <a:defRPr sz="1200" b="0">
+                <a:solidFill>
+                  <a:srgbClr val="111111"/>
+                </a:solidFill>
+              </a:defRPr>
+            </a:pPr>
+            <a:r>
+              <a:t>표준 기저:   3·2 + 4·1 = 6 + 4</a:t>
+            </a:r>
+          </a:p>
+          <a:p>
+            <a:pPr algn="l">
+              <a:defRPr sz="1200" b="0">
+                <a:solidFill>
+                  <a:srgbClr val="111111"/>
+                </a:solidFill>
+              </a:defRPr>
+            </a:pPr>
+            <a:r>
+              <a:t>45° 회전 기저:  10.5 + (−0.5)</a:t>
+            </a:r>
+          </a:p>
+          <a:p>
+            <a:pPr algn="l">
+              <a:defRPr sz="1200" b="0">
+                <a:solidFill>
+                  <a:srgbClr val="111111"/>
+                </a:solidFill>
+              </a:defRPr>
+            </a:pPr>
+          </a:p>
+          <a:p>
+            <a:pPr algn="l">
+              <a:defRPr sz="1200" b="0">
+                <a:solidFill>
+                  <a:srgbClr val="111111"/>
+                </a:solidFill>
+              </a:defRPr>
+            </a:pPr>
+            <a:r>
+              <a:t>합은 어느 기저에서나 10</a:t>
+            </a:r>
+          </a:p>
+          <a:p>
+            <a:pPr algn="l">
+              <a:defRPr sz="1200" b="0">
+                <a:solidFill>
+                  <a:srgbClr val="111111"/>
+                </a:solidFill>
+              </a:defRPr>
+            </a:pPr>
+            <a:r>
+              <a:t>(= 회전 불변성, full-width 무손실)</a:t>
+            </a:r>
+          </a:p>
+          <a:p>
+            <a:pPr algn="l">
+              <a:defRPr sz="1200" b="0">
+                <a:solidFill>
+                  <a:srgbClr val="111111"/>
+                </a:solidFill>
+              </a:defRPr>
+            </a:pPr>
+            <a:r>
+              <a:t>분배만 기저에 따라 달라짐</a:t>
+            </a:r>
+          </a:p>
+          <a:p>
+            <a:pPr algn="l">
+              <a:defRPr sz="1200" b="0">
+                <a:solidFill>
+                  <a:srgbClr val="111111"/>
+                </a:solidFill>
+              </a:defRPr>
+            </a:pPr>
+          </a:p>
+          <a:p>
+            <a:pPr algn="l">
+              <a:defRPr sz="1200" b="0">
+                <a:solidFill>
+                  <a:srgbClr val="111111"/>
+                </a:solidFill>
+              </a:defRPr>
+            </a:pPr>
+            <a:r>
+              <a:t>→ '정렬'은 성능이 아니라</a:t>
+            </a:r>
+          </a:p>
+          <a:p>
+            <a:pPr algn="l">
+              <a:defRPr sz="1200" b="0">
+                <a:solidFill>
+                  <a:srgbClr val="111111"/>
+                </a:solidFill>
+              </a:defRPr>
+            </a:pPr>
+            <a:r>
+              <a:t>     배치(placement)의 문제</a:t>
+            </a:r>
+          </a:p>
+        </p:txBody>
+      </p:sp>
+      <p:sp>
+        <p:nvSpPr>
+          <p:cNvPr id="9" name="TextBox 8"/>
+          <p:cNvSpPr txBox="1"/>
+          <p:nvPr/>
+        </p:nvSpPr>
+        <p:spPr>
+          <a:xfrm>
+            <a:off x="731520" y="4919472"/>
+            <a:ext cx="5120640" cy="320040"/>
+          </a:xfrm>
+          <a:prstGeom prst="rect">
+            <a:avLst/>
+          </a:prstGeom>
+          <a:noFill/>
+        </p:spPr>
+        <p:txBody>
+          <a:bodyPr wrap="square">
+            <a:spAutoFit/>
+          </a:bodyPr>
+          <a:lstStyle/>
+          <a:p>
+            <a:pPr algn="l">
+              <a:defRPr sz="1100" b="1">
+                <a:solidFill>
+                  <a:srgbClr val="111111"/>
+                </a:solidFill>
+              </a:defRPr>
+            </a:pPr>
+            <a:r>
+              <a:t>원 좌표: T = (0.22, 0.22, 0.12, 0.22, 0.22) — 균등해 보임</a:t>
+            </a:r>
+          </a:p>
+        </p:txBody>
+      </p:sp>
+      <p:sp>
+        <p:nvSpPr>
+          <p:cNvPr id="10" name="Rectangle 9"/>
           <p:cNvSpPr/>
           <p:nvPr/>
         </p:nvSpPr>
         <p:spPr>
           <a:xfrm>
-            <a:off x="2834639" y="4796942"/>
-            <a:ext cx="640080" cy="460857"/>
+            <a:off x="914400" y="6031382"/>
+            <a:ext cx="566928" cy="442569"/>
           </a:xfrm>
           <a:prstGeom prst="rect">
             <a:avLst/>
@@ -9753,14 +10629,14 @@
       </p:sp>
       <p:sp>
         <p:nvSpPr>
-          <p:cNvPr id="8" name="Rectangle 7"/>
+          <p:cNvPr id="11" name="Rectangle 10"/>
           <p:cNvSpPr/>
           <p:nvPr/>
         </p:nvSpPr>
         <p:spPr>
           <a:xfrm>
-            <a:off x="3703320" y="4412894"/>
-            <a:ext cx="640080" cy="844905"/>
+            <a:off x="1691640" y="6031382"/>
+            <a:ext cx="566928" cy="442569"/>
           </a:xfrm>
           <a:prstGeom prst="rect">
             <a:avLst/>
@@ -9804,14 +10680,14 @@
       </p:sp>
       <p:sp>
         <p:nvSpPr>
-          <p:cNvPr id="9" name="Rectangle 8"/>
+          <p:cNvPr id="12" name="Rectangle 11"/>
           <p:cNvSpPr/>
           <p:nvPr/>
         </p:nvSpPr>
         <p:spPr>
           <a:xfrm>
-            <a:off x="4572000" y="4412894"/>
-            <a:ext cx="640080" cy="844905"/>
+            <a:off x="2468880" y="6232550"/>
+            <a:ext cx="566928" cy="241401"/>
           </a:xfrm>
           <a:prstGeom prst="rect">
             <a:avLst/>
@@ -9855,14 +10731,116 @@
       </p:sp>
       <p:sp>
         <p:nvSpPr>
-          <p:cNvPr id="10" name="TextBox 9"/>
+          <p:cNvPr id="13" name="Rectangle 12"/>
+          <p:cNvSpPr/>
+          <p:nvPr/>
+        </p:nvSpPr>
+        <p:spPr>
+          <a:xfrm>
+            <a:off x="3246120" y="6031382"/>
+            <a:ext cx="566928" cy="442569"/>
+          </a:xfrm>
+          <a:prstGeom prst="rect">
+            <a:avLst/>
+          </a:prstGeom>
+          <a:solidFill>
+            <a:srgbClr val="DBEAFE"/>
+          </a:solidFill>
+          <a:ln w="17780">
+            <a:solidFill>
+              <a:srgbClr val="1F77B4"/>
+            </a:solidFill>
+          </a:ln>
+        </p:spPr>
+        <p:style>
+          <a:lnRef idx="1">
+            <a:schemeClr val="accent1"/>
+          </a:lnRef>
+          <a:fillRef idx="3">
+            <a:schemeClr val="accent1"/>
+          </a:fillRef>
+          <a:effectRef idx="2">
+            <a:schemeClr val="accent1"/>
+          </a:effectRef>
+          <a:fontRef idx="minor">
+            <a:schemeClr val="lt1"/>
+          </a:fontRef>
+        </p:style>
+        <p:txBody>
+          <a:bodyPr rtlCol="0" anchor="ctr" wrap="square" lIns="45720" rIns="45720" tIns="22860" bIns="22860"/>
+          <a:lstStyle/>
+          <a:p>
+            <a:pPr algn="ctr">
+              <a:defRPr sz="1200" b="0">
+                <a:solidFill>
+                  <a:srgbClr val="111111"/>
+                </a:solidFill>
+              </a:defRPr>
+            </a:pPr>
+          </a:p>
+        </p:txBody>
+      </p:sp>
+      <p:sp>
+        <p:nvSpPr>
+          <p:cNvPr id="14" name="Rectangle 13"/>
+          <p:cNvSpPr/>
+          <p:nvPr/>
+        </p:nvSpPr>
+        <p:spPr>
+          <a:xfrm>
+            <a:off x="4023360" y="6031382"/>
+            <a:ext cx="566928" cy="442569"/>
+          </a:xfrm>
+          <a:prstGeom prst="rect">
+            <a:avLst/>
+          </a:prstGeom>
+          <a:solidFill>
+            <a:srgbClr val="DBEAFE"/>
+          </a:solidFill>
+          <a:ln w="17780">
+            <a:solidFill>
+              <a:srgbClr val="1F77B4"/>
+            </a:solidFill>
+          </a:ln>
+        </p:spPr>
+        <p:style>
+          <a:lnRef idx="1">
+            <a:schemeClr val="accent1"/>
+          </a:lnRef>
+          <a:fillRef idx="3">
+            <a:schemeClr val="accent1"/>
+          </a:fillRef>
+          <a:effectRef idx="2">
+            <a:schemeClr val="accent1"/>
+          </a:effectRef>
+          <a:fontRef idx="minor">
+            <a:schemeClr val="lt1"/>
+          </a:fontRef>
+        </p:style>
+        <p:txBody>
+          <a:bodyPr rtlCol="0" anchor="ctr" wrap="square" lIns="45720" rIns="45720" tIns="22860" bIns="22860"/>
+          <a:lstStyle/>
+          <a:p>
+            <a:pPr algn="ctr">
+              <a:defRPr sz="1200" b="0">
+                <a:solidFill>
+                  <a:srgbClr val="111111"/>
+                </a:solidFill>
+              </a:defRPr>
+            </a:pPr>
+          </a:p>
+        </p:txBody>
+      </p:sp>
+      <p:sp>
+        <p:nvSpPr>
+          <p:cNvPr id="15" name="TextBox 14"/>
           <p:cNvSpPr txBox="1"/>
           <p:nvPr/>
         </p:nvSpPr>
         <p:spPr>
           <a:xfrm>
-            <a:off x="6400800" y="2487168"/>
-            <a:ext cx="5120640" cy="365760"/>
+            <a:off x="6309360" y="4919472"/>
+            <a:ext cx="5394960" cy="320040"/>
           </a:xfrm>
           <a:prstGeom prst="rect">
             <a:avLst/>
@@ -9876,28 +10854,28 @@
           <a:lstStyle/>
           <a:p>
             <a:pPr algn="l">
-              <a:defRPr sz="1200" b="1">
-                <a:solidFill>
-                  <a:srgbClr val="111111"/>
-                </a:solidFill>
-              </a:defRPr>
-            </a:pPr>
-            <a:r>
-              <a:t>회전 좌표: T′ = (0.60, 0.25, 0.15, 0, 0) — 고유값 수열로 정렬</a:t>
-            </a:r>
-          </a:p>
-        </p:txBody>
-      </p:sp>
-      <p:sp>
-        <p:nvSpPr>
-          <p:cNvPr id="11" name="Rectangle 10"/>
+              <a:defRPr sz="1050" b="1">
+                <a:solidFill>
+                  <a:srgbClr val="D62728"/>
+                </a:solidFill>
+              </a:defRPr>
+            </a:pPr>
+            <a:r>
+              <a:t>회전 좌표: T′ = (0.60, 0.25, 0.15, 0, 0) — hot 2서랍이 85% 커버</a:t>
+            </a:r>
+          </a:p>
+        </p:txBody>
+      </p:sp>
+      <p:sp>
+        <p:nvSpPr>
+          <p:cNvPr id="16" name="Rectangle 15"/>
           <p:cNvSpPr/>
           <p:nvPr/>
         </p:nvSpPr>
         <p:spPr>
           <a:xfrm>
-            <a:off x="6583680" y="2953512"/>
-            <a:ext cx="640080" cy="2304288"/>
+            <a:off x="6492240" y="5266944"/>
+            <a:ext cx="566928" cy="1207008"/>
           </a:xfrm>
           <a:prstGeom prst="rect">
             <a:avLst/>
@@ -9941,14 +10919,14 @@
       </p:sp>
       <p:sp>
         <p:nvSpPr>
-          <p:cNvPr id="12" name="Rectangle 11"/>
+          <p:cNvPr id="17" name="Rectangle 16"/>
           <p:cNvSpPr/>
           <p:nvPr/>
         </p:nvSpPr>
         <p:spPr>
           <a:xfrm>
-            <a:off x="7452360" y="4297680"/>
-            <a:ext cx="640080" cy="960120"/>
+            <a:off x="7269479" y="5971032"/>
+            <a:ext cx="566928" cy="502920"/>
           </a:xfrm>
           <a:prstGeom prst="rect">
             <a:avLst/>
@@ -9992,14 +10970,14 @@
       </p:sp>
       <p:sp>
         <p:nvSpPr>
-          <p:cNvPr id="13" name="Rectangle 12"/>
+          <p:cNvPr id="18" name="Rectangle 17"/>
           <p:cNvSpPr/>
           <p:nvPr/>
         </p:nvSpPr>
         <p:spPr>
           <a:xfrm>
-            <a:off x="8321040" y="4681728"/>
-            <a:ext cx="640080" cy="576072"/>
+            <a:off x="8046719" y="6172200"/>
+            <a:ext cx="566928" cy="301752"/>
           </a:xfrm>
           <a:prstGeom prst="rect">
             <a:avLst/>
@@ -10043,14 +11021,14 @@
       </p:sp>
       <p:sp>
         <p:nvSpPr>
-          <p:cNvPr id="14" name="Rectangle 13"/>
+          <p:cNvPr id="19" name="Rectangle 18"/>
           <p:cNvSpPr/>
           <p:nvPr/>
         </p:nvSpPr>
         <p:spPr>
           <a:xfrm>
-            <a:off x="9189720" y="5211714"/>
-            <a:ext cx="640080" cy="46085"/>
+            <a:off x="8823959" y="6433718"/>
+            <a:ext cx="566928" cy="40233"/>
           </a:xfrm>
           <a:prstGeom prst="rect">
             <a:avLst/>
@@ -10094,14 +11072,14 @@
       </p:sp>
       <p:sp>
         <p:nvSpPr>
-          <p:cNvPr id="15" name="Rectangle 14"/>
+          <p:cNvPr id="20" name="Rectangle 19"/>
           <p:cNvSpPr/>
           <p:nvPr/>
         </p:nvSpPr>
         <p:spPr>
           <a:xfrm>
-            <a:off x="10058400" y="5211714"/>
-            <a:ext cx="640080" cy="46085"/>
+            <a:off x="9601200" y="6433718"/>
+            <a:ext cx="566928" cy="40233"/>
           </a:xfrm>
           <a:prstGeom prst="rect">
             <a:avLst/>
@@ -10140,88 +11118,6 @@
                 </a:solidFill>
               </a:defRPr>
             </a:pPr>
-          </a:p>
-        </p:txBody>
-      </p:sp>
-      <p:sp>
-        <p:nvSpPr>
-          <p:cNvPr id="16" name="TextBox 15"/>
-          <p:cNvSpPr txBox="1"/>
-          <p:nvPr/>
-        </p:nvSpPr>
-        <p:spPr>
-          <a:xfrm>
-            <a:off x="6583680" y="5349240"/>
-            <a:ext cx="4937760" cy="365760"/>
-          </a:xfrm>
-          <a:prstGeom prst="rect">
-            <a:avLst/>
-          </a:prstGeom>
-          <a:noFill/>
-        </p:spPr>
-        <p:txBody>
-          <a:bodyPr wrap="square">
-            <a:spAutoFit/>
-          </a:bodyPr>
-          <a:lstStyle/>
-          <a:p>
-            <a:pPr algn="l">
-              <a:defRPr sz="1100" b="1">
-                <a:solidFill>
-                  <a:srgbClr val="D62728"/>
-                </a:solidFill>
-              </a:defRPr>
-            </a:pPr>
-            <a:r>
-              <a:t>hot = 앞 2서랍이 85% 커버 (원 좌표 최선 44%)</a:t>
-            </a:r>
-          </a:p>
-        </p:txBody>
-      </p:sp>
-      <p:sp>
-        <p:nvSpPr>
-          <p:cNvPr id="17" name="TextBox 16"/>
-          <p:cNvSpPr txBox="1"/>
-          <p:nvPr/>
-        </p:nvSpPr>
-        <p:spPr>
-          <a:xfrm>
-            <a:off x="502920" y="5806440"/>
-            <a:ext cx="11338560" cy="914400"/>
-          </a:xfrm>
-          <a:prstGeom prst="rect">
-            <a:avLst/>
-          </a:prstGeom>
-          <a:noFill/>
-        </p:spPr>
-        <p:txBody>
-          <a:bodyPr wrap="square">
-            <a:spAutoFit/>
-          </a:bodyPr>
-          <a:lstStyle/>
-          <a:p>
-            <a:pPr algn="l">
-              <a:defRPr sz="1300" b="1">
-                <a:solidFill>
-                  <a:srgbClr val="1A365D"/>
-                </a:solidFill>
-              </a:defRPr>
-            </a:pPr>
-            <a:r>
-              <a:t>실측 반전 (E-T1): 크기 통계로 명시 추정한 M의 고유기저는 학습 R과 무상관 (주각 cos 0.44 ≈ 무작위; 시차·열노름·질의에너지 4중 수렴).</a:t>
-            </a:r>
-          </a:p>
-          <a:p>
-            <a:pPr algn="l">
-              <a:defRPr sz="1300" b="1">
-                <a:solidFill>
-                  <a:srgbClr val="1A365D"/>
-                </a:solidFill>
-              </a:defRPr>
-            </a:pPr>
-            <a:r>
-              <a:t>→ 중요도의 자(w)는 '크기'가 아니라 'loss 민감도' — training-free 통계로 대체 불가 = calibration류(GHOST)가 실패하고 end-to-end 학습이 필수인 이유.</a:t>
-            </a:r>
           </a:p>
         </p:txBody>
       </p:sp>
@@ -10273,7 +11169,7 @@
               </a:defRPr>
             </a:pPr>
             <a:r>
-              <a:t>7. 왜 일반화되는가 — 이론이 아니라 실측으로 답한다</a:t>
+              <a:t>7. 정렬의 수학 ② — 중요도 가중 w는 loss의 미분에서 태어난다</a:t>
             </a:r>
           </a:p>
           <a:p>
@@ -10285,45 +11181,497 @@
               </a:defRPr>
             </a:pPr>
             <a:r>
-              <a:t>E-T1: 학습 기저는 어떤 통계와도 다르다 · E-T2: 그런데 도메인을 넘어 이식된다</a:t>
-            </a:r>
-          </a:p>
-        </p:txBody>
-      </p:sp>
-      <p:pic>
-        <p:nvPicPr>
-          <p:cNvPr id="3" name="Picture 2" descr="F5_measured.png"/>
-          <p:cNvPicPr>
-            <a:picLocks noChangeAspect="1"/>
-          </p:cNvPicPr>
-          <p:nvPr/>
-        </p:nvPicPr>
-        <p:blipFill>
-          <a:blip r:embed="rId2"/>
-          <a:stretch>
-            <a:fillRect/>
-          </a:stretch>
-        </p:blipFill>
-        <p:spPr>
-          <a:xfrm>
-            <a:off x="640080" y="1234440"/>
-            <a:ext cx="10972800" cy="4160520"/>
-          </a:xfrm>
-          <a:prstGeom prst="rect">
-            <a:avLst/>
-          </a:prstGeom>
-        </p:spPr>
-      </p:pic>
-      <p:sp>
-        <p:nvSpPr>
-          <p:cNvPr id="4" name="TextBox 3"/>
+              <a:t>forward 수식에 w는 없다 — R을 조각하는 끌은 forward가 아니라 gradient</a:t>
+            </a:r>
+          </a:p>
+        </p:txBody>
+      </p:sp>
+      <p:sp>
+        <p:nvSpPr>
+          <p:cNvPr id="3" name="Rounded Rectangle 2"/>
+          <p:cNvSpPr/>
+          <p:nvPr/>
+        </p:nvSpPr>
+        <p:spPr>
+          <a:xfrm>
+            <a:off x="502920" y="1097280"/>
+            <a:ext cx="7040880" cy="868680"/>
+          </a:xfrm>
+          <a:prstGeom prst="roundRect">
+            <a:avLst/>
+          </a:prstGeom>
+          <a:solidFill>
+            <a:srgbClr val="FFFFFF"/>
+          </a:solidFill>
+          <a:ln w="17780">
+            <a:solidFill>
+              <a:srgbClr val="1F77B4"/>
+            </a:solidFill>
+          </a:ln>
+        </p:spPr>
+        <p:style>
+          <a:lnRef idx="1">
+            <a:schemeClr val="accent1"/>
+          </a:lnRef>
+          <a:fillRef idx="3">
+            <a:schemeClr val="accent1"/>
+          </a:fillRef>
+          <a:effectRef idx="2">
+            <a:schemeClr val="accent1"/>
+          </a:effectRef>
+          <a:fontRef idx="minor">
+            <a:schemeClr val="lt1"/>
+          </a:fontRef>
+        </p:style>
+        <p:txBody>
+          <a:bodyPr rtlCol="0" anchor="ctr" wrap="square" lIns="45720" rIns="45720" tIns="22860" bIns="22860"/>
+          <a:lstStyle/>
+          <a:p>
+            <a:pPr algn="l">
+              <a:defRPr sz="1250" b="0">
+                <a:solidFill>
+                  <a:srgbClr val="111111"/>
+                </a:solidFill>
+              </a:defRPr>
+            </a:pPr>
+            <a:r>
+              <a:t>① 학습이 실행하는 것: 스텝마다 폭 k 추첨 → 뒤 채널(n&gt;k)을 삭제(nested dropout)</a:t>
+            </a:r>
+          </a:p>
+          <a:p>
+            <a:pPr algn="l">
+              <a:defRPr sz="1250" b="0">
+                <a:solidFill>
+                  <a:srgbClr val="111111"/>
+                </a:solidFill>
+              </a:defRPr>
+            </a:pPr>
+            <a:r>
+              <a:t>    또는 낡힘(v4-aware, c 추첨) → 그 상태로 다음 토큰 CE loss를 측정</a:t>
+            </a:r>
+          </a:p>
+        </p:txBody>
+      </p:sp>
+      <p:sp>
+        <p:nvSpPr>
+          <p:cNvPr id="4" name="Down Arrow 3"/>
+          <p:cNvSpPr/>
+          <p:nvPr/>
+        </p:nvSpPr>
+        <p:spPr>
+          <a:xfrm>
+            <a:off x="3840480" y="2039112"/>
+            <a:ext cx="274320" cy="256032"/>
+          </a:xfrm>
+          <a:prstGeom prst="downArrow">
+            <a:avLst/>
+          </a:prstGeom>
+          <a:solidFill>
+            <a:srgbClr val="666666"/>
+          </a:solidFill>
+          <a:ln>
+            <a:noFill/>
+          </a:ln>
+        </p:spPr>
+        <p:style>
+          <a:lnRef idx="1">
+            <a:schemeClr val="accent1"/>
+          </a:lnRef>
+          <a:fillRef idx="3">
+            <a:schemeClr val="accent1"/>
+          </a:fillRef>
+          <a:effectRef idx="2">
+            <a:schemeClr val="accent1"/>
+          </a:effectRef>
+          <a:fontRef idx="minor">
+            <a:schemeClr val="lt1"/>
+          </a:fontRef>
+        </p:style>
+        <p:txBody>
+          <a:bodyPr rtlCol="0" anchor="ctr"/>
+          <a:lstStyle/>
+          <a:p>
+            <a:pPr algn="ctr"/>
+          </a:p>
+        </p:txBody>
+      </p:sp>
+      <p:sp>
+        <p:nvSpPr>
+          <p:cNvPr id="5" name="Rounded Rectangle 4"/>
+          <p:cNvSpPr/>
+          <p:nvPr/>
+        </p:nvSpPr>
+        <p:spPr>
+          <a:xfrm>
+            <a:off x="502920" y="2350008"/>
+            <a:ext cx="7040880" cy="1325880"/>
+          </a:xfrm>
+          <a:prstGeom prst="roundRect">
+            <a:avLst/>
+          </a:prstGeom>
+          <a:solidFill>
+            <a:srgbClr val="FFF7ED"/>
+          </a:solidFill>
+          <a:ln w="17780">
+            <a:solidFill>
+              <a:srgbClr val="C2410C"/>
+            </a:solidFill>
+          </a:ln>
+        </p:spPr>
+        <p:style>
+          <a:lnRef idx="1">
+            <a:schemeClr val="accent1"/>
+          </a:lnRef>
+          <a:fillRef idx="3">
+            <a:schemeClr val="accent1"/>
+          </a:fillRef>
+          <a:effectRef idx="2">
+            <a:schemeClr val="accent1"/>
+          </a:effectRef>
+          <a:fontRef idx="minor">
+            <a:schemeClr val="lt1"/>
+          </a:fontRef>
+        </p:style>
+        <p:txBody>
+          <a:bodyPr rtlCol="0" anchor="ctr" wrap="square" lIns="45720" rIns="45720" tIns="22860" bIns="22860"/>
+          <a:lstStyle/>
+          <a:p>
+            <a:pPr algn="l">
+              <a:defRPr sz="1300" b="1">
+                <a:solidFill>
+                  <a:srgbClr val="111111"/>
+                </a:solidFill>
+              </a:defRPr>
+            </a:pPr>
+            <a:r>
+              <a:t>② 채널 n을 잃었을 때의 loss 변화 (1차 연쇄법칙, g_t = ∂L/∂y_t):</a:t>
+            </a:r>
+          </a:p>
+          <a:p>
+            <a:pPr algn="l">
+              <a:defRPr sz="1300" b="1">
+                <a:solidFill>
+                  <a:srgbClr val="111111"/>
+                </a:solidFill>
+              </a:defRPr>
+            </a:pPr>
+            <a:r>
+              <a:t>ΔL_n ≈ Σ_{t,s}  w_{t,s} · ⟨r_n,B_s⟩⟨r_n,C_t⟩  =  r_nᵀ · M_eff · r_n</a:t>
+            </a:r>
+          </a:p>
+          <a:p>
+            <a:pPr algn="l">
+              <a:defRPr sz="1300" b="1">
+                <a:solidFill>
+                  <a:srgbClr val="111111"/>
+                </a:solidFill>
+              </a:defRPr>
+            </a:pPr>
+            <a:r>
+              <a:t>M_eff = E[ C Bᵀ · w ],      w_{t,s} = A_{s,t} · ⟨ g_t , Δx_s ⟩</a:t>
+            </a:r>
+          </a:p>
+        </p:txBody>
+      </p:sp>
+      <p:sp>
+        <p:nvSpPr>
+          <p:cNvPr id="6" name="Down Arrow 5"/>
+          <p:cNvSpPr/>
+          <p:nvPr/>
+        </p:nvSpPr>
+        <p:spPr>
+          <a:xfrm>
+            <a:off x="3840480" y="3749039"/>
+            <a:ext cx="274320" cy="256032"/>
+          </a:xfrm>
+          <a:prstGeom prst="downArrow">
+            <a:avLst/>
+          </a:prstGeom>
+          <a:solidFill>
+            <a:srgbClr val="666666"/>
+          </a:solidFill>
+          <a:ln>
+            <a:noFill/>
+          </a:ln>
+        </p:spPr>
+        <p:style>
+          <a:lnRef idx="1">
+            <a:schemeClr val="accent1"/>
+          </a:lnRef>
+          <a:fillRef idx="3">
+            <a:schemeClr val="accent1"/>
+          </a:fillRef>
+          <a:effectRef idx="2">
+            <a:schemeClr val="accent1"/>
+          </a:effectRef>
+          <a:fontRef idx="minor">
+            <a:schemeClr val="lt1"/>
+          </a:fontRef>
+        </p:style>
+        <p:txBody>
+          <a:bodyPr rtlCol="0" anchor="ctr"/>
+          <a:lstStyle/>
+          <a:p>
+            <a:pPr algn="ctr"/>
+          </a:p>
+        </p:txBody>
+      </p:sp>
+      <p:sp>
+        <p:nvSpPr>
+          <p:cNvPr id="7" name="Rounded Rectangle 6"/>
+          <p:cNvSpPr/>
+          <p:nvPr/>
+        </p:nvSpPr>
+        <p:spPr>
+          <a:xfrm>
+            <a:off x="502920" y="4059936"/>
+            <a:ext cx="7040880" cy="868680"/>
+          </a:xfrm>
+          <a:prstGeom prst="roundRect">
+            <a:avLst/>
+          </a:prstGeom>
+          <a:solidFill>
+            <a:srgbClr val="D1FAE5"/>
+          </a:solidFill>
+          <a:ln w="17780">
+            <a:solidFill>
+              <a:srgbClr val="047857"/>
+            </a:solidFill>
+          </a:ln>
+        </p:spPr>
+        <p:style>
+          <a:lnRef idx="1">
+            <a:schemeClr val="accent1"/>
+          </a:lnRef>
+          <a:fillRef idx="3">
+            <a:schemeClr val="accent1"/>
+          </a:fillRef>
+          <a:effectRef idx="2">
+            <a:schemeClr val="accent1"/>
+          </a:effectRef>
+          <a:fontRef idx="minor">
+            <a:schemeClr val="lt1"/>
+          </a:fontRef>
+        </p:style>
+        <p:txBody>
+          <a:bodyPr rtlCol="0" anchor="ctr" wrap="square" lIns="45720" rIns="45720" tIns="22860" bIns="22860"/>
+          <a:lstStyle/>
+          <a:p>
+            <a:pPr algn="l">
+              <a:defRPr sz="1250" b="1">
+                <a:solidFill>
+                  <a:srgbClr val="111111"/>
+                </a:solidFill>
+              </a:defRPr>
+            </a:pPr>
+            <a:r>
+              <a:t>③ 폭 추첨의 생존확률 p_1 &gt; p_2 &gt; ··· 아래 기대 loss 최소해:</a:t>
+            </a:r>
+          </a:p>
+          <a:p>
+            <a:pPr algn="l">
+              <a:defRPr sz="1250" b="1">
+                <a:solidFill>
+                  <a:srgbClr val="111111"/>
+                </a:solidFill>
+              </a:defRPr>
+            </a:pPr>
+            <a:r>
+              <a:t>R = M_eff(대칭화)의 고유기저, 고유값 내림차순  (nested dropout → PCA 정리의 연산자판)</a:t>
+            </a:r>
+          </a:p>
+        </p:txBody>
+      </p:sp>
+      <p:sp>
+        <p:nvSpPr>
+          <p:cNvPr id="8" name="Rounded Rectangle 7"/>
+          <p:cNvSpPr/>
+          <p:nvPr/>
+        </p:nvSpPr>
+        <p:spPr>
+          <a:xfrm>
+            <a:off x="7818120" y="1097280"/>
+            <a:ext cx="3840480" cy="3831336"/>
+          </a:xfrm>
+          <a:prstGeom prst="roundRect">
+            <a:avLst/>
+          </a:prstGeom>
+          <a:solidFill>
+            <a:srgbClr val="FFF7ED"/>
+          </a:solidFill>
+          <a:ln w="17780">
+            <a:solidFill>
+              <a:srgbClr val="C2410C"/>
+            </a:solidFill>
+          </a:ln>
+        </p:spPr>
+        <p:style>
+          <a:lnRef idx="1">
+            <a:schemeClr val="accent1"/>
+          </a:lnRef>
+          <a:fillRef idx="3">
+            <a:schemeClr val="accent1"/>
+          </a:fillRef>
+          <a:effectRef idx="2">
+            <a:schemeClr val="accent1"/>
+          </a:effectRef>
+          <a:fontRef idx="minor">
+            <a:schemeClr val="lt1"/>
+          </a:fontRef>
+        </p:style>
+        <p:txBody>
+          <a:bodyPr rtlCol="0" anchor="ctr" wrap="square" lIns="45720" rIns="45720" tIns="22860" bIns="22860"/>
+          <a:lstStyle/>
+          <a:p>
+            <a:pPr algn="l">
+              <a:defRPr sz="1200" b="0">
+                <a:solidFill>
+                  <a:srgbClr val="111111"/>
+                </a:solidFill>
+              </a:defRPr>
+            </a:pPr>
+            <a:r>
+              <a:t>w의 정체 — 사건(s→t)마다 스칼라</a:t>
+            </a:r>
+          </a:p>
+          <a:p>
+            <a:pPr algn="l">
+              <a:defRPr sz="1200" b="0">
+                <a:solidFill>
+                  <a:srgbClr val="111111"/>
+                </a:solidFill>
+              </a:defRPr>
+            </a:pPr>
+          </a:p>
+          <a:p>
+            <a:pPr algn="l">
+              <a:defRPr sz="1200" b="0">
+                <a:solidFill>
+                  <a:srgbClr val="111111"/>
+                </a:solidFill>
+              </a:defRPr>
+            </a:pPr>
+            <a:r>
+              <a:t>=  감쇠 생존율  A_{s,t}</a:t>
+            </a:r>
+          </a:p>
+          <a:p>
+            <a:pPr algn="l">
+              <a:defRPr sz="1200" b="0">
+                <a:solidFill>
+                  <a:srgbClr val="111111"/>
+                </a:solidFill>
+              </a:defRPr>
+            </a:pPr>
+            <a:r>
+              <a:t>×  값의 크기  Δx_s</a:t>
+            </a:r>
+          </a:p>
+          <a:p>
+            <a:pPr algn="l">
+              <a:defRPr sz="1200" b="0">
+                <a:solidFill>
+                  <a:srgbClr val="111111"/>
+                </a:solidFill>
+              </a:defRPr>
+            </a:pPr>
+            <a:r>
+              <a:t>×  loss 민감도  ∂L/∂y_t</a:t>
+            </a:r>
+          </a:p>
+          <a:p>
+            <a:pPr algn="l">
+              <a:defRPr sz="1200" b="0">
+                <a:solidFill>
+                  <a:srgbClr val="111111"/>
+                </a:solidFill>
+              </a:defRPr>
+            </a:pPr>
+          </a:p>
+          <a:p>
+            <a:pPr algn="l">
+              <a:defRPr sz="1200" b="0">
+                <a:solidFill>
+                  <a:srgbClr val="111111"/>
+                </a:solidFill>
+              </a:defRPr>
+            </a:pPr>
+            <a:r>
+              <a:t>· 새로 도입한 가정이 아니라</a:t>
+            </a:r>
+          </a:p>
+          <a:p>
+            <a:pPr algn="l">
+              <a:defRPr sz="1200" b="0">
+                <a:solidFill>
+                  <a:srgbClr val="111111"/>
+                </a:solidFill>
+              </a:defRPr>
+            </a:pPr>
+            <a:r>
+              <a:t>  연쇄법칙의 '나머지 인자들'</a:t>
+            </a:r>
+          </a:p>
+          <a:p>
+            <a:pPr algn="l">
+              <a:defRPr sz="1200" b="0">
+                <a:solidFill>
+                  <a:srgbClr val="111111"/>
+                </a:solidFill>
+              </a:defRPr>
+            </a:pPr>
+            <a:r>
+              <a:t>· 아무도 입력·저장하지 않음 —</a:t>
+            </a:r>
+          </a:p>
+          <a:p>
+            <a:pPr algn="l">
+              <a:defRPr sz="1200" b="0">
+                <a:solidFill>
+                  <a:srgbClr val="111111"/>
+                </a:solidFill>
+              </a:defRPr>
+            </a:pPr>
+            <a:r>
+              <a:t>  backprop이 매 스텝 자동으로 곱함</a:t>
+            </a:r>
+          </a:p>
+          <a:p>
+            <a:pPr algn="l">
+              <a:defRPr sz="1200" b="0">
+                <a:solidFill>
+                  <a:srgbClr val="111111"/>
+                </a:solidFill>
+              </a:defRPr>
+            </a:pPr>
+            <a:r>
+              <a:t>· 크기 통계 M = E[CBᵀ]는</a:t>
+            </a:r>
+          </a:p>
+          <a:p>
+            <a:pPr algn="l">
+              <a:defRPr sz="1200" b="0">
+                <a:solidFill>
+                  <a:srgbClr val="111111"/>
+                </a:solidFill>
+              </a:defRPr>
+            </a:pPr>
+            <a:r>
+              <a:t>  w ≡ 1로 잊어버린 근사</a:t>
+            </a:r>
+          </a:p>
+        </p:txBody>
+      </p:sp>
+      <p:sp>
+        <p:nvSpPr>
+          <p:cNvPr id="9" name="TextBox 8"/>
           <p:cNvSpPr txBox="1"/>
           <p:nvPr/>
         </p:nvSpPr>
         <p:spPr>
           <a:xfrm>
-            <a:off x="640080" y="5532120"/>
-            <a:ext cx="10972800" cy="1097280"/>
+            <a:off x="502920" y="5257800"/>
+            <a:ext cx="11338560" cy="1280160"/>
           </a:xfrm>
           <a:prstGeom prst="rect">
             <a:avLst/>
@@ -10337,26 +11685,26 @@
           <a:lstStyle/>
           <a:p>
             <a:pPr algn="l">
-              <a:defRPr sz="1300" b="0">
-                <a:solidFill>
-                  <a:srgbClr val="111111"/>
-                </a:solidFill>
-              </a:defRPr>
-            </a:pPr>
-            <a:r>
-              <a:t>왼쪽: 학습 R의 hot 부분공간 vs 명시 통계 고유공간 — 무작위 수준 (중요도는 loss가 정의).</a:t>
+              <a:defRPr sz="1300" b="1">
+                <a:solidFill>
+                  <a:srgbClr val="1A365D"/>
+                </a:solidFill>
+              </a:defRPr>
+            </a:pPr>
+            <a:r>
+              <a:t>실측 반전 (E-T1): w≡1 근사(계산 가능한 크기 M)의 고유기저는 학습 R과 무상관 (주각 cos 0.44 ≈ 무작위; 시차·열노름·질의에너지 4중 수렴).</a:t>
             </a:r>
           </a:p>
           <a:p>
             <a:pPr algn="l">
-              <a:defRPr sz="1300" b="0">
-                <a:solidFill>
-                  <a:srgbClr val="111111"/>
-                </a:solidFill>
-              </a:defRPr>
-            </a:pPr>
-            <a:r>
-              <a:t>오른쪽: 같은 R 하나의 절단세(ppl 세율) 곡선이 wiki/수학/코드에서 겹침(k16: 1.26/1.31/1.27×) — calibration 순열은 자기 폭 밖 절벽(17~36×).</a:t>
+              <a:defRPr sz="1300" b="1">
+                <a:solidFill>
+                  <a:srgbClr val="1A365D"/>
+                </a:solidFill>
+              </a:defRPr>
+            </a:pPr>
+            <a:r>
+              <a:t>→ w는 보정이 아니라 지배 인자 — 중요도는 loss가 정의하므로 training-free 통계(calibration류·GHOST)로 대체 불가 = end-to-end 학습이 필수인 이유.</a:t>
             </a:r>
           </a:p>
         </p:txBody>
@@ -10409,7 +11757,7 @@
               </a:defRPr>
             </a:pPr>
             <a:r>
-              <a:t>8. 학습 방법론 — '티어링 실행권'을 사는 3요소</a:t>
+              <a:t>8. 왜 일반화되는가 — 이론이 아니라 실측으로 답한다</a:t>
             </a:r>
           </a:p>
           <a:p>
@@ -10421,451 +11769,45 @@
               </a:defRPr>
             </a:pPr>
             <a:r>
-              <a:t>총 수 GPU-시간, 백본 동결, R만 학습</a:t>
-            </a:r>
-          </a:p>
-        </p:txBody>
-      </p:sp>
-      <p:sp>
-        <p:nvSpPr>
-          <p:cNvPr id="3" name="Rounded Rectangle 2"/>
-          <p:cNvSpPr/>
-          <p:nvPr/>
-        </p:nvSpPr>
-        <p:spPr>
-          <a:xfrm>
-            <a:off x="640080" y="1325880"/>
-            <a:ext cx="3566160" cy="1737360"/>
-          </a:xfrm>
-          <a:prstGeom prst="roundRect">
-            <a:avLst/>
-          </a:prstGeom>
-          <a:solidFill>
-            <a:srgbClr val="FFF7ED"/>
-          </a:solidFill>
-          <a:ln w="17780">
-            <a:solidFill>
-              <a:srgbClr val="C2410C"/>
-            </a:solidFill>
-          </a:ln>
-        </p:spPr>
-        <p:style>
-          <a:lnRef idx="1">
-            <a:schemeClr val="accent1"/>
-          </a:lnRef>
-          <a:fillRef idx="3">
-            <a:schemeClr val="accent1"/>
-          </a:fillRef>
-          <a:effectRef idx="2">
-            <a:schemeClr val="accent1"/>
-          </a:effectRef>
-          <a:fontRef idx="minor">
-            <a:schemeClr val="lt1"/>
-          </a:fontRef>
-        </p:style>
-        <p:txBody>
-          <a:bodyPr rtlCol="0" anchor="ctr" wrap="square" lIns="45720" rIns="45720" tIns="22860" bIns="22860"/>
-          <a:lstStyle/>
-          <a:p>
-            <a:pPr algn="ctr">
-              <a:defRPr sz="1200" b="0">
-                <a:solidFill>
-                  <a:srgbClr val="111111"/>
-                </a:solidFill>
-              </a:defRPr>
-            </a:pPr>
-            <a:r>
-              <a:t>① Nested 폭 메뉴</a:t>
-            </a:r>
-          </a:p>
-          <a:p>
-            <a:pPr algn="ctr">
-              <a:defRPr sz="1200" b="0">
-                <a:solidFill>
-                  <a:srgbClr val="111111"/>
-                </a:solidFill>
-              </a:defRPr>
-            </a:pPr>
-            <a:r>
-              <a:t>(정렬을 만드는 힘)</a:t>
-            </a:r>
-          </a:p>
-          <a:p>
-            <a:pPr algn="ctr">
-              <a:defRPr sz="1200" b="0">
-                <a:solidFill>
-                  <a:srgbClr val="111111"/>
-                </a:solidFill>
-              </a:defRPr>
-            </a:pPr>
-          </a:p>
-          <a:p>
-            <a:pPr algn="ctr">
-              <a:defRPr sz="1200" b="0">
-                <a:solidFill>
-                  <a:srgbClr val="111111"/>
-                </a:solidFill>
-              </a:defRPr>
-            </a:pPr>
-            <a:r>
-              <a:t>스텝마다 폭 k ∈ {16,32,64,128} 추첨</a:t>
-            </a:r>
-          </a:p>
-          <a:p>
-            <a:pPr algn="ctr">
-              <a:defRPr sz="1200" b="0">
-                <a:solidFill>
-                  <a:srgbClr val="111111"/>
-                </a:solidFill>
-              </a:defRPr>
-            </a:pPr>
-            <a:r>
-              <a:t>→ 앞 좌표일수록 자주 loss에 노출</a:t>
-            </a:r>
-          </a:p>
-          <a:p>
-            <a:pPr algn="ctr">
-              <a:defRPr sz="1200" b="0">
-                <a:solidFill>
-                  <a:srgbClr val="111111"/>
-                </a:solidFill>
-              </a:defRPr>
-            </a:pPr>
-            <a:r>
-              <a:t>= 암묵적 '중요도 투표'</a:t>
-            </a:r>
-          </a:p>
-        </p:txBody>
-      </p:sp>
-      <p:sp>
-        <p:nvSpPr>
-          <p:cNvPr id="4" name="Rounded Rectangle 3"/>
-          <p:cNvSpPr/>
-          <p:nvPr/>
-        </p:nvSpPr>
-        <p:spPr>
-          <a:xfrm>
-            <a:off x="4389120" y="1325880"/>
-            <a:ext cx="3566160" cy="1737360"/>
-          </a:xfrm>
-          <a:prstGeom prst="roundRect">
-            <a:avLst/>
-          </a:prstGeom>
-          <a:solidFill>
-            <a:srgbClr val="DBEAFE"/>
-          </a:solidFill>
-          <a:ln w="17780">
-            <a:solidFill>
-              <a:srgbClr val="1F77B4"/>
-            </a:solidFill>
-          </a:ln>
-        </p:spPr>
-        <p:style>
-          <a:lnRef idx="1">
-            <a:schemeClr val="accent1"/>
-          </a:lnRef>
-          <a:fillRef idx="3">
-            <a:schemeClr val="accent1"/>
-          </a:fillRef>
-          <a:effectRef idx="2">
-            <a:schemeClr val="accent1"/>
-          </a:effectRef>
-          <a:fontRef idx="minor">
-            <a:schemeClr val="lt1"/>
-          </a:fontRef>
-        </p:style>
-        <p:txBody>
-          <a:bodyPr rtlCol="0" anchor="ctr" wrap="square" lIns="45720" rIns="45720" tIns="22860" bIns="22860"/>
-          <a:lstStyle/>
-          <a:p>
-            <a:pPr algn="ctr">
-              <a:defRPr sz="1200" b="0">
-                <a:solidFill>
-                  <a:srgbClr val="111111"/>
-                </a:solidFill>
-              </a:defRPr>
-            </a:pPr>
-            <a:r>
-              <a:t>② v4-aware 학습</a:t>
-            </a:r>
-          </a:p>
-          <a:p>
-            <a:pPr algn="ctr">
-              <a:defRPr sz="1200" b="0">
-                <a:solidFill>
-                  <a:srgbClr val="111111"/>
-                </a:solidFill>
-              </a:defRPr>
-            </a:pPr>
-            <a:r>
-              <a:t>(staleness 내성)</a:t>
-            </a:r>
-          </a:p>
-          <a:p>
-            <a:pPr algn="ctr">
-              <a:defRPr sz="1200" b="0">
-                <a:solidFill>
-                  <a:srgbClr val="111111"/>
-                </a:solidFill>
-              </a:defRPr>
-            </a:pPr>
-          </a:p>
-          <a:p>
-            <a:pPr algn="ctr">
-              <a:defRPr sz="1200" b="0">
-                <a:solidFill>
-                  <a:srgbClr val="111111"/>
-                </a:solidFill>
-              </a:defRPr>
-            </a:pPr>
-            <a:r>
-              <a:t>스텝의 절반을 tiered forward로</a:t>
-            </a:r>
-          </a:p>
-          <a:p>
-            <a:pPr algn="ctr">
-              <a:defRPr sz="1200" b="0">
-                <a:solidFill>
-                  <a:srgbClr val="111111"/>
-                </a:solidFill>
-              </a:defRPr>
-            </a:pPr>
-            <a:r>
-              <a:t>(c ∈ {4..64} 추첨)</a:t>
-            </a:r>
-          </a:p>
-          <a:p>
-            <a:pPr algn="ctr">
-              <a:defRPr sz="1200" b="0">
-                <a:solidFill>
-                  <a:srgbClr val="111111"/>
-                </a:solidFill>
-              </a:defRPr>
-            </a:pPr>
-            <a:r>
-              <a:t>→ 모델이 낡은 cold 읽기에 적응</a:t>
-            </a:r>
-          </a:p>
-        </p:txBody>
-      </p:sp>
-      <p:sp>
-        <p:nvSpPr>
-          <p:cNvPr id="5" name="Rounded Rectangle 4"/>
-          <p:cNvSpPr/>
-          <p:nvPr/>
-        </p:nvSpPr>
-        <p:spPr>
-          <a:xfrm>
-            <a:off x="8138160" y="1325880"/>
-            <a:ext cx="3566160" cy="1737360"/>
-          </a:xfrm>
-          <a:prstGeom prst="roundRect">
-            <a:avLst/>
-          </a:prstGeom>
-          <a:solidFill>
-            <a:srgbClr val="D1FAE5"/>
-          </a:solidFill>
-          <a:ln w="17780">
-            <a:solidFill>
-              <a:srgbClr val="047857"/>
-            </a:solidFill>
-          </a:ln>
-        </p:spPr>
-        <p:style>
-          <a:lnRef idx="1">
-            <a:schemeClr val="accent1"/>
-          </a:lnRef>
-          <a:fillRef idx="3">
-            <a:schemeClr val="accent1"/>
-          </a:fillRef>
-          <a:effectRef idx="2">
-            <a:schemeClr val="accent1"/>
-          </a:effectRef>
-          <a:fontRef idx="minor">
-            <a:schemeClr val="lt1"/>
-          </a:fontRef>
-        </p:style>
-        <p:txBody>
-          <a:bodyPr rtlCol="0" anchor="ctr" wrap="square" lIns="45720" rIns="45720" tIns="22860" bIns="22860"/>
-          <a:lstStyle/>
-          <a:p>
-            <a:pPr algn="ctr">
-              <a:defRPr sz="1200" b="0">
-                <a:solidFill>
-                  <a:srgbClr val="111111"/>
-                </a:solidFill>
-              </a:defRPr>
-            </a:pPr>
-            <a:r>
-              <a:t>③ QR retraction</a:t>
-            </a:r>
-          </a:p>
-          <a:p>
-            <a:pPr algn="ctr">
-              <a:defRPr sz="1200" b="0">
-                <a:solidFill>
-                  <a:srgbClr val="111111"/>
-                </a:solidFill>
-              </a:defRPr>
-            </a:pPr>
-            <a:r>
-              <a:t>(무손실 보장 유지)</a:t>
-            </a:r>
-          </a:p>
-          <a:p>
-            <a:pPr algn="ctr">
-              <a:defRPr sz="1200" b="0">
-                <a:solidFill>
-                  <a:srgbClr val="111111"/>
-                </a:solidFill>
-              </a:defRPr>
-            </a:pPr>
-          </a:p>
-          <a:p>
-            <a:pPr algn="ctr">
-              <a:defRPr sz="1200" b="0">
-                <a:solidFill>
-                  <a:srgbClr val="111111"/>
-                </a:solidFill>
-              </a:defRPr>
-            </a:pPr>
-            <a:r>
-              <a:t>매 스텝 R을 직교 다양체로 사영</a:t>
-            </a:r>
-          </a:p>
-          <a:p>
-            <a:pPr algn="ctr">
-              <a:defRPr sz="1200" b="0">
-                <a:solidFill>
-                  <a:srgbClr val="111111"/>
-                </a:solidFill>
-              </a:defRPr>
-            </a:pPr>
-            <a:r>
-              <a:t>→ 명제 1의 전제(RᵀR=I)가</a:t>
-            </a:r>
-          </a:p>
-          <a:p>
-            <a:pPr algn="ctr">
-              <a:defRPr sz="1200" b="0">
-                <a:solidFill>
-                  <a:srgbClr val="111111"/>
-                </a:solidFill>
-              </a:defRPr>
-            </a:pPr>
-            <a:r>
-              <a:t>학습 내내 정확히 성립</a:t>
-            </a:r>
-          </a:p>
-        </p:txBody>
-      </p:sp>
-      <p:sp>
-        <p:nvSpPr>
-          <p:cNvPr id="6" name="Down Arrow 5"/>
-          <p:cNvSpPr/>
-          <p:nvPr/>
-        </p:nvSpPr>
-        <p:spPr>
-          <a:xfrm>
-            <a:off x="5943600" y="3200400"/>
-            <a:ext cx="274320" cy="457200"/>
-          </a:xfrm>
-          <a:prstGeom prst="downArrow">
-            <a:avLst/>
-          </a:prstGeom>
-          <a:solidFill>
-            <a:srgbClr val="666666"/>
-          </a:solidFill>
-          <a:ln>
-            <a:noFill/>
-          </a:ln>
-        </p:spPr>
-        <p:style>
-          <a:lnRef idx="1">
-            <a:schemeClr val="accent1"/>
-          </a:lnRef>
-          <a:fillRef idx="3">
-            <a:schemeClr val="accent1"/>
-          </a:fillRef>
-          <a:effectRef idx="2">
-            <a:schemeClr val="accent1"/>
-          </a:effectRef>
-          <a:fontRef idx="minor">
-            <a:schemeClr val="lt1"/>
-          </a:fontRef>
-        </p:style>
-        <p:txBody>
-          <a:bodyPr rtlCol="0" anchor="ctr"/>
-          <a:lstStyle/>
-          <a:p>
-            <a:pPr algn="ctr"/>
-          </a:p>
-        </p:txBody>
-      </p:sp>
-      <p:sp>
-        <p:nvSpPr>
-          <p:cNvPr id="7" name="Rounded Rectangle 6"/>
-          <p:cNvSpPr/>
-          <p:nvPr/>
-        </p:nvSpPr>
-        <p:spPr>
-          <a:xfrm>
-            <a:off x="640080" y="3794760"/>
-            <a:ext cx="11064240" cy="868680"/>
-          </a:xfrm>
-          <a:prstGeom prst="roundRect">
-            <a:avLst/>
-          </a:prstGeom>
-          <a:solidFill>
-            <a:srgbClr val="D1FAE5"/>
-          </a:solidFill>
-          <a:ln w="17780">
-            <a:solidFill>
-              <a:srgbClr val="047857"/>
-            </a:solidFill>
-          </a:ln>
-        </p:spPr>
-        <p:style>
-          <a:lnRef idx="1">
-            <a:schemeClr val="accent1"/>
-          </a:lnRef>
-          <a:fillRef idx="3">
-            <a:schemeClr val="accent1"/>
-          </a:fillRef>
-          <a:effectRef idx="2">
-            <a:schemeClr val="accent1"/>
-          </a:effectRef>
-          <a:fontRef idx="minor">
-            <a:schemeClr val="lt1"/>
-          </a:fontRef>
-        </p:style>
-        <p:txBody>
-          <a:bodyPr rtlCol="0" anchor="ctr" wrap="square" lIns="45720" rIns="45720" tIns="22860" bIns="22860"/>
-          <a:lstStyle/>
-          <a:p>
-            <a:pPr algn="ctr">
-              <a:defRPr sz="1350" b="1">
-                <a:solidFill>
-                  <a:srgbClr val="111111"/>
-                </a:solidFill>
-              </a:defRPr>
-            </a:pPr>
-            <a:r>
-              <a:t>장문 CoT 마감 레시피 (longcot2): seqlen 4096 + c4·c8 가중 혼합 — "장문 staleness는 장문으로 가르쳐야" → GSM8K v4-c4 = fresh (+0.4, lossless)</a:t>
-            </a:r>
-          </a:p>
-        </p:txBody>
-      </p:sp>
-      <p:sp>
-        <p:nvSpPr>
-          <p:cNvPr id="8" name="TextBox 7"/>
+              <a:t>E-T1: 학습 기저는 어떤 통계와도 다르다 · E-T2: 그런데 도메인을 넘어 이식된다</a:t>
+            </a:r>
+          </a:p>
+        </p:txBody>
+      </p:sp>
+      <p:pic>
+        <p:nvPicPr>
+          <p:cNvPr id="3" name="Picture 2" descr="F5_measured.png"/>
+          <p:cNvPicPr>
+            <a:picLocks noChangeAspect="1"/>
+          </p:cNvPicPr>
+          <p:nvPr/>
+        </p:nvPicPr>
+        <p:blipFill>
+          <a:blip r:embed="rId2"/>
+          <a:stretch>
+            <a:fillRect/>
+          </a:stretch>
+        </p:blipFill>
+        <p:spPr>
+          <a:xfrm>
+            <a:off x="640080" y="1234440"/>
+            <a:ext cx="10972800" cy="4160520"/>
+          </a:xfrm>
+          <a:prstGeom prst="rect">
+            <a:avLst/>
+          </a:prstGeom>
+        </p:spPr>
+      </p:pic>
+      <p:sp>
+        <p:nvSpPr>
+          <p:cNvPr id="4" name="TextBox 3"/>
           <p:cNvSpPr txBox="1"/>
           <p:nvPr/>
         </p:nvSpPr>
         <p:spPr>
           <a:xfrm>
-            <a:off x="640080" y="4892040"/>
-            <a:ext cx="11064240" cy="1554480"/>
+            <a:off x="640080" y="5532120"/>
+            <a:ext cx="10972800" cy="1097280"/>
           </a:xfrm>
           <a:prstGeom prst="rect">
             <a:avLst/>
@@ -10886,7 +11828,7 @@
               </a:defRPr>
             </a:pPr>
             <a:r>
-              <a:t>학습이 실제로 사는 것 (실측 사슬):</a:t>
+              <a:t>왼쪽: 학습 R의 hot 부분공간 vs 명시 통계 고유공간 — 무작위 수준 (중요도는 loss가 정의).</a:t>
             </a:r>
           </a:p>
           <a:p>
@@ -10898,19 +11840,7 @@
               </a:defRPr>
             </a:pPr>
             <a:r>
-              <a:t>· 학습 없이 티어링만: GSM8K 33.0 (−48.6, 정밀도 무관 붕괴) → 학습 후: 81.6 (= fresh). 실행권 = 학습의 산물.</a:t>
-            </a:r>
-          </a:p>
-          <a:p>
-            <a:pPr algn="l">
-              <a:defRPr sz="1300" b="0">
-                <a:solidFill>
-                  <a:srgbClr val="111111"/>
-                </a:solidFill>
-              </a:defRPr>
-            </a:pPr>
-            <a:r>
-              <a:t>· 함정 2건: full-width 강제 distill은 폭 탄력성 파괴(폭 샘플링 유지 필수) · 단일 도메인(wikitext) 학습은 다운스트림 드리프트(혼합 필수).</a:t>
+              <a:t>오른쪽: 같은 R 하나의 절단세(ppl 세율) 곡선이 wiki/수학/코드에서 겹침(k16: 1.26/1.31/1.27×) — calibration 순열은 자기 폭 밖 절벽(17~36×).</a:t>
             </a:r>
           </a:p>
         </p:txBody>
